--- a/Tilda_101_Deck.pptx
+++ b/Tilda_101_Deck.pptx
@@ -5410,55 +5410,360 @@
 <file path=ppt/slides/slide1.xml><?xml version="1.0" encoding="utf-8"?>
 <p:sld xmlns:a="http://schemas.openxmlformats.org/drawingml/2006/main" xmlns:p="http://schemas.openxmlformats.org/presentationml/2006/main" xmlns:r="http://schemas.openxmlformats.org/officeDocument/2006/relationships">
   <p:cSld>
+    <p:bg>
+      <p:bgPr>
+        <a:solidFill>
+          <a:srgbClr val="042017"/>
+        </a:solidFill>
+      </p:bgPr>
+    </p:bg>
     <p:spTree>
       <p:nvGrpSpPr>
-        <p:cNvPr id="1" name=""/>
+        <p:cNvPr id="54" name="Shape 54"/>
         <p:cNvGrpSpPr/>
         <p:nvPr/>
       </p:nvGrpSpPr>
-      <p:grpSpPr/>
+      <p:grpSpPr>
+        <a:xfrm>
+          <a:off x="0" y="0"/>
+          <a:ext cx="0" cy="0"/>
+          <a:chOff x="0" y="0"/>
+          <a:chExt cx="0" cy="0"/>
+        </a:xfrm>
+      </p:grpSpPr>
       <p:sp>
         <p:nvSpPr>
-          <p:cNvPr id="2" name="Title 1"/>
-          <p:cNvSpPr>
-            <a:spLocks noGrp="1"/>
-          </p:cNvSpPr>
-          <p:nvPr>
-            <p:ph type="ctrTitle"/>
-          </p:nvPr>
+          <p:cNvPr id="55" name="Google Shape;55;p14"/>
+          <p:cNvSpPr txBox="1"/>
+          <p:nvPr/>
         </p:nvSpPr>
-        <p:spPr/>
+        <p:spPr>
+          <a:xfrm>
+            <a:off x="658650" y="1516225"/>
+            <a:ext cx="7125600" cy="900000"/>
+          </a:xfrm>
+          <a:prstGeom prst="rect">
+            <a:avLst/>
+          </a:prstGeom>
+          <a:noFill/>
+          <a:ln>
+            <a:noFill/>
+          </a:ln>
+        </p:spPr>
         <p:txBody>
-          <a:bodyPr/>
+          <a:bodyPr anchorCtr="0" anchor="t" bIns="0" lIns="0" spcFirstLastPara="1" rIns="0" wrap="square" tIns="0">
+            <a:noAutofit/>
+          </a:bodyPr>
           <a:lstStyle/>
           <a:p>
-            <a:r>
-              <a:t>Tilda 101</a:t>
-            </a:r>
+            <a:pPr indent="0" lvl="0" marL="0" rtl="0" algn="l">
+              <a:lnSpc>
+                <a:spcPct val="85000"/>
+              </a:lnSpc>
+              <a:spcBef>
+                <a:spcPts val="0"/>
+              </a:spcBef>
+              <a:spcAft>
+                <a:spcPts val="0"/>
+              </a:spcAft>
+              <a:buNone/>
+            </a:pPr>
+            <a:r>
+              <a:rPr lang="en" sz="3800">
+                <a:solidFill>
+                  <a:srgbClr val="F1E9D6"/>
+                </a:solidFill>
+                <a:latin typeface="Inter SemiBold"/>
+                <a:ea typeface="Inter SemiBold"/>
+                <a:cs typeface="Inter SemiBold"/>
+                <a:sym typeface="Inter SemiBold"/>
+              </a:rPr>
+              <a:t>Presentation titles, </a:t>
+            </a:r>
+            <a:endParaRPr sz="3800">
+              <a:solidFill>
+                <a:srgbClr val="F1E9D6"/>
+              </a:solidFill>
+              <a:latin typeface="Inter SemiBold"/>
+              <a:ea typeface="Inter SemiBold"/>
+              <a:cs typeface="Inter SemiBold"/>
+              <a:sym typeface="Inter SemiBold"/>
+            </a:endParaRPr>
+          </a:p>
+          <a:p>
+            <a:pPr indent="0" lvl="0" marL="0" rtl="0" algn="l">
+              <a:lnSpc>
+                <a:spcPct val="85000"/>
+              </a:lnSpc>
+              <a:spcBef>
+                <a:spcPts val="0"/>
+              </a:spcBef>
+              <a:spcAft>
+                <a:spcPts val="0"/>
+              </a:spcAft>
+              <a:buClr>
+                <a:schemeClr val="dk1"/>
+              </a:buClr>
+              <a:buSzPts val="1100"/>
+              <a:buFont typeface="Arial"/>
+              <a:buNone/>
+            </a:pPr>
+            <a:r>
+              <a:rPr lang="en" sz="3800">
+                <a:solidFill>
+                  <a:srgbClr val="F1E9D6"/>
+                </a:solidFill>
+                <a:latin typeface="Inter SemiBold"/>
+                <a:ea typeface="Inter SemiBold"/>
+                <a:cs typeface="Inter SemiBold"/>
+                <a:sym typeface="Inter SemiBold"/>
+              </a:rPr>
+              <a:t>two lines</a:t>
+            </a:r>
+            <a:endParaRPr sz="3800">
+              <a:solidFill>
+                <a:srgbClr val="F1E9D6"/>
+              </a:solidFill>
+              <a:latin typeface="Inter SemiBold"/>
+              <a:ea typeface="Inter SemiBold"/>
+              <a:cs typeface="Inter SemiBold"/>
+              <a:sym typeface="Inter SemiBold"/>
+            </a:endParaRPr>
+          </a:p>
+          <a:p>
+            <a:pPr indent="0" lvl="0" marL="0" rtl="0" algn="l">
+              <a:lnSpc>
+                <a:spcPct val="85000"/>
+              </a:lnSpc>
+              <a:spcBef>
+                <a:spcPts val="0"/>
+              </a:spcBef>
+              <a:spcAft>
+                <a:spcPts val="0"/>
+              </a:spcAft>
+              <a:buClr>
+                <a:schemeClr val="dk1"/>
+              </a:buClr>
+              <a:buSzPts val="1100"/>
+              <a:buFont typeface="Arial"/>
+              <a:buNone/>
+            </a:pPr>
+            <a:r>
+              <a:t/>
+            </a:r>
+            <a:endParaRPr sz="3800">
+              <a:solidFill>
+                <a:srgbClr val="F1E9D6"/>
+              </a:solidFill>
+              <a:latin typeface="Inter SemiBold"/>
+              <a:ea typeface="Inter SemiBold"/>
+              <a:cs typeface="Inter SemiBold"/>
+              <a:sym typeface="Inter SemiBold"/>
+            </a:endParaRPr>
+          </a:p>
+          <a:p>
+            <a:pPr indent="0" lvl="0" marL="0" rtl="0" algn="l">
+              <a:lnSpc>
+                <a:spcPct val="85000"/>
+              </a:lnSpc>
+              <a:spcBef>
+                <a:spcPts val="0"/>
+              </a:spcBef>
+              <a:spcAft>
+                <a:spcPts val="0"/>
+              </a:spcAft>
+              <a:buNone/>
+            </a:pPr>
+            <a:r>
+              <a:t/>
+            </a:r>
+            <a:endParaRPr sz="3800">
+              <a:solidFill>
+                <a:srgbClr val="F1E9D6"/>
+              </a:solidFill>
+              <a:latin typeface="Inter SemiBold"/>
+              <a:ea typeface="Inter SemiBold"/>
+              <a:cs typeface="Inter SemiBold"/>
+              <a:sym typeface="Inter SemiBold"/>
+            </a:endParaRPr>
           </a:p>
         </p:txBody>
       </p:sp>
       <p:sp>
         <p:nvSpPr>
-          <p:cNvPr id="3" name="Subtitle 2"/>
-          <p:cNvSpPr>
-            <a:spLocks noGrp="1"/>
-          </p:cNvSpPr>
-          <p:nvPr>
-            <p:ph type="subTitle" idx="1"/>
-          </p:nvPr>
+          <p:cNvPr id="56" name="Google Shape;56;p14"/>
+          <p:cNvSpPr txBox="1"/>
+          <p:nvPr/>
         </p:nvSpPr>
-        <p:spPr/>
+        <p:spPr>
+          <a:xfrm>
+            <a:off x="658650" y="2932275"/>
+            <a:ext cx="7125600" cy="200700"/>
+          </a:xfrm>
+          <a:prstGeom prst="rect">
+            <a:avLst/>
+          </a:prstGeom>
+          <a:noFill/>
+          <a:ln>
+            <a:noFill/>
+          </a:ln>
+        </p:spPr>
         <p:txBody>
-          <a:bodyPr/>
+          <a:bodyPr anchorCtr="0" anchor="t" bIns="0" lIns="0" spcFirstLastPara="1" rIns="0" wrap="square" tIns="0">
+            <a:noAutofit/>
+          </a:bodyPr>
           <a:lstStyle/>
           <a:p>
-            <a:r>
-              <a:t>A Non-Engineer's Guide to Dutchie's AI Assistant</a:t>
-            </a:r>
+            <a:pPr indent="0" lvl="0" marL="0" rtl="0" algn="l">
+              <a:lnSpc>
+                <a:spcPct val="85000"/>
+              </a:lnSpc>
+              <a:spcBef>
+                <a:spcPts val="0"/>
+              </a:spcBef>
+              <a:spcAft>
+                <a:spcPts val="0"/>
+              </a:spcAft>
+              <a:buNone/>
+            </a:pPr>
+            <a:r>
+              <a:rPr lang="en">
+                <a:solidFill>
+                  <a:srgbClr val="F1E9D6"/>
+                </a:solidFill>
+                <a:latin typeface="Inter SemiBold"/>
+                <a:ea typeface="Inter SemiBold"/>
+                <a:cs typeface="Inter SemiBold"/>
+                <a:sym typeface="Inter SemiBold"/>
+              </a:rPr>
+              <a:t>Subtitle goes here</a:t>
+            </a:r>
+            <a:endParaRPr>
+              <a:solidFill>
+                <a:srgbClr val="F1E9D6"/>
+              </a:solidFill>
+              <a:latin typeface="Inter SemiBold"/>
+              <a:ea typeface="Inter SemiBold"/>
+              <a:cs typeface="Inter SemiBold"/>
+              <a:sym typeface="Inter SemiBold"/>
+            </a:endParaRPr>
           </a:p>
         </p:txBody>
       </p:sp>
+      <p:pic>
+        <p:nvPicPr>
+          <p:cNvPr id="57" name="Google Shape;57;p14" title="logo-light.png"/>
+          <p:cNvPicPr preferRelativeResize="0"/>
+          <p:nvPr/>
+        </p:nvPicPr>
+        <p:blipFill rotWithShape="1">
+          <a:blip r:embed="rId3">
+            <a:alphaModFix/>
+          </a:blip>
+          <a:srcRect b="60" l="0" r="0" t="70"/>
+          <a:stretch/>
+        </p:blipFill>
+        <p:spPr>
+          <a:xfrm>
+            <a:off x="683765" y="399936"/>
+            <a:ext cx="1305252" cy="304875"/>
+          </a:xfrm>
+          <a:prstGeom prst="rect">
+            <a:avLst/>
+          </a:prstGeom>
+          <a:noFill/>
+          <a:ln>
+            <a:noFill/>
+          </a:ln>
+        </p:spPr>
+      </p:pic>
+      <p:sp>
+        <p:nvSpPr>
+          <p:cNvPr id="58" name="Google Shape;58;p14"/>
+          <p:cNvSpPr txBox="1"/>
+          <p:nvPr/>
+        </p:nvSpPr>
+        <p:spPr>
+          <a:xfrm>
+            <a:off x="683775" y="4584950"/>
+            <a:ext cx="4263600" cy="200700"/>
+          </a:xfrm>
+          <a:prstGeom prst="rect">
+            <a:avLst/>
+          </a:prstGeom>
+          <a:noFill/>
+          <a:ln>
+            <a:noFill/>
+          </a:ln>
+        </p:spPr>
+        <p:txBody>
+          <a:bodyPr anchorCtr="0" anchor="t" bIns="0" lIns="0" spcFirstLastPara="1" rIns="0" wrap="square" tIns="0">
+            <a:noAutofit/>
+          </a:bodyPr>
+          <a:lstStyle/>
+          <a:p>
+            <a:pPr indent="0" lvl="0" marL="0" rtl="0" algn="l">
+              <a:lnSpc>
+                <a:spcPct val="85000"/>
+              </a:lnSpc>
+              <a:spcBef>
+                <a:spcPts val="0"/>
+              </a:spcBef>
+              <a:spcAft>
+                <a:spcPts val="0"/>
+              </a:spcAft>
+              <a:buNone/>
+            </a:pPr>
+            <a:r>
+              <a:rPr lang="en" sz="1200">
+                <a:solidFill>
+                  <a:srgbClr val="F1E8D6"/>
+                </a:solidFill>
+                <a:latin typeface="Inter"/>
+                <a:ea typeface="Inter"/>
+                <a:cs typeface="Inter"/>
+                <a:sym typeface="Inter"/>
+              </a:rPr>
+              <a:t>December 1st, 2025</a:t>
+            </a:r>
+            <a:endParaRPr sz="1200">
+              <a:solidFill>
+                <a:srgbClr val="F1E8D6"/>
+              </a:solidFill>
+              <a:latin typeface="Inter"/>
+              <a:ea typeface="Inter"/>
+              <a:cs typeface="Inter"/>
+              <a:sym typeface="Inter"/>
+            </a:endParaRPr>
+          </a:p>
+        </p:txBody>
+      </p:sp>
+      <p:cxnSp>
+        <p:nvCxnSpPr>
+          <p:cNvPr id="59" name="Google Shape;59;p14"/>
+          <p:cNvCxnSpPr/>
+          <p:nvPr/>
+        </p:nvCxnSpPr>
+        <p:spPr>
+          <a:xfrm>
+            <a:off x="671275" y="2689675"/>
+            <a:ext cx="984300" cy="0"/>
+          </a:xfrm>
+          <a:prstGeom prst="straightConnector1">
+            <a:avLst/>
+          </a:prstGeom>
+          <a:noFill/>
+          <a:ln cap="flat" cmpd="sng" w="19050">
+            <a:solidFill>
+              <a:srgbClr val="6ABA48"/>
+            </a:solidFill>
+            <a:prstDash val="solid"/>
+            <a:round/>
+            <a:headEnd len="med" w="med" type="none"/>
+            <a:tailEnd len="med" w="med" type="none"/>
+          </a:ln>
+        </p:spPr>
+      </p:cxnSp>
     </p:spTree>
   </p:cSld>
   <p:clrMapOvr>
@@ -5470,34 +5775,360 @@
 <file path=ppt/slides/slide10.xml><?xml version="1.0" encoding="utf-8"?>
 <p:sld xmlns:a="http://schemas.openxmlformats.org/drawingml/2006/main" xmlns:p="http://schemas.openxmlformats.org/presentationml/2006/main" xmlns:r="http://schemas.openxmlformats.org/officeDocument/2006/relationships">
   <p:cSld>
+    <p:bg>
+      <p:bgPr>
+        <a:solidFill>
+          <a:srgbClr val="042017"/>
+        </a:solidFill>
+      </p:bgPr>
+    </p:bg>
     <p:spTree>
       <p:nvGrpSpPr>
-        <p:cNvPr id="1" name=""/>
+        <p:cNvPr id="54" name="Shape 54"/>
         <p:cNvGrpSpPr/>
         <p:nvPr/>
       </p:nvGrpSpPr>
-      <p:grpSpPr/>
+      <p:grpSpPr>
+        <a:xfrm>
+          <a:off x="0" y="0"/>
+          <a:ext cx="0" cy="0"/>
+          <a:chOff x="0" y="0"/>
+          <a:chExt cx="0" cy="0"/>
+        </a:xfrm>
+      </p:grpSpPr>
       <p:sp>
         <p:nvSpPr>
-          <p:cNvPr id="2" name="Title 1"/>
-          <p:cNvSpPr>
-            <a:spLocks noGrp="1"/>
-          </p:cNvSpPr>
-          <p:nvPr>
-            <p:ph type="title"/>
-          </p:nvPr>
+          <p:cNvPr id="55" name="Google Shape;55;p14"/>
+          <p:cNvSpPr txBox="1"/>
+          <p:nvPr/>
         </p:nvSpPr>
-        <p:spPr/>
+        <p:spPr>
+          <a:xfrm>
+            <a:off x="658650" y="1516225"/>
+            <a:ext cx="7125600" cy="900000"/>
+          </a:xfrm>
+          <a:prstGeom prst="rect">
+            <a:avLst/>
+          </a:prstGeom>
+          <a:noFill/>
+          <a:ln>
+            <a:noFill/>
+          </a:ln>
+        </p:spPr>
         <p:txBody>
-          <a:bodyPr/>
+          <a:bodyPr anchorCtr="0" anchor="t" bIns="0" lIns="0" spcFirstLastPara="1" rIns="0" wrap="square" tIns="0">
+            <a:noAutofit/>
+          </a:bodyPr>
           <a:lstStyle/>
           <a:p>
-            <a:r>
-              <a:t>What Is Bilda?</a:t>
-            </a:r>
+            <a:pPr indent="0" lvl="0" marL="0" rtl="0" algn="l">
+              <a:lnSpc>
+                <a:spcPct val="85000"/>
+              </a:lnSpc>
+              <a:spcBef>
+                <a:spcPts val="0"/>
+              </a:spcBef>
+              <a:spcAft>
+                <a:spcPts val="0"/>
+              </a:spcAft>
+              <a:buNone/>
+            </a:pPr>
+            <a:r>
+              <a:rPr lang="en" sz="3800">
+                <a:solidFill>
+                  <a:srgbClr val="F1E9D6"/>
+                </a:solidFill>
+                <a:latin typeface="Inter SemiBold"/>
+                <a:ea typeface="Inter SemiBold"/>
+                <a:cs typeface="Inter SemiBold"/>
+                <a:sym typeface="Inter SemiBold"/>
+              </a:rPr>
+              <a:t>Presentation titles, </a:t>
+            </a:r>
+            <a:endParaRPr sz="3800">
+              <a:solidFill>
+                <a:srgbClr val="F1E9D6"/>
+              </a:solidFill>
+              <a:latin typeface="Inter SemiBold"/>
+              <a:ea typeface="Inter SemiBold"/>
+              <a:cs typeface="Inter SemiBold"/>
+              <a:sym typeface="Inter SemiBold"/>
+            </a:endParaRPr>
+          </a:p>
+          <a:p>
+            <a:pPr indent="0" lvl="0" marL="0" rtl="0" algn="l">
+              <a:lnSpc>
+                <a:spcPct val="85000"/>
+              </a:lnSpc>
+              <a:spcBef>
+                <a:spcPts val="0"/>
+              </a:spcBef>
+              <a:spcAft>
+                <a:spcPts val="0"/>
+              </a:spcAft>
+              <a:buClr>
+                <a:schemeClr val="dk1"/>
+              </a:buClr>
+              <a:buSzPts val="1100"/>
+              <a:buFont typeface="Arial"/>
+              <a:buNone/>
+            </a:pPr>
+            <a:r>
+              <a:rPr lang="en" sz="3800">
+                <a:solidFill>
+                  <a:srgbClr val="F1E9D6"/>
+                </a:solidFill>
+                <a:latin typeface="Inter SemiBold"/>
+                <a:ea typeface="Inter SemiBold"/>
+                <a:cs typeface="Inter SemiBold"/>
+                <a:sym typeface="Inter SemiBold"/>
+              </a:rPr>
+              <a:t>two lines</a:t>
+            </a:r>
+            <a:endParaRPr sz="3800">
+              <a:solidFill>
+                <a:srgbClr val="F1E9D6"/>
+              </a:solidFill>
+              <a:latin typeface="Inter SemiBold"/>
+              <a:ea typeface="Inter SemiBold"/>
+              <a:cs typeface="Inter SemiBold"/>
+              <a:sym typeface="Inter SemiBold"/>
+            </a:endParaRPr>
+          </a:p>
+          <a:p>
+            <a:pPr indent="0" lvl="0" marL="0" rtl="0" algn="l">
+              <a:lnSpc>
+                <a:spcPct val="85000"/>
+              </a:lnSpc>
+              <a:spcBef>
+                <a:spcPts val="0"/>
+              </a:spcBef>
+              <a:spcAft>
+                <a:spcPts val="0"/>
+              </a:spcAft>
+              <a:buClr>
+                <a:schemeClr val="dk1"/>
+              </a:buClr>
+              <a:buSzPts val="1100"/>
+              <a:buFont typeface="Arial"/>
+              <a:buNone/>
+            </a:pPr>
+            <a:r>
+              <a:t/>
+            </a:r>
+            <a:endParaRPr sz="3800">
+              <a:solidFill>
+                <a:srgbClr val="F1E9D6"/>
+              </a:solidFill>
+              <a:latin typeface="Inter SemiBold"/>
+              <a:ea typeface="Inter SemiBold"/>
+              <a:cs typeface="Inter SemiBold"/>
+              <a:sym typeface="Inter SemiBold"/>
+            </a:endParaRPr>
+          </a:p>
+          <a:p>
+            <a:pPr indent="0" lvl="0" marL="0" rtl="0" algn="l">
+              <a:lnSpc>
+                <a:spcPct val="85000"/>
+              </a:lnSpc>
+              <a:spcBef>
+                <a:spcPts val="0"/>
+              </a:spcBef>
+              <a:spcAft>
+                <a:spcPts val="0"/>
+              </a:spcAft>
+              <a:buNone/>
+            </a:pPr>
+            <a:r>
+              <a:t/>
+            </a:r>
+            <a:endParaRPr sz="3800">
+              <a:solidFill>
+                <a:srgbClr val="F1E9D6"/>
+              </a:solidFill>
+              <a:latin typeface="Inter SemiBold"/>
+              <a:ea typeface="Inter SemiBold"/>
+              <a:cs typeface="Inter SemiBold"/>
+              <a:sym typeface="Inter SemiBold"/>
+            </a:endParaRPr>
           </a:p>
         </p:txBody>
       </p:sp>
+      <p:sp>
+        <p:nvSpPr>
+          <p:cNvPr id="56" name="Google Shape;56;p14"/>
+          <p:cNvSpPr txBox="1"/>
+          <p:nvPr/>
+        </p:nvSpPr>
+        <p:spPr>
+          <a:xfrm>
+            <a:off x="658650" y="2932275"/>
+            <a:ext cx="7125600" cy="200700"/>
+          </a:xfrm>
+          <a:prstGeom prst="rect">
+            <a:avLst/>
+          </a:prstGeom>
+          <a:noFill/>
+          <a:ln>
+            <a:noFill/>
+          </a:ln>
+        </p:spPr>
+        <p:txBody>
+          <a:bodyPr anchorCtr="0" anchor="t" bIns="0" lIns="0" spcFirstLastPara="1" rIns="0" wrap="square" tIns="0">
+            <a:noAutofit/>
+          </a:bodyPr>
+          <a:lstStyle/>
+          <a:p>
+            <a:pPr indent="0" lvl="0" marL="0" rtl="0" algn="l">
+              <a:lnSpc>
+                <a:spcPct val="85000"/>
+              </a:lnSpc>
+              <a:spcBef>
+                <a:spcPts val="0"/>
+              </a:spcBef>
+              <a:spcAft>
+                <a:spcPts val="0"/>
+              </a:spcAft>
+              <a:buNone/>
+            </a:pPr>
+            <a:r>
+              <a:rPr lang="en">
+                <a:solidFill>
+                  <a:srgbClr val="F1E9D6"/>
+                </a:solidFill>
+                <a:latin typeface="Inter SemiBold"/>
+                <a:ea typeface="Inter SemiBold"/>
+                <a:cs typeface="Inter SemiBold"/>
+                <a:sym typeface="Inter SemiBold"/>
+              </a:rPr>
+              <a:t>Subtitle goes here</a:t>
+            </a:r>
+            <a:endParaRPr>
+              <a:solidFill>
+                <a:srgbClr val="F1E9D6"/>
+              </a:solidFill>
+              <a:latin typeface="Inter SemiBold"/>
+              <a:ea typeface="Inter SemiBold"/>
+              <a:cs typeface="Inter SemiBold"/>
+              <a:sym typeface="Inter SemiBold"/>
+            </a:endParaRPr>
+          </a:p>
+        </p:txBody>
+      </p:sp>
+      <p:pic>
+        <p:nvPicPr>
+          <p:cNvPr id="57" name="Google Shape;57;p14" title="logo-light.png"/>
+          <p:cNvPicPr preferRelativeResize="0"/>
+          <p:nvPr/>
+        </p:nvPicPr>
+        <p:blipFill rotWithShape="1">
+          <a:blip r:embed="rId3">
+            <a:alphaModFix/>
+          </a:blip>
+          <a:srcRect b="60" l="0" r="0" t="70"/>
+          <a:stretch/>
+        </p:blipFill>
+        <p:spPr>
+          <a:xfrm>
+            <a:off x="683765" y="399936"/>
+            <a:ext cx="1305252" cy="304875"/>
+          </a:xfrm>
+          <a:prstGeom prst="rect">
+            <a:avLst/>
+          </a:prstGeom>
+          <a:noFill/>
+          <a:ln>
+            <a:noFill/>
+          </a:ln>
+        </p:spPr>
+      </p:pic>
+      <p:sp>
+        <p:nvSpPr>
+          <p:cNvPr id="58" name="Google Shape;58;p14"/>
+          <p:cNvSpPr txBox="1"/>
+          <p:nvPr/>
+        </p:nvSpPr>
+        <p:spPr>
+          <a:xfrm>
+            <a:off x="683775" y="4584950"/>
+            <a:ext cx="4263600" cy="200700"/>
+          </a:xfrm>
+          <a:prstGeom prst="rect">
+            <a:avLst/>
+          </a:prstGeom>
+          <a:noFill/>
+          <a:ln>
+            <a:noFill/>
+          </a:ln>
+        </p:spPr>
+        <p:txBody>
+          <a:bodyPr anchorCtr="0" anchor="t" bIns="0" lIns="0" spcFirstLastPara="1" rIns="0" wrap="square" tIns="0">
+            <a:noAutofit/>
+          </a:bodyPr>
+          <a:lstStyle/>
+          <a:p>
+            <a:pPr indent="0" lvl="0" marL="0" rtl="0" algn="l">
+              <a:lnSpc>
+                <a:spcPct val="85000"/>
+              </a:lnSpc>
+              <a:spcBef>
+                <a:spcPts val="0"/>
+              </a:spcBef>
+              <a:spcAft>
+                <a:spcPts val="0"/>
+              </a:spcAft>
+              <a:buNone/>
+            </a:pPr>
+            <a:r>
+              <a:rPr lang="en" sz="1200">
+                <a:solidFill>
+                  <a:srgbClr val="F1E8D6"/>
+                </a:solidFill>
+                <a:latin typeface="Inter"/>
+                <a:ea typeface="Inter"/>
+                <a:cs typeface="Inter"/>
+                <a:sym typeface="Inter"/>
+              </a:rPr>
+              <a:t>December 1st, 2025</a:t>
+            </a:r>
+            <a:endParaRPr sz="1200">
+              <a:solidFill>
+                <a:srgbClr val="F1E8D6"/>
+              </a:solidFill>
+              <a:latin typeface="Inter"/>
+              <a:ea typeface="Inter"/>
+              <a:cs typeface="Inter"/>
+              <a:sym typeface="Inter"/>
+            </a:endParaRPr>
+          </a:p>
+        </p:txBody>
+      </p:sp>
+      <p:cxnSp>
+        <p:nvCxnSpPr>
+          <p:cNvPr id="59" name="Google Shape;59;p14"/>
+          <p:cNvCxnSpPr/>
+          <p:nvPr/>
+        </p:nvCxnSpPr>
+        <p:spPr>
+          <a:xfrm>
+            <a:off x="671275" y="2689675"/>
+            <a:ext cx="984300" cy="0"/>
+          </a:xfrm>
+          <a:prstGeom prst="straightConnector1">
+            <a:avLst/>
+          </a:prstGeom>
+          <a:noFill/>
+          <a:ln cap="flat" cmpd="sng" w="19050">
+            <a:solidFill>
+              <a:srgbClr val="6ABA48"/>
+            </a:solidFill>
+            <a:prstDash val="solid"/>
+            <a:round/>
+            <a:headEnd len="med" w="med" type="none"/>
+            <a:tailEnd len="med" w="med" type="none"/>
+          </a:ln>
+        </p:spPr>
+      </p:cxnSp>
     </p:spTree>
   </p:cSld>
   <p:clrMapOvr>
@@ -5509,97 +6140,423 @@
 <file path=ppt/slides/slide11.xml><?xml version="1.0" encoding="utf-8"?>
 <p:sld xmlns:a="http://schemas.openxmlformats.org/drawingml/2006/main" xmlns:p="http://schemas.openxmlformats.org/presentationml/2006/main" xmlns:r="http://schemas.openxmlformats.org/officeDocument/2006/relationships">
   <p:cSld>
+    <p:bg>
+      <p:bgPr>
+        <a:solidFill>
+          <a:srgbClr val="F1E8D6"/>
+        </a:solidFill>
+      </p:bgPr>
+    </p:bg>
     <p:spTree>
       <p:nvGrpSpPr>
-        <p:cNvPr id="1" name=""/>
+        <p:cNvPr id="141" name="Shape 141"/>
         <p:cNvGrpSpPr/>
         <p:nvPr/>
       </p:nvGrpSpPr>
-      <p:grpSpPr/>
+      <p:grpSpPr>
+        <a:xfrm>
+          <a:off x="0" y="0"/>
+          <a:ext cx="0" cy="0"/>
+          <a:chOff x="0" y="0"/>
+          <a:chExt cx="0" cy="0"/>
+        </a:xfrm>
+      </p:grpSpPr>
       <p:sp>
         <p:nvSpPr>
-          <p:cNvPr id="2" name="Title 1"/>
-          <p:cNvSpPr>
-            <a:spLocks noGrp="1"/>
-          </p:cNvSpPr>
-          <p:nvPr>
-            <p:ph type="title"/>
-          </p:nvPr>
+          <p:cNvPr id="142" name="Google Shape;142;p18"/>
+          <p:cNvSpPr txBox="1"/>
+          <p:nvPr/>
         </p:nvSpPr>
-        <p:spPr/>
+        <p:spPr>
+          <a:xfrm>
+            <a:off x="467950" y="623324"/>
+            <a:ext cx="7125600" cy="900000"/>
+          </a:xfrm>
+          <a:prstGeom prst="rect">
+            <a:avLst/>
+          </a:prstGeom>
+          <a:noFill/>
+          <a:ln>
+            <a:noFill/>
+          </a:ln>
+        </p:spPr>
         <p:txBody>
-          <a:bodyPr/>
+          <a:bodyPr anchorCtr="0" anchor="t" bIns="0" lIns="0" spcFirstLastPara="1" rIns="0" wrap="square" tIns="0">
+            <a:noAutofit/>
+          </a:bodyPr>
           <a:lstStyle/>
           <a:p>
-            <a:r>
-              <a:t>Tilda's AI Coding Agent</a:t>
-            </a:r>
+            <a:pPr indent="0" lvl="0" marL="0" rtl="0" algn="l">
+              <a:lnSpc>
+                <a:spcPct val="85000"/>
+              </a:lnSpc>
+              <a:spcBef>
+                <a:spcPts val="0"/>
+              </a:spcBef>
+              <a:spcAft>
+                <a:spcPts val="0"/>
+              </a:spcAft>
+              <a:buClr>
+                <a:schemeClr val="dk1"/>
+              </a:buClr>
+              <a:buSzPts val="1100"/>
+              <a:buFont typeface="Arial"/>
+              <a:buNone/>
+            </a:pPr>
+            <a:r>
+              <a:rPr lang="en" sz="2800">
+                <a:solidFill>
+                  <a:srgbClr val="042017"/>
+                </a:solidFill>
+                <a:latin typeface="Inter SemiBold"/>
+                <a:ea typeface="Inter SemiBold"/>
+                <a:cs typeface="Inter SemiBold"/>
+                <a:sym typeface="Inter SemiBold"/>
+              </a:rPr>
+              <a:t>Title and body text</a:t>
+            </a:r>
+            <a:endParaRPr sz="2800">
+              <a:solidFill>
+                <a:srgbClr val="042017"/>
+              </a:solidFill>
+              <a:latin typeface="Inter SemiBold"/>
+              <a:ea typeface="Inter SemiBold"/>
+              <a:cs typeface="Inter SemiBold"/>
+              <a:sym typeface="Inter SemiBold"/>
+            </a:endParaRPr>
+          </a:p>
+          <a:p>
+            <a:pPr indent="0" lvl="0" marL="0" rtl="0" algn="l">
+              <a:lnSpc>
+                <a:spcPct val="85000"/>
+              </a:lnSpc>
+              <a:spcBef>
+                <a:spcPts val="0"/>
+              </a:spcBef>
+              <a:spcAft>
+                <a:spcPts val="0"/>
+              </a:spcAft>
+              <a:buClr>
+                <a:schemeClr val="dk1"/>
+              </a:buClr>
+              <a:buSzPts val="1100"/>
+              <a:buFont typeface="Arial"/>
+              <a:buNone/>
+            </a:pPr>
+            <a:r>
+              <a:t/>
+            </a:r>
+            <a:endParaRPr sz="2800">
+              <a:solidFill>
+                <a:srgbClr val="042017"/>
+              </a:solidFill>
+              <a:latin typeface="Inter SemiBold"/>
+              <a:ea typeface="Inter SemiBold"/>
+              <a:cs typeface="Inter SemiBold"/>
+              <a:sym typeface="Inter SemiBold"/>
+            </a:endParaRPr>
+          </a:p>
+          <a:p>
+            <a:pPr indent="0" lvl="0" marL="0" rtl="0" algn="l">
+              <a:lnSpc>
+                <a:spcPct val="85000"/>
+              </a:lnSpc>
+              <a:spcBef>
+                <a:spcPts val="0"/>
+              </a:spcBef>
+              <a:spcAft>
+                <a:spcPts val="0"/>
+              </a:spcAft>
+              <a:buNone/>
+            </a:pPr>
+            <a:r>
+              <a:t/>
+            </a:r>
+            <a:endParaRPr sz="2800">
+              <a:solidFill>
+                <a:srgbClr val="042017"/>
+              </a:solidFill>
+              <a:latin typeface="Inter SemiBold"/>
+              <a:ea typeface="Inter SemiBold"/>
+              <a:cs typeface="Inter SemiBold"/>
+              <a:sym typeface="Inter SemiBold"/>
+            </a:endParaRPr>
           </a:p>
         </p:txBody>
       </p:sp>
       <p:sp>
         <p:nvSpPr>
-          <p:cNvPr id="3" name="Text Placeholder 2"/>
-          <p:cNvSpPr>
-            <a:spLocks noGrp="1"/>
-          </p:cNvSpPr>
-          <p:nvPr>
-            <p:ph type="body" idx="1"/>
-          </p:nvPr>
+          <p:cNvPr id="143" name="Google Shape;143;p18"/>
+          <p:cNvSpPr txBox="1"/>
+          <p:nvPr/>
         </p:nvSpPr>
-        <p:spPr/>
+        <p:spPr>
+          <a:xfrm>
+            <a:off x="467950" y="1469674"/>
+            <a:ext cx="7125600" cy="1504200"/>
+          </a:xfrm>
+          <a:prstGeom prst="rect">
+            <a:avLst/>
+          </a:prstGeom>
+          <a:noFill/>
+          <a:ln>
+            <a:noFill/>
+          </a:ln>
+        </p:spPr>
         <p:txBody>
-          <a:bodyPr/>
+          <a:bodyPr anchorCtr="0" anchor="t" bIns="0" lIns="0" spcFirstLastPara="1" rIns="0" wrap="square" tIns="0">
+            <a:noAutofit/>
+          </a:bodyPr>
           <a:lstStyle/>
           <a:p>
-            <a:r>
-              <a:t>Bilda is Tilda's coding counterpart — an AI agent that writes and ships code.</a:t>
-            </a:r>
-          </a:p>
-          <a:p/>
-          <a:p>
-            <a:r>
-              <a:t>The 6-Step 'Game Day' Process:</a:t>
-            </a:r>
-          </a:p>
-          <a:p>
-            <a:r>
-              <a:t>1. Instructions — Bilda receives a task description</a:t>
-            </a:r>
-          </a:p>
-          <a:p>
-            <a:r>
-              <a:t>2. Sandbox — Spins up an isolated dev environment</a:t>
-            </a:r>
-          </a:p>
-          <a:p>
-            <a:r>
-              <a:t>3. Coding — Writes the code changes</a:t>
-            </a:r>
-          </a:p>
-          <a:p>
-            <a:r>
-              <a:t>4. Pull Request — Opens a PR on GitHub</a:t>
-            </a:r>
-          </a:p>
-          <a:p>
-            <a:r>
-              <a:t>5. Review — Human reviews and approves</a:t>
-            </a:r>
-          </a:p>
-          <a:p>
-            <a:r>
-              <a:t>6. Deploy — Code ships to production</a:t>
-            </a:r>
-          </a:p>
-          <a:p/>
-          <a:p>
-            <a:r>
-              <a:t>Bilda never deploys without human approval.</a:t>
-            </a:r>
+            <a:pPr indent="0" lvl="0" marL="0" rtl="0" algn="l">
+              <a:lnSpc>
+                <a:spcPct val="115000"/>
+              </a:lnSpc>
+              <a:spcBef>
+                <a:spcPts val="0"/>
+              </a:spcBef>
+              <a:spcAft>
+                <a:spcPts val="0"/>
+              </a:spcAft>
+              <a:buClr>
+                <a:schemeClr val="dk1"/>
+              </a:buClr>
+              <a:buSzPts val="1100"/>
+              <a:buFont typeface="Arial"/>
+              <a:buNone/>
+            </a:pPr>
+            <a:r>
+              <a:rPr lang="en" sz="1000">
+                <a:solidFill>
+                  <a:srgbClr val="042017"/>
+                </a:solidFill>
+                <a:latin typeface="Inter"/>
+                <a:ea typeface="Inter"/>
+                <a:cs typeface="Inter"/>
+                <a:sym typeface="Inter"/>
+              </a:rPr>
+              <a:t>Lorem ipsum dolor sit amet, consectetur adipiscing elit. Fusce vitae commodo mauris. Nullam malesuada nisl a mollis faucibus. Curabitur tincidunt ligula turpis, sed rhoncus odio fermentum pellentesque. Fusce id augue eu lacus ullamcorper pretium a id risus. Donec ac mauris viverra, imperdiet orci eu, aliquet leo. Vestibulum quis augue nec justo scelerisque ultrices. Nulla posuere, sapien at finibus consectetur, eros turpis luctus quam, et ornare magna magna sit amet mauris. Donec maximus, orci ut vestibulum ultrices, magna sem sollicitudin metus, et aliquam erat felis sit amet dui. In eu libero sit amet quam sollicitudin vehicula vitae quis quam. Etiam sit amet dolor aliquet massa iaculis porta.</a:t>
+            </a:r>
+            <a:endParaRPr sz="1000">
+              <a:solidFill>
+                <a:srgbClr val="042017"/>
+              </a:solidFill>
+              <a:latin typeface="Inter"/>
+              <a:ea typeface="Inter"/>
+              <a:cs typeface="Inter"/>
+              <a:sym typeface="Inter"/>
+            </a:endParaRPr>
+          </a:p>
+          <a:p>
+            <a:pPr indent="0" lvl="0" marL="0" rtl="0" algn="l">
+              <a:lnSpc>
+                <a:spcPct val="115000"/>
+              </a:lnSpc>
+              <a:spcBef>
+                <a:spcPts val="0"/>
+              </a:spcBef>
+              <a:spcAft>
+                <a:spcPts val="0"/>
+              </a:spcAft>
+              <a:buClr>
+                <a:schemeClr val="dk1"/>
+              </a:buClr>
+              <a:buSzPts val="1100"/>
+              <a:buFont typeface="Arial"/>
+              <a:buNone/>
+            </a:pPr>
+            <a:r>
+              <a:t/>
+            </a:r>
+            <a:endParaRPr sz="1000">
+              <a:solidFill>
+                <a:srgbClr val="042017"/>
+              </a:solidFill>
+              <a:latin typeface="Inter"/>
+              <a:ea typeface="Inter"/>
+              <a:cs typeface="Inter"/>
+              <a:sym typeface="Inter"/>
+            </a:endParaRPr>
+          </a:p>
+          <a:p>
+            <a:pPr indent="0" lvl="0" marL="0" rtl="0" algn="l">
+              <a:lnSpc>
+                <a:spcPct val="115000"/>
+              </a:lnSpc>
+              <a:spcBef>
+                <a:spcPts val="0"/>
+              </a:spcBef>
+              <a:spcAft>
+                <a:spcPts val="0"/>
+              </a:spcAft>
+              <a:buNone/>
+            </a:pPr>
+            <a:r>
+              <a:t/>
+            </a:r>
+            <a:endParaRPr sz="1000">
+              <a:solidFill>
+                <a:srgbClr val="042017"/>
+              </a:solidFill>
+              <a:latin typeface="Inter"/>
+              <a:ea typeface="Inter"/>
+              <a:cs typeface="Inter"/>
+              <a:sym typeface="Inter"/>
+            </a:endParaRPr>
           </a:p>
         </p:txBody>
       </p:sp>
+      <p:sp>
+        <p:nvSpPr>
+          <p:cNvPr id="144" name="Google Shape;144;p18"/>
+          <p:cNvSpPr txBox="1"/>
+          <p:nvPr/>
+        </p:nvSpPr>
+        <p:spPr>
+          <a:xfrm>
+            <a:off x="467950" y="339124"/>
+            <a:ext cx="7125600" cy="200700"/>
+          </a:xfrm>
+          <a:prstGeom prst="rect">
+            <a:avLst/>
+          </a:prstGeom>
+          <a:noFill/>
+          <a:ln>
+            <a:noFill/>
+          </a:ln>
+        </p:spPr>
+        <p:txBody>
+          <a:bodyPr anchorCtr="0" anchor="t" bIns="0" lIns="0" spcFirstLastPara="1" rIns="0" wrap="square" tIns="0">
+            <a:noAutofit/>
+          </a:bodyPr>
+          <a:lstStyle/>
+          <a:p>
+            <a:pPr indent="0" lvl="0" marL="0" rtl="0" algn="l">
+              <a:lnSpc>
+                <a:spcPct val="85000"/>
+              </a:lnSpc>
+              <a:spcBef>
+                <a:spcPts val="0"/>
+              </a:spcBef>
+              <a:spcAft>
+                <a:spcPts val="0"/>
+              </a:spcAft>
+              <a:buClr>
+                <a:schemeClr val="dk1"/>
+              </a:buClr>
+              <a:buSzPts val="1100"/>
+              <a:buFont typeface="Arial"/>
+              <a:buNone/>
+            </a:pPr>
+            <a:r>
+              <a:rPr b="1" lang="en" sz="900">
+                <a:solidFill>
+                  <a:srgbClr val="7F7F7F"/>
+                </a:solidFill>
+                <a:latin typeface="Inter"/>
+                <a:ea typeface="Inter"/>
+                <a:cs typeface="Inter"/>
+                <a:sym typeface="Inter"/>
+              </a:rPr>
+              <a:t>EYEBROW HEADING</a:t>
+            </a:r>
+            <a:endParaRPr b="1" sz="900">
+              <a:solidFill>
+                <a:srgbClr val="7F7F7F"/>
+              </a:solidFill>
+              <a:latin typeface="Inter"/>
+              <a:ea typeface="Inter"/>
+              <a:cs typeface="Inter"/>
+              <a:sym typeface="Inter"/>
+            </a:endParaRPr>
+          </a:p>
+          <a:p>
+            <a:pPr indent="0" lvl="0" marL="0" rtl="0" algn="l">
+              <a:lnSpc>
+                <a:spcPct val="85000"/>
+              </a:lnSpc>
+              <a:spcBef>
+                <a:spcPts val="0"/>
+              </a:spcBef>
+              <a:spcAft>
+                <a:spcPts val="0"/>
+              </a:spcAft>
+              <a:buClr>
+                <a:schemeClr val="dk1"/>
+              </a:buClr>
+              <a:buSzPts val="1100"/>
+              <a:buFont typeface="Arial"/>
+              <a:buNone/>
+            </a:pPr>
+            <a:r>
+              <a:t/>
+            </a:r>
+            <a:endParaRPr b="1" sz="900">
+              <a:solidFill>
+                <a:srgbClr val="7F7F7F"/>
+              </a:solidFill>
+              <a:latin typeface="Inter"/>
+              <a:ea typeface="Inter"/>
+              <a:cs typeface="Inter"/>
+              <a:sym typeface="Inter"/>
+            </a:endParaRPr>
+          </a:p>
+          <a:p>
+            <a:pPr indent="0" lvl="0" marL="0" rtl="0" algn="l">
+              <a:lnSpc>
+                <a:spcPct val="85000"/>
+              </a:lnSpc>
+              <a:spcBef>
+                <a:spcPts val="0"/>
+              </a:spcBef>
+              <a:spcAft>
+                <a:spcPts val="0"/>
+              </a:spcAft>
+              <a:buNone/>
+            </a:pPr>
+            <a:r>
+              <a:t/>
+            </a:r>
+            <a:endParaRPr b="1" sz="900">
+              <a:solidFill>
+                <a:srgbClr val="7F7F7F"/>
+              </a:solidFill>
+              <a:latin typeface="Inter"/>
+              <a:ea typeface="Inter"/>
+              <a:cs typeface="Inter"/>
+              <a:sym typeface="Inter"/>
+            </a:endParaRPr>
+          </a:p>
+        </p:txBody>
+      </p:sp>
+      <p:pic>
+        <p:nvPicPr>
+          <p:cNvPr id="145" name="Google Shape;145;p18" title="logo-dark.png"/>
+          <p:cNvPicPr preferRelativeResize="0"/>
+          <p:nvPr/>
+        </p:nvPicPr>
+        <p:blipFill rotWithShape="1">
+          <a:blip r:embed="rId3">
+            <a:alphaModFix/>
+          </a:blip>
+          <a:srcRect b="0" l="40" r="40" t="0"/>
+          <a:stretch/>
+        </p:blipFill>
+        <p:spPr>
+          <a:xfrm>
+            <a:off x="493052" y="4663948"/>
+            <a:ext cx="615327" cy="143725"/>
+          </a:xfrm>
+          <a:prstGeom prst="rect">
+            <a:avLst/>
+          </a:prstGeom>
+          <a:noFill/>
+          <a:ln>
+            <a:noFill/>
+          </a:ln>
+        </p:spPr>
+      </p:pic>
     </p:spTree>
   </p:cSld>
   <p:clrMapOvr>
@@ -5611,34 +6568,360 @@
 <file path=ppt/slides/slide12.xml><?xml version="1.0" encoding="utf-8"?>
 <p:sld xmlns:a="http://schemas.openxmlformats.org/drawingml/2006/main" xmlns:p="http://schemas.openxmlformats.org/presentationml/2006/main" xmlns:r="http://schemas.openxmlformats.org/officeDocument/2006/relationships">
   <p:cSld>
+    <p:bg>
+      <p:bgPr>
+        <a:solidFill>
+          <a:srgbClr val="042017"/>
+        </a:solidFill>
+      </p:bgPr>
+    </p:bg>
     <p:spTree>
       <p:nvGrpSpPr>
-        <p:cNvPr id="1" name=""/>
+        <p:cNvPr id="54" name="Shape 54"/>
         <p:cNvGrpSpPr/>
         <p:nvPr/>
       </p:nvGrpSpPr>
-      <p:grpSpPr/>
+      <p:grpSpPr>
+        <a:xfrm>
+          <a:off x="0" y="0"/>
+          <a:ext cx="0" cy="0"/>
+          <a:chOff x="0" y="0"/>
+          <a:chExt cx="0" cy="0"/>
+        </a:xfrm>
+      </p:grpSpPr>
       <p:sp>
         <p:nvSpPr>
-          <p:cNvPr id="2" name="Title 1"/>
-          <p:cNvSpPr>
-            <a:spLocks noGrp="1"/>
-          </p:cNvSpPr>
-          <p:nvPr>
-            <p:ph type="title"/>
-          </p:nvPr>
+          <p:cNvPr id="55" name="Google Shape;55;p14"/>
+          <p:cNvSpPr txBox="1"/>
+          <p:nvPr/>
         </p:nvSpPr>
-        <p:spPr/>
+        <p:spPr>
+          <a:xfrm>
+            <a:off x="658650" y="1516225"/>
+            <a:ext cx="7125600" cy="900000"/>
+          </a:xfrm>
+          <a:prstGeom prst="rect">
+            <a:avLst/>
+          </a:prstGeom>
+          <a:noFill/>
+          <a:ln>
+            <a:noFill/>
+          </a:ln>
+        </p:spPr>
         <p:txBody>
-          <a:bodyPr/>
+          <a:bodyPr anchorCtr="0" anchor="t" bIns="0" lIns="0" spcFirstLastPara="1" rIns="0" wrap="square" tIns="0">
+            <a:noAutofit/>
+          </a:bodyPr>
           <a:lstStyle/>
           <a:p>
-            <a:r>
-              <a:t>How Does Tilda Learn?</a:t>
-            </a:r>
+            <a:pPr indent="0" lvl="0" marL="0" rtl="0" algn="l">
+              <a:lnSpc>
+                <a:spcPct val="85000"/>
+              </a:lnSpc>
+              <a:spcBef>
+                <a:spcPts val="0"/>
+              </a:spcBef>
+              <a:spcAft>
+                <a:spcPts val="0"/>
+              </a:spcAft>
+              <a:buNone/>
+            </a:pPr>
+            <a:r>
+              <a:rPr lang="en" sz="3800">
+                <a:solidFill>
+                  <a:srgbClr val="F1E9D6"/>
+                </a:solidFill>
+                <a:latin typeface="Inter SemiBold"/>
+                <a:ea typeface="Inter SemiBold"/>
+                <a:cs typeface="Inter SemiBold"/>
+                <a:sym typeface="Inter SemiBold"/>
+              </a:rPr>
+              <a:t>Presentation titles, </a:t>
+            </a:r>
+            <a:endParaRPr sz="3800">
+              <a:solidFill>
+                <a:srgbClr val="F1E9D6"/>
+              </a:solidFill>
+              <a:latin typeface="Inter SemiBold"/>
+              <a:ea typeface="Inter SemiBold"/>
+              <a:cs typeface="Inter SemiBold"/>
+              <a:sym typeface="Inter SemiBold"/>
+            </a:endParaRPr>
+          </a:p>
+          <a:p>
+            <a:pPr indent="0" lvl="0" marL="0" rtl="0" algn="l">
+              <a:lnSpc>
+                <a:spcPct val="85000"/>
+              </a:lnSpc>
+              <a:spcBef>
+                <a:spcPts val="0"/>
+              </a:spcBef>
+              <a:spcAft>
+                <a:spcPts val="0"/>
+              </a:spcAft>
+              <a:buClr>
+                <a:schemeClr val="dk1"/>
+              </a:buClr>
+              <a:buSzPts val="1100"/>
+              <a:buFont typeface="Arial"/>
+              <a:buNone/>
+            </a:pPr>
+            <a:r>
+              <a:rPr lang="en" sz="3800">
+                <a:solidFill>
+                  <a:srgbClr val="F1E9D6"/>
+                </a:solidFill>
+                <a:latin typeface="Inter SemiBold"/>
+                <a:ea typeface="Inter SemiBold"/>
+                <a:cs typeface="Inter SemiBold"/>
+                <a:sym typeface="Inter SemiBold"/>
+              </a:rPr>
+              <a:t>two lines</a:t>
+            </a:r>
+            <a:endParaRPr sz="3800">
+              <a:solidFill>
+                <a:srgbClr val="F1E9D6"/>
+              </a:solidFill>
+              <a:latin typeface="Inter SemiBold"/>
+              <a:ea typeface="Inter SemiBold"/>
+              <a:cs typeface="Inter SemiBold"/>
+              <a:sym typeface="Inter SemiBold"/>
+            </a:endParaRPr>
+          </a:p>
+          <a:p>
+            <a:pPr indent="0" lvl="0" marL="0" rtl="0" algn="l">
+              <a:lnSpc>
+                <a:spcPct val="85000"/>
+              </a:lnSpc>
+              <a:spcBef>
+                <a:spcPts val="0"/>
+              </a:spcBef>
+              <a:spcAft>
+                <a:spcPts val="0"/>
+              </a:spcAft>
+              <a:buClr>
+                <a:schemeClr val="dk1"/>
+              </a:buClr>
+              <a:buSzPts val="1100"/>
+              <a:buFont typeface="Arial"/>
+              <a:buNone/>
+            </a:pPr>
+            <a:r>
+              <a:t/>
+            </a:r>
+            <a:endParaRPr sz="3800">
+              <a:solidFill>
+                <a:srgbClr val="F1E9D6"/>
+              </a:solidFill>
+              <a:latin typeface="Inter SemiBold"/>
+              <a:ea typeface="Inter SemiBold"/>
+              <a:cs typeface="Inter SemiBold"/>
+              <a:sym typeface="Inter SemiBold"/>
+            </a:endParaRPr>
+          </a:p>
+          <a:p>
+            <a:pPr indent="0" lvl="0" marL="0" rtl="0" algn="l">
+              <a:lnSpc>
+                <a:spcPct val="85000"/>
+              </a:lnSpc>
+              <a:spcBef>
+                <a:spcPts val="0"/>
+              </a:spcBef>
+              <a:spcAft>
+                <a:spcPts val="0"/>
+              </a:spcAft>
+              <a:buNone/>
+            </a:pPr>
+            <a:r>
+              <a:t/>
+            </a:r>
+            <a:endParaRPr sz="3800">
+              <a:solidFill>
+                <a:srgbClr val="F1E9D6"/>
+              </a:solidFill>
+              <a:latin typeface="Inter SemiBold"/>
+              <a:ea typeface="Inter SemiBold"/>
+              <a:cs typeface="Inter SemiBold"/>
+              <a:sym typeface="Inter SemiBold"/>
+            </a:endParaRPr>
           </a:p>
         </p:txBody>
       </p:sp>
+      <p:sp>
+        <p:nvSpPr>
+          <p:cNvPr id="56" name="Google Shape;56;p14"/>
+          <p:cNvSpPr txBox="1"/>
+          <p:nvPr/>
+        </p:nvSpPr>
+        <p:spPr>
+          <a:xfrm>
+            <a:off x="658650" y="2932275"/>
+            <a:ext cx="7125600" cy="200700"/>
+          </a:xfrm>
+          <a:prstGeom prst="rect">
+            <a:avLst/>
+          </a:prstGeom>
+          <a:noFill/>
+          <a:ln>
+            <a:noFill/>
+          </a:ln>
+        </p:spPr>
+        <p:txBody>
+          <a:bodyPr anchorCtr="0" anchor="t" bIns="0" lIns="0" spcFirstLastPara="1" rIns="0" wrap="square" tIns="0">
+            <a:noAutofit/>
+          </a:bodyPr>
+          <a:lstStyle/>
+          <a:p>
+            <a:pPr indent="0" lvl="0" marL="0" rtl="0" algn="l">
+              <a:lnSpc>
+                <a:spcPct val="85000"/>
+              </a:lnSpc>
+              <a:spcBef>
+                <a:spcPts val="0"/>
+              </a:spcBef>
+              <a:spcAft>
+                <a:spcPts val="0"/>
+              </a:spcAft>
+              <a:buNone/>
+            </a:pPr>
+            <a:r>
+              <a:rPr lang="en">
+                <a:solidFill>
+                  <a:srgbClr val="F1E9D6"/>
+                </a:solidFill>
+                <a:latin typeface="Inter SemiBold"/>
+                <a:ea typeface="Inter SemiBold"/>
+                <a:cs typeface="Inter SemiBold"/>
+                <a:sym typeface="Inter SemiBold"/>
+              </a:rPr>
+              <a:t>Subtitle goes here</a:t>
+            </a:r>
+            <a:endParaRPr>
+              <a:solidFill>
+                <a:srgbClr val="F1E9D6"/>
+              </a:solidFill>
+              <a:latin typeface="Inter SemiBold"/>
+              <a:ea typeface="Inter SemiBold"/>
+              <a:cs typeface="Inter SemiBold"/>
+              <a:sym typeface="Inter SemiBold"/>
+            </a:endParaRPr>
+          </a:p>
+        </p:txBody>
+      </p:sp>
+      <p:pic>
+        <p:nvPicPr>
+          <p:cNvPr id="57" name="Google Shape;57;p14" title="logo-light.png"/>
+          <p:cNvPicPr preferRelativeResize="0"/>
+          <p:nvPr/>
+        </p:nvPicPr>
+        <p:blipFill rotWithShape="1">
+          <a:blip r:embed="rId3">
+            <a:alphaModFix/>
+          </a:blip>
+          <a:srcRect b="60" l="0" r="0" t="70"/>
+          <a:stretch/>
+        </p:blipFill>
+        <p:spPr>
+          <a:xfrm>
+            <a:off x="683765" y="399936"/>
+            <a:ext cx="1305252" cy="304875"/>
+          </a:xfrm>
+          <a:prstGeom prst="rect">
+            <a:avLst/>
+          </a:prstGeom>
+          <a:noFill/>
+          <a:ln>
+            <a:noFill/>
+          </a:ln>
+        </p:spPr>
+      </p:pic>
+      <p:sp>
+        <p:nvSpPr>
+          <p:cNvPr id="58" name="Google Shape;58;p14"/>
+          <p:cNvSpPr txBox="1"/>
+          <p:nvPr/>
+        </p:nvSpPr>
+        <p:spPr>
+          <a:xfrm>
+            <a:off x="683775" y="4584950"/>
+            <a:ext cx="4263600" cy="200700"/>
+          </a:xfrm>
+          <a:prstGeom prst="rect">
+            <a:avLst/>
+          </a:prstGeom>
+          <a:noFill/>
+          <a:ln>
+            <a:noFill/>
+          </a:ln>
+        </p:spPr>
+        <p:txBody>
+          <a:bodyPr anchorCtr="0" anchor="t" bIns="0" lIns="0" spcFirstLastPara="1" rIns="0" wrap="square" tIns="0">
+            <a:noAutofit/>
+          </a:bodyPr>
+          <a:lstStyle/>
+          <a:p>
+            <a:pPr indent="0" lvl="0" marL="0" rtl="0" algn="l">
+              <a:lnSpc>
+                <a:spcPct val="85000"/>
+              </a:lnSpc>
+              <a:spcBef>
+                <a:spcPts val="0"/>
+              </a:spcBef>
+              <a:spcAft>
+                <a:spcPts val="0"/>
+              </a:spcAft>
+              <a:buNone/>
+            </a:pPr>
+            <a:r>
+              <a:rPr lang="en" sz="1200">
+                <a:solidFill>
+                  <a:srgbClr val="F1E8D6"/>
+                </a:solidFill>
+                <a:latin typeface="Inter"/>
+                <a:ea typeface="Inter"/>
+                <a:cs typeface="Inter"/>
+                <a:sym typeface="Inter"/>
+              </a:rPr>
+              <a:t>December 1st, 2025</a:t>
+            </a:r>
+            <a:endParaRPr sz="1200">
+              <a:solidFill>
+                <a:srgbClr val="F1E8D6"/>
+              </a:solidFill>
+              <a:latin typeface="Inter"/>
+              <a:ea typeface="Inter"/>
+              <a:cs typeface="Inter"/>
+              <a:sym typeface="Inter"/>
+            </a:endParaRPr>
+          </a:p>
+        </p:txBody>
+      </p:sp>
+      <p:cxnSp>
+        <p:nvCxnSpPr>
+          <p:cNvPr id="59" name="Google Shape;59;p14"/>
+          <p:cNvCxnSpPr/>
+          <p:nvPr/>
+        </p:nvCxnSpPr>
+        <p:spPr>
+          <a:xfrm>
+            <a:off x="671275" y="2689675"/>
+            <a:ext cx="984300" cy="0"/>
+          </a:xfrm>
+          <a:prstGeom prst="straightConnector1">
+            <a:avLst/>
+          </a:prstGeom>
+          <a:noFill/>
+          <a:ln cap="flat" cmpd="sng" w="19050">
+            <a:solidFill>
+              <a:srgbClr val="6ABA48"/>
+            </a:solidFill>
+            <a:prstDash val="solid"/>
+            <a:round/>
+            <a:headEnd len="med" w="med" type="none"/>
+            <a:tailEnd len="med" w="med" type="none"/>
+          </a:ln>
+        </p:spPr>
+      </p:cxnSp>
     </p:spTree>
   </p:cSld>
   <p:clrMapOvr>
@@ -5650,97 +6933,423 @@
 <file path=ppt/slides/slide13.xml><?xml version="1.0" encoding="utf-8"?>
 <p:sld xmlns:a="http://schemas.openxmlformats.org/drawingml/2006/main" xmlns:p="http://schemas.openxmlformats.org/presentationml/2006/main" xmlns:r="http://schemas.openxmlformats.org/officeDocument/2006/relationships">
   <p:cSld>
+    <p:bg>
+      <p:bgPr>
+        <a:solidFill>
+          <a:srgbClr val="F1E8D6"/>
+        </a:solidFill>
+      </p:bgPr>
+    </p:bg>
     <p:spTree>
       <p:nvGrpSpPr>
-        <p:cNvPr id="1" name=""/>
+        <p:cNvPr id="141" name="Shape 141"/>
         <p:cNvGrpSpPr/>
         <p:nvPr/>
       </p:nvGrpSpPr>
-      <p:grpSpPr/>
+      <p:grpSpPr>
+        <a:xfrm>
+          <a:off x="0" y="0"/>
+          <a:ext cx="0" cy="0"/>
+          <a:chOff x="0" y="0"/>
+          <a:chExt cx="0" cy="0"/>
+        </a:xfrm>
+      </p:grpSpPr>
       <p:sp>
         <p:nvSpPr>
-          <p:cNvPr id="2" name="Title 1"/>
-          <p:cNvSpPr>
-            <a:spLocks noGrp="1"/>
-          </p:cNvSpPr>
-          <p:nvPr>
-            <p:ph type="title"/>
-          </p:nvPr>
+          <p:cNvPr id="142" name="Google Shape;142;p18"/>
+          <p:cNvSpPr txBox="1"/>
+          <p:nvPr/>
         </p:nvSpPr>
-        <p:spPr/>
+        <p:spPr>
+          <a:xfrm>
+            <a:off x="467950" y="623324"/>
+            <a:ext cx="7125600" cy="900000"/>
+          </a:xfrm>
+          <a:prstGeom prst="rect">
+            <a:avLst/>
+          </a:prstGeom>
+          <a:noFill/>
+          <a:ln>
+            <a:noFill/>
+          </a:ln>
+        </p:spPr>
         <p:txBody>
-          <a:bodyPr/>
+          <a:bodyPr anchorCtr="0" anchor="t" bIns="0" lIns="0" spcFirstLastPara="1" rIns="0" wrap="square" tIns="0">
+            <a:noAutofit/>
+          </a:bodyPr>
           <a:lstStyle/>
           <a:p>
-            <a:r>
-              <a:t>Three Ways Tilda Improves</a:t>
-            </a:r>
+            <a:pPr indent="0" lvl="0" marL="0" rtl="0" algn="l">
+              <a:lnSpc>
+                <a:spcPct val="85000"/>
+              </a:lnSpc>
+              <a:spcBef>
+                <a:spcPts val="0"/>
+              </a:spcBef>
+              <a:spcAft>
+                <a:spcPts val="0"/>
+              </a:spcAft>
+              <a:buClr>
+                <a:schemeClr val="dk1"/>
+              </a:buClr>
+              <a:buSzPts val="1100"/>
+              <a:buFont typeface="Arial"/>
+              <a:buNone/>
+            </a:pPr>
+            <a:r>
+              <a:rPr lang="en" sz="2800">
+                <a:solidFill>
+                  <a:srgbClr val="042017"/>
+                </a:solidFill>
+                <a:latin typeface="Inter SemiBold"/>
+                <a:ea typeface="Inter SemiBold"/>
+                <a:cs typeface="Inter SemiBold"/>
+                <a:sym typeface="Inter SemiBold"/>
+              </a:rPr>
+              <a:t>Title and body text</a:t>
+            </a:r>
+            <a:endParaRPr sz="2800">
+              <a:solidFill>
+                <a:srgbClr val="042017"/>
+              </a:solidFill>
+              <a:latin typeface="Inter SemiBold"/>
+              <a:ea typeface="Inter SemiBold"/>
+              <a:cs typeface="Inter SemiBold"/>
+              <a:sym typeface="Inter SemiBold"/>
+            </a:endParaRPr>
+          </a:p>
+          <a:p>
+            <a:pPr indent="0" lvl="0" marL="0" rtl="0" algn="l">
+              <a:lnSpc>
+                <a:spcPct val="85000"/>
+              </a:lnSpc>
+              <a:spcBef>
+                <a:spcPts val="0"/>
+              </a:spcBef>
+              <a:spcAft>
+                <a:spcPts val="0"/>
+              </a:spcAft>
+              <a:buClr>
+                <a:schemeClr val="dk1"/>
+              </a:buClr>
+              <a:buSzPts val="1100"/>
+              <a:buFont typeface="Arial"/>
+              <a:buNone/>
+            </a:pPr>
+            <a:r>
+              <a:t/>
+            </a:r>
+            <a:endParaRPr sz="2800">
+              <a:solidFill>
+                <a:srgbClr val="042017"/>
+              </a:solidFill>
+              <a:latin typeface="Inter SemiBold"/>
+              <a:ea typeface="Inter SemiBold"/>
+              <a:cs typeface="Inter SemiBold"/>
+              <a:sym typeface="Inter SemiBold"/>
+            </a:endParaRPr>
+          </a:p>
+          <a:p>
+            <a:pPr indent="0" lvl="0" marL="0" rtl="0" algn="l">
+              <a:lnSpc>
+                <a:spcPct val="85000"/>
+              </a:lnSpc>
+              <a:spcBef>
+                <a:spcPts val="0"/>
+              </a:spcBef>
+              <a:spcAft>
+                <a:spcPts val="0"/>
+              </a:spcAft>
+              <a:buNone/>
+            </a:pPr>
+            <a:r>
+              <a:t/>
+            </a:r>
+            <a:endParaRPr sz="2800">
+              <a:solidFill>
+                <a:srgbClr val="042017"/>
+              </a:solidFill>
+              <a:latin typeface="Inter SemiBold"/>
+              <a:ea typeface="Inter SemiBold"/>
+              <a:cs typeface="Inter SemiBold"/>
+              <a:sym typeface="Inter SemiBold"/>
+            </a:endParaRPr>
           </a:p>
         </p:txBody>
       </p:sp>
       <p:sp>
         <p:nvSpPr>
-          <p:cNvPr id="3" name="Text Placeholder 2"/>
-          <p:cNvSpPr>
-            <a:spLocks noGrp="1"/>
-          </p:cNvSpPr>
-          <p:nvPr>
-            <p:ph type="body" idx="1"/>
-          </p:nvPr>
+          <p:cNvPr id="143" name="Google Shape;143;p18"/>
+          <p:cNvSpPr txBox="1"/>
+          <p:nvPr/>
         </p:nvSpPr>
-        <p:spPr/>
+        <p:spPr>
+          <a:xfrm>
+            <a:off x="467950" y="1469674"/>
+            <a:ext cx="7125600" cy="1504200"/>
+          </a:xfrm>
+          <a:prstGeom prst="rect">
+            <a:avLst/>
+          </a:prstGeom>
+          <a:noFill/>
+          <a:ln>
+            <a:noFill/>
+          </a:ln>
+        </p:spPr>
         <p:txBody>
-          <a:bodyPr/>
+          <a:bodyPr anchorCtr="0" anchor="t" bIns="0" lIns="0" spcFirstLastPara="1" rIns="0" wrap="square" tIns="0">
+            <a:noAutofit/>
+          </a:bodyPr>
           <a:lstStyle/>
           <a:p>
-            <a:r>
-              <a:t>1. Memory (Instant)</a:t>
-            </a:r>
-          </a:p>
-          <a:p>
-            <a:r>
-              <a:t>• Tilda remembers facts across conversations</a:t>
-            </a:r>
-          </a:p>
-          <a:p>
-            <a:r>
-              <a:t>• Tell her once, she knows going forward</a:t>
-            </a:r>
-          </a:p>
-          <a:p/>
-          <a:p>
-            <a:r>
-              <a:t>2. Bilda / Code Changes (Hours–Days)</a:t>
-            </a:r>
-          </a:p>
-          <a:p>
-            <a:r>
-              <a:t>• New features and integrations built by Bilda</a:t>
-            </a:r>
-          </a:p>
-          <a:p>
-            <a:r>
-              <a:t>• Reviewed and deployed by engineers</a:t>
-            </a:r>
-          </a:p>
-          <a:p/>
-          <a:p>
-            <a:r>
-              <a:t>3. Skills (Modular)</a:t>
-            </a:r>
-          </a:p>
-          <a:p>
-            <a:r>
-              <a:t>• Pre-built capability packages</a:t>
-            </a:r>
-          </a:p>
-          <a:p>
-            <a:r>
-              <a:t>• Installed like apps — plug and play</a:t>
-            </a:r>
+            <a:pPr indent="0" lvl="0" marL="0" rtl="0" algn="l">
+              <a:lnSpc>
+                <a:spcPct val="115000"/>
+              </a:lnSpc>
+              <a:spcBef>
+                <a:spcPts val="0"/>
+              </a:spcBef>
+              <a:spcAft>
+                <a:spcPts val="0"/>
+              </a:spcAft>
+              <a:buClr>
+                <a:schemeClr val="dk1"/>
+              </a:buClr>
+              <a:buSzPts val="1100"/>
+              <a:buFont typeface="Arial"/>
+              <a:buNone/>
+            </a:pPr>
+            <a:r>
+              <a:rPr lang="en" sz="1000">
+                <a:solidFill>
+                  <a:srgbClr val="042017"/>
+                </a:solidFill>
+                <a:latin typeface="Inter"/>
+                <a:ea typeface="Inter"/>
+                <a:cs typeface="Inter"/>
+                <a:sym typeface="Inter"/>
+              </a:rPr>
+              <a:t>Lorem ipsum dolor sit amet, consectetur adipiscing elit. Fusce vitae commodo mauris. Nullam malesuada nisl a mollis faucibus. Curabitur tincidunt ligula turpis, sed rhoncus odio fermentum pellentesque. Fusce id augue eu lacus ullamcorper pretium a id risus. Donec ac mauris viverra, imperdiet orci eu, aliquet leo. Vestibulum quis augue nec justo scelerisque ultrices. Nulla posuere, sapien at finibus consectetur, eros turpis luctus quam, et ornare magna magna sit amet mauris. Donec maximus, orci ut vestibulum ultrices, magna sem sollicitudin metus, et aliquam erat felis sit amet dui. In eu libero sit amet quam sollicitudin vehicula vitae quis quam. Etiam sit amet dolor aliquet massa iaculis porta.</a:t>
+            </a:r>
+            <a:endParaRPr sz="1000">
+              <a:solidFill>
+                <a:srgbClr val="042017"/>
+              </a:solidFill>
+              <a:latin typeface="Inter"/>
+              <a:ea typeface="Inter"/>
+              <a:cs typeface="Inter"/>
+              <a:sym typeface="Inter"/>
+            </a:endParaRPr>
+          </a:p>
+          <a:p>
+            <a:pPr indent="0" lvl="0" marL="0" rtl="0" algn="l">
+              <a:lnSpc>
+                <a:spcPct val="115000"/>
+              </a:lnSpc>
+              <a:spcBef>
+                <a:spcPts val="0"/>
+              </a:spcBef>
+              <a:spcAft>
+                <a:spcPts val="0"/>
+              </a:spcAft>
+              <a:buClr>
+                <a:schemeClr val="dk1"/>
+              </a:buClr>
+              <a:buSzPts val="1100"/>
+              <a:buFont typeface="Arial"/>
+              <a:buNone/>
+            </a:pPr>
+            <a:r>
+              <a:t/>
+            </a:r>
+            <a:endParaRPr sz="1000">
+              <a:solidFill>
+                <a:srgbClr val="042017"/>
+              </a:solidFill>
+              <a:latin typeface="Inter"/>
+              <a:ea typeface="Inter"/>
+              <a:cs typeface="Inter"/>
+              <a:sym typeface="Inter"/>
+            </a:endParaRPr>
+          </a:p>
+          <a:p>
+            <a:pPr indent="0" lvl="0" marL="0" rtl="0" algn="l">
+              <a:lnSpc>
+                <a:spcPct val="115000"/>
+              </a:lnSpc>
+              <a:spcBef>
+                <a:spcPts val="0"/>
+              </a:spcBef>
+              <a:spcAft>
+                <a:spcPts val="0"/>
+              </a:spcAft>
+              <a:buNone/>
+            </a:pPr>
+            <a:r>
+              <a:t/>
+            </a:r>
+            <a:endParaRPr sz="1000">
+              <a:solidFill>
+                <a:srgbClr val="042017"/>
+              </a:solidFill>
+              <a:latin typeface="Inter"/>
+              <a:ea typeface="Inter"/>
+              <a:cs typeface="Inter"/>
+              <a:sym typeface="Inter"/>
+            </a:endParaRPr>
           </a:p>
         </p:txBody>
       </p:sp>
+      <p:sp>
+        <p:nvSpPr>
+          <p:cNvPr id="144" name="Google Shape;144;p18"/>
+          <p:cNvSpPr txBox="1"/>
+          <p:nvPr/>
+        </p:nvSpPr>
+        <p:spPr>
+          <a:xfrm>
+            <a:off x="467950" y="339124"/>
+            <a:ext cx="7125600" cy="200700"/>
+          </a:xfrm>
+          <a:prstGeom prst="rect">
+            <a:avLst/>
+          </a:prstGeom>
+          <a:noFill/>
+          <a:ln>
+            <a:noFill/>
+          </a:ln>
+        </p:spPr>
+        <p:txBody>
+          <a:bodyPr anchorCtr="0" anchor="t" bIns="0" lIns="0" spcFirstLastPara="1" rIns="0" wrap="square" tIns="0">
+            <a:noAutofit/>
+          </a:bodyPr>
+          <a:lstStyle/>
+          <a:p>
+            <a:pPr indent="0" lvl="0" marL="0" rtl="0" algn="l">
+              <a:lnSpc>
+                <a:spcPct val="85000"/>
+              </a:lnSpc>
+              <a:spcBef>
+                <a:spcPts val="0"/>
+              </a:spcBef>
+              <a:spcAft>
+                <a:spcPts val="0"/>
+              </a:spcAft>
+              <a:buClr>
+                <a:schemeClr val="dk1"/>
+              </a:buClr>
+              <a:buSzPts val="1100"/>
+              <a:buFont typeface="Arial"/>
+              <a:buNone/>
+            </a:pPr>
+            <a:r>
+              <a:rPr b="1" lang="en" sz="900">
+                <a:solidFill>
+                  <a:srgbClr val="7F7F7F"/>
+                </a:solidFill>
+                <a:latin typeface="Inter"/>
+                <a:ea typeface="Inter"/>
+                <a:cs typeface="Inter"/>
+                <a:sym typeface="Inter"/>
+              </a:rPr>
+              <a:t>EYEBROW HEADING</a:t>
+            </a:r>
+            <a:endParaRPr b="1" sz="900">
+              <a:solidFill>
+                <a:srgbClr val="7F7F7F"/>
+              </a:solidFill>
+              <a:latin typeface="Inter"/>
+              <a:ea typeface="Inter"/>
+              <a:cs typeface="Inter"/>
+              <a:sym typeface="Inter"/>
+            </a:endParaRPr>
+          </a:p>
+          <a:p>
+            <a:pPr indent="0" lvl="0" marL="0" rtl="0" algn="l">
+              <a:lnSpc>
+                <a:spcPct val="85000"/>
+              </a:lnSpc>
+              <a:spcBef>
+                <a:spcPts val="0"/>
+              </a:spcBef>
+              <a:spcAft>
+                <a:spcPts val="0"/>
+              </a:spcAft>
+              <a:buClr>
+                <a:schemeClr val="dk1"/>
+              </a:buClr>
+              <a:buSzPts val="1100"/>
+              <a:buFont typeface="Arial"/>
+              <a:buNone/>
+            </a:pPr>
+            <a:r>
+              <a:t/>
+            </a:r>
+            <a:endParaRPr b="1" sz="900">
+              <a:solidFill>
+                <a:srgbClr val="7F7F7F"/>
+              </a:solidFill>
+              <a:latin typeface="Inter"/>
+              <a:ea typeface="Inter"/>
+              <a:cs typeface="Inter"/>
+              <a:sym typeface="Inter"/>
+            </a:endParaRPr>
+          </a:p>
+          <a:p>
+            <a:pPr indent="0" lvl="0" marL="0" rtl="0" algn="l">
+              <a:lnSpc>
+                <a:spcPct val="85000"/>
+              </a:lnSpc>
+              <a:spcBef>
+                <a:spcPts val="0"/>
+              </a:spcBef>
+              <a:spcAft>
+                <a:spcPts val="0"/>
+              </a:spcAft>
+              <a:buNone/>
+            </a:pPr>
+            <a:r>
+              <a:t/>
+            </a:r>
+            <a:endParaRPr b="1" sz="900">
+              <a:solidFill>
+                <a:srgbClr val="7F7F7F"/>
+              </a:solidFill>
+              <a:latin typeface="Inter"/>
+              <a:ea typeface="Inter"/>
+              <a:cs typeface="Inter"/>
+              <a:sym typeface="Inter"/>
+            </a:endParaRPr>
+          </a:p>
+        </p:txBody>
+      </p:sp>
+      <p:pic>
+        <p:nvPicPr>
+          <p:cNvPr id="145" name="Google Shape;145;p18" title="logo-dark.png"/>
+          <p:cNvPicPr preferRelativeResize="0"/>
+          <p:nvPr/>
+        </p:nvPicPr>
+        <p:blipFill rotWithShape="1">
+          <a:blip r:embed="rId3">
+            <a:alphaModFix/>
+          </a:blip>
+          <a:srcRect b="0" l="40" r="40" t="0"/>
+          <a:stretch/>
+        </p:blipFill>
+        <p:spPr>
+          <a:xfrm>
+            <a:off x="493052" y="4663948"/>
+            <a:ext cx="615327" cy="143725"/>
+          </a:xfrm>
+          <a:prstGeom prst="rect">
+            <a:avLst/>
+          </a:prstGeom>
+          <a:noFill/>
+          <a:ln>
+            <a:noFill/>
+          </a:ln>
+        </p:spPr>
+      </p:pic>
     </p:spTree>
   </p:cSld>
   <p:clrMapOvr>
@@ -5752,34 +7361,360 @@
 <file path=ppt/slides/slide14.xml><?xml version="1.0" encoding="utf-8"?>
 <p:sld xmlns:a="http://schemas.openxmlformats.org/drawingml/2006/main" xmlns:p="http://schemas.openxmlformats.org/presentationml/2006/main" xmlns:r="http://schemas.openxmlformats.org/officeDocument/2006/relationships">
   <p:cSld>
+    <p:bg>
+      <p:bgPr>
+        <a:solidFill>
+          <a:srgbClr val="042017"/>
+        </a:solidFill>
+      </p:bgPr>
+    </p:bg>
     <p:spTree>
       <p:nvGrpSpPr>
-        <p:cNvPr id="1" name=""/>
+        <p:cNvPr id="54" name="Shape 54"/>
         <p:cNvGrpSpPr/>
         <p:nvPr/>
       </p:nvGrpSpPr>
-      <p:grpSpPr/>
+      <p:grpSpPr>
+        <a:xfrm>
+          <a:off x="0" y="0"/>
+          <a:ext cx="0" cy="0"/>
+          <a:chOff x="0" y="0"/>
+          <a:chExt cx="0" cy="0"/>
+        </a:xfrm>
+      </p:grpSpPr>
       <p:sp>
         <p:nvSpPr>
-          <p:cNvPr id="2" name="Title 1"/>
-          <p:cNvSpPr>
-            <a:spLocks noGrp="1"/>
-          </p:cNvSpPr>
-          <p:nvPr>
-            <p:ph type="title"/>
-          </p:nvPr>
+          <p:cNvPr id="55" name="Google Shape;55;p14"/>
+          <p:cNvSpPr txBox="1"/>
+          <p:nvPr/>
         </p:nvSpPr>
-        <p:spPr/>
+        <p:spPr>
+          <a:xfrm>
+            <a:off x="658650" y="1516225"/>
+            <a:ext cx="7125600" cy="900000"/>
+          </a:xfrm>
+          <a:prstGeom prst="rect">
+            <a:avLst/>
+          </a:prstGeom>
+          <a:noFill/>
+          <a:ln>
+            <a:noFill/>
+          </a:ln>
+        </p:spPr>
         <p:txBody>
-          <a:bodyPr/>
+          <a:bodyPr anchorCtr="0" anchor="t" bIns="0" lIns="0" spcFirstLastPara="1" rIns="0" wrap="square" tIns="0">
+            <a:noAutofit/>
+          </a:bodyPr>
           <a:lstStyle/>
           <a:p>
-            <a:r>
-              <a:t>Tips &amp; Best Practices</a:t>
-            </a:r>
+            <a:pPr indent="0" lvl="0" marL="0" rtl="0" algn="l">
+              <a:lnSpc>
+                <a:spcPct val="85000"/>
+              </a:lnSpc>
+              <a:spcBef>
+                <a:spcPts val="0"/>
+              </a:spcBef>
+              <a:spcAft>
+                <a:spcPts val="0"/>
+              </a:spcAft>
+              <a:buNone/>
+            </a:pPr>
+            <a:r>
+              <a:rPr lang="en" sz="3800">
+                <a:solidFill>
+                  <a:srgbClr val="F1E9D6"/>
+                </a:solidFill>
+                <a:latin typeface="Inter SemiBold"/>
+                <a:ea typeface="Inter SemiBold"/>
+                <a:cs typeface="Inter SemiBold"/>
+                <a:sym typeface="Inter SemiBold"/>
+              </a:rPr>
+              <a:t>Presentation titles, </a:t>
+            </a:r>
+            <a:endParaRPr sz="3800">
+              <a:solidFill>
+                <a:srgbClr val="F1E9D6"/>
+              </a:solidFill>
+              <a:latin typeface="Inter SemiBold"/>
+              <a:ea typeface="Inter SemiBold"/>
+              <a:cs typeface="Inter SemiBold"/>
+              <a:sym typeface="Inter SemiBold"/>
+            </a:endParaRPr>
+          </a:p>
+          <a:p>
+            <a:pPr indent="0" lvl="0" marL="0" rtl="0" algn="l">
+              <a:lnSpc>
+                <a:spcPct val="85000"/>
+              </a:lnSpc>
+              <a:spcBef>
+                <a:spcPts val="0"/>
+              </a:spcBef>
+              <a:spcAft>
+                <a:spcPts val="0"/>
+              </a:spcAft>
+              <a:buClr>
+                <a:schemeClr val="dk1"/>
+              </a:buClr>
+              <a:buSzPts val="1100"/>
+              <a:buFont typeface="Arial"/>
+              <a:buNone/>
+            </a:pPr>
+            <a:r>
+              <a:rPr lang="en" sz="3800">
+                <a:solidFill>
+                  <a:srgbClr val="F1E9D6"/>
+                </a:solidFill>
+                <a:latin typeface="Inter SemiBold"/>
+                <a:ea typeface="Inter SemiBold"/>
+                <a:cs typeface="Inter SemiBold"/>
+                <a:sym typeface="Inter SemiBold"/>
+              </a:rPr>
+              <a:t>two lines</a:t>
+            </a:r>
+            <a:endParaRPr sz="3800">
+              <a:solidFill>
+                <a:srgbClr val="F1E9D6"/>
+              </a:solidFill>
+              <a:latin typeface="Inter SemiBold"/>
+              <a:ea typeface="Inter SemiBold"/>
+              <a:cs typeface="Inter SemiBold"/>
+              <a:sym typeface="Inter SemiBold"/>
+            </a:endParaRPr>
+          </a:p>
+          <a:p>
+            <a:pPr indent="0" lvl="0" marL="0" rtl="0" algn="l">
+              <a:lnSpc>
+                <a:spcPct val="85000"/>
+              </a:lnSpc>
+              <a:spcBef>
+                <a:spcPts val="0"/>
+              </a:spcBef>
+              <a:spcAft>
+                <a:spcPts val="0"/>
+              </a:spcAft>
+              <a:buClr>
+                <a:schemeClr val="dk1"/>
+              </a:buClr>
+              <a:buSzPts val="1100"/>
+              <a:buFont typeface="Arial"/>
+              <a:buNone/>
+            </a:pPr>
+            <a:r>
+              <a:t/>
+            </a:r>
+            <a:endParaRPr sz="3800">
+              <a:solidFill>
+                <a:srgbClr val="F1E9D6"/>
+              </a:solidFill>
+              <a:latin typeface="Inter SemiBold"/>
+              <a:ea typeface="Inter SemiBold"/>
+              <a:cs typeface="Inter SemiBold"/>
+              <a:sym typeface="Inter SemiBold"/>
+            </a:endParaRPr>
+          </a:p>
+          <a:p>
+            <a:pPr indent="0" lvl="0" marL="0" rtl="0" algn="l">
+              <a:lnSpc>
+                <a:spcPct val="85000"/>
+              </a:lnSpc>
+              <a:spcBef>
+                <a:spcPts val="0"/>
+              </a:spcBef>
+              <a:spcAft>
+                <a:spcPts val="0"/>
+              </a:spcAft>
+              <a:buNone/>
+            </a:pPr>
+            <a:r>
+              <a:t/>
+            </a:r>
+            <a:endParaRPr sz="3800">
+              <a:solidFill>
+                <a:srgbClr val="F1E9D6"/>
+              </a:solidFill>
+              <a:latin typeface="Inter SemiBold"/>
+              <a:ea typeface="Inter SemiBold"/>
+              <a:cs typeface="Inter SemiBold"/>
+              <a:sym typeface="Inter SemiBold"/>
+            </a:endParaRPr>
           </a:p>
         </p:txBody>
       </p:sp>
+      <p:sp>
+        <p:nvSpPr>
+          <p:cNvPr id="56" name="Google Shape;56;p14"/>
+          <p:cNvSpPr txBox="1"/>
+          <p:nvPr/>
+        </p:nvSpPr>
+        <p:spPr>
+          <a:xfrm>
+            <a:off x="658650" y="2932275"/>
+            <a:ext cx="7125600" cy="200700"/>
+          </a:xfrm>
+          <a:prstGeom prst="rect">
+            <a:avLst/>
+          </a:prstGeom>
+          <a:noFill/>
+          <a:ln>
+            <a:noFill/>
+          </a:ln>
+        </p:spPr>
+        <p:txBody>
+          <a:bodyPr anchorCtr="0" anchor="t" bIns="0" lIns="0" spcFirstLastPara="1" rIns="0" wrap="square" tIns="0">
+            <a:noAutofit/>
+          </a:bodyPr>
+          <a:lstStyle/>
+          <a:p>
+            <a:pPr indent="0" lvl="0" marL="0" rtl="0" algn="l">
+              <a:lnSpc>
+                <a:spcPct val="85000"/>
+              </a:lnSpc>
+              <a:spcBef>
+                <a:spcPts val="0"/>
+              </a:spcBef>
+              <a:spcAft>
+                <a:spcPts val="0"/>
+              </a:spcAft>
+              <a:buNone/>
+            </a:pPr>
+            <a:r>
+              <a:rPr lang="en">
+                <a:solidFill>
+                  <a:srgbClr val="F1E9D6"/>
+                </a:solidFill>
+                <a:latin typeface="Inter SemiBold"/>
+                <a:ea typeface="Inter SemiBold"/>
+                <a:cs typeface="Inter SemiBold"/>
+                <a:sym typeface="Inter SemiBold"/>
+              </a:rPr>
+              <a:t>Subtitle goes here</a:t>
+            </a:r>
+            <a:endParaRPr>
+              <a:solidFill>
+                <a:srgbClr val="F1E9D6"/>
+              </a:solidFill>
+              <a:latin typeface="Inter SemiBold"/>
+              <a:ea typeface="Inter SemiBold"/>
+              <a:cs typeface="Inter SemiBold"/>
+              <a:sym typeface="Inter SemiBold"/>
+            </a:endParaRPr>
+          </a:p>
+        </p:txBody>
+      </p:sp>
+      <p:pic>
+        <p:nvPicPr>
+          <p:cNvPr id="57" name="Google Shape;57;p14" title="logo-light.png"/>
+          <p:cNvPicPr preferRelativeResize="0"/>
+          <p:nvPr/>
+        </p:nvPicPr>
+        <p:blipFill rotWithShape="1">
+          <a:blip r:embed="rId3">
+            <a:alphaModFix/>
+          </a:blip>
+          <a:srcRect b="60" l="0" r="0" t="70"/>
+          <a:stretch/>
+        </p:blipFill>
+        <p:spPr>
+          <a:xfrm>
+            <a:off x="683765" y="399936"/>
+            <a:ext cx="1305252" cy="304875"/>
+          </a:xfrm>
+          <a:prstGeom prst="rect">
+            <a:avLst/>
+          </a:prstGeom>
+          <a:noFill/>
+          <a:ln>
+            <a:noFill/>
+          </a:ln>
+        </p:spPr>
+      </p:pic>
+      <p:sp>
+        <p:nvSpPr>
+          <p:cNvPr id="58" name="Google Shape;58;p14"/>
+          <p:cNvSpPr txBox="1"/>
+          <p:nvPr/>
+        </p:nvSpPr>
+        <p:spPr>
+          <a:xfrm>
+            <a:off x="683775" y="4584950"/>
+            <a:ext cx="4263600" cy="200700"/>
+          </a:xfrm>
+          <a:prstGeom prst="rect">
+            <a:avLst/>
+          </a:prstGeom>
+          <a:noFill/>
+          <a:ln>
+            <a:noFill/>
+          </a:ln>
+        </p:spPr>
+        <p:txBody>
+          <a:bodyPr anchorCtr="0" anchor="t" bIns="0" lIns="0" spcFirstLastPara="1" rIns="0" wrap="square" tIns="0">
+            <a:noAutofit/>
+          </a:bodyPr>
+          <a:lstStyle/>
+          <a:p>
+            <a:pPr indent="0" lvl="0" marL="0" rtl="0" algn="l">
+              <a:lnSpc>
+                <a:spcPct val="85000"/>
+              </a:lnSpc>
+              <a:spcBef>
+                <a:spcPts val="0"/>
+              </a:spcBef>
+              <a:spcAft>
+                <a:spcPts val="0"/>
+              </a:spcAft>
+              <a:buNone/>
+            </a:pPr>
+            <a:r>
+              <a:rPr lang="en" sz="1200">
+                <a:solidFill>
+                  <a:srgbClr val="F1E8D6"/>
+                </a:solidFill>
+                <a:latin typeface="Inter"/>
+                <a:ea typeface="Inter"/>
+                <a:cs typeface="Inter"/>
+                <a:sym typeface="Inter"/>
+              </a:rPr>
+              <a:t>December 1st, 2025</a:t>
+            </a:r>
+            <a:endParaRPr sz="1200">
+              <a:solidFill>
+                <a:srgbClr val="F1E8D6"/>
+              </a:solidFill>
+              <a:latin typeface="Inter"/>
+              <a:ea typeface="Inter"/>
+              <a:cs typeface="Inter"/>
+              <a:sym typeface="Inter"/>
+            </a:endParaRPr>
+          </a:p>
+        </p:txBody>
+      </p:sp>
+      <p:cxnSp>
+        <p:nvCxnSpPr>
+          <p:cNvPr id="59" name="Google Shape;59;p14"/>
+          <p:cNvCxnSpPr/>
+          <p:nvPr/>
+        </p:nvCxnSpPr>
+        <p:spPr>
+          <a:xfrm>
+            <a:off x="671275" y="2689675"/>
+            <a:ext cx="984300" cy="0"/>
+          </a:xfrm>
+          <a:prstGeom prst="straightConnector1">
+            <a:avLst/>
+          </a:prstGeom>
+          <a:noFill/>
+          <a:ln cap="flat" cmpd="sng" w="19050">
+            <a:solidFill>
+              <a:srgbClr val="6ABA48"/>
+            </a:solidFill>
+            <a:prstDash val="solid"/>
+            <a:round/>
+            <a:headEnd len="med" w="med" type="none"/>
+            <a:tailEnd len="med" w="med" type="none"/>
+          </a:ln>
+        </p:spPr>
+      </p:cxnSp>
     </p:spTree>
   </p:cSld>
   <p:clrMapOvr>
@@ -5791,90 +7726,423 @@
 <file path=ppt/slides/slide15.xml><?xml version="1.0" encoding="utf-8"?>
 <p:sld xmlns:a="http://schemas.openxmlformats.org/drawingml/2006/main" xmlns:p="http://schemas.openxmlformats.org/presentationml/2006/main" xmlns:r="http://schemas.openxmlformats.org/officeDocument/2006/relationships">
   <p:cSld>
+    <p:bg>
+      <p:bgPr>
+        <a:solidFill>
+          <a:srgbClr val="F1E8D6"/>
+        </a:solidFill>
+      </p:bgPr>
+    </p:bg>
     <p:spTree>
       <p:nvGrpSpPr>
-        <p:cNvPr id="1" name=""/>
+        <p:cNvPr id="141" name="Shape 141"/>
         <p:cNvGrpSpPr/>
         <p:nvPr/>
       </p:nvGrpSpPr>
-      <p:grpSpPr/>
+      <p:grpSpPr>
+        <a:xfrm>
+          <a:off x="0" y="0"/>
+          <a:ext cx="0" cy="0"/>
+          <a:chOff x="0" y="0"/>
+          <a:chExt cx="0" cy="0"/>
+        </a:xfrm>
+      </p:grpSpPr>
       <p:sp>
         <p:nvSpPr>
-          <p:cNvPr id="2" name="Title 1"/>
-          <p:cNvSpPr>
-            <a:spLocks noGrp="1"/>
-          </p:cNvSpPr>
-          <p:nvPr>
-            <p:ph type="title"/>
-          </p:nvPr>
+          <p:cNvPr id="142" name="Google Shape;142;p18"/>
+          <p:cNvSpPr txBox="1"/>
+          <p:nvPr/>
         </p:nvSpPr>
-        <p:spPr/>
+        <p:spPr>
+          <a:xfrm>
+            <a:off x="467950" y="623324"/>
+            <a:ext cx="7125600" cy="900000"/>
+          </a:xfrm>
+          <a:prstGeom prst="rect">
+            <a:avLst/>
+          </a:prstGeom>
+          <a:noFill/>
+          <a:ln>
+            <a:noFill/>
+          </a:ln>
+        </p:spPr>
         <p:txBody>
-          <a:bodyPr/>
+          <a:bodyPr anchorCtr="0" anchor="t" bIns="0" lIns="0" spcFirstLastPara="1" rIns="0" wrap="square" tIns="0">
+            <a:noAutofit/>
+          </a:bodyPr>
           <a:lstStyle/>
           <a:p>
-            <a:r>
-              <a:t>8 Tips for Working with Tilda</a:t>
-            </a:r>
+            <a:pPr indent="0" lvl="0" marL="0" rtl="0" algn="l">
+              <a:lnSpc>
+                <a:spcPct val="85000"/>
+              </a:lnSpc>
+              <a:spcBef>
+                <a:spcPts val="0"/>
+              </a:spcBef>
+              <a:spcAft>
+                <a:spcPts val="0"/>
+              </a:spcAft>
+              <a:buClr>
+                <a:schemeClr val="dk1"/>
+              </a:buClr>
+              <a:buSzPts val="1100"/>
+              <a:buFont typeface="Arial"/>
+              <a:buNone/>
+            </a:pPr>
+            <a:r>
+              <a:rPr lang="en" sz="2800">
+                <a:solidFill>
+                  <a:srgbClr val="042017"/>
+                </a:solidFill>
+                <a:latin typeface="Inter SemiBold"/>
+                <a:ea typeface="Inter SemiBold"/>
+                <a:cs typeface="Inter SemiBold"/>
+                <a:sym typeface="Inter SemiBold"/>
+              </a:rPr>
+              <a:t>Title and body text</a:t>
+            </a:r>
+            <a:endParaRPr sz="2800">
+              <a:solidFill>
+                <a:srgbClr val="042017"/>
+              </a:solidFill>
+              <a:latin typeface="Inter SemiBold"/>
+              <a:ea typeface="Inter SemiBold"/>
+              <a:cs typeface="Inter SemiBold"/>
+              <a:sym typeface="Inter SemiBold"/>
+            </a:endParaRPr>
+          </a:p>
+          <a:p>
+            <a:pPr indent="0" lvl="0" marL="0" rtl="0" algn="l">
+              <a:lnSpc>
+                <a:spcPct val="85000"/>
+              </a:lnSpc>
+              <a:spcBef>
+                <a:spcPts val="0"/>
+              </a:spcBef>
+              <a:spcAft>
+                <a:spcPts val="0"/>
+              </a:spcAft>
+              <a:buClr>
+                <a:schemeClr val="dk1"/>
+              </a:buClr>
+              <a:buSzPts val="1100"/>
+              <a:buFont typeface="Arial"/>
+              <a:buNone/>
+            </a:pPr>
+            <a:r>
+              <a:t/>
+            </a:r>
+            <a:endParaRPr sz="2800">
+              <a:solidFill>
+                <a:srgbClr val="042017"/>
+              </a:solidFill>
+              <a:latin typeface="Inter SemiBold"/>
+              <a:ea typeface="Inter SemiBold"/>
+              <a:cs typeface="Inter SemiBold"/>
+              <a:sym typeface="Inter SemiBold"/>
+            </a:endParaRPr>
+          </a:p>
+          <a:p>
+            <a:pPr indent="0" lvl="0" marL="0" rtl="0" algn="l">
+              <a:lnSpc>
+                <a:spcPct val="85000"/>
+              </a:lnSpc>
+              <a:spcBef>
+                <a:spcPts val="0"/>
+              </a:spcBef>
+              <a:spcAft>
+                <a:spcPts val="0"/>
+              </a:spcAft>
+              <a:buNone/>
+            </a:pPr>
+            <a:r>
+              <a:t/>
+            </a:r>
+            <a:endParaRPr sz="2800">
+              <a:solidFill>
+                <a:srgbClr val="042017"/>
+              </a:solidFill>
+              <a:latin typeface="Inter SemiBold"/>
+              <a:ea typeface="Inter SemiBold"/>
+              <a:cs typeface="Inter SemiBold"/>
+              <a:sym typeface="Inter SemiBold"/>
+            </a:endParaRPr>
           </a:p>
         </p:txBody>
       </p:sp>
       <p:sp>
         <p:nvSpPr>
-          <p:cNvPr id="3" name="Text Placeholder 2"/>
-          <p:cNvSpPr>
-            <a:spLocks noGrp="1"/>
-          </p:cNvSpPr>
-          <p:nvPr>
-            <p:ph type="body" idx="1"/>
-          </p:nvPr>
+          <p:cNvPr id="143" name="Google Shape;143;p18"/>
+          <p:cNvSpPr txBox="1"/>
+          <p:nvPr/>
         </p:nvSpPr>
-        <p:spPr/>
+        <p:spPr>
+          <a:xfrm>
+            <a:off x="467950" y="1469674"/>
+            <a:ext cx="7125600" cy="1504200"/>
+          </a:xfrm>
+          <a:prstGeom prst="rect">
+            <a:avLst/>
+          </a:prstGeom>
+          <a:noFill/>
+          <a:ln>
+            <a:noFill/>
+          </a:ln>
+        </p:spPr>
         <p:txBody>
-          <a:bodyPr/>
+          <a:bodyPr anchorCtr="0" anchor="t" bIns="0" lIns="0" spcFirstLastPara="1" rIns="0" wrap="square" tIns="0">
+            <a:noAutofit/>
+          </a:bodyPr>
           <a:lstStyle/>
           <a:p>
-            <a:r>
-              <a:t>1. Be specific — the more context you give, the better the output</a:t>
-            </a:r>
-          </a:p>
-          <a:p>
-            <a:r>
-              <a:t>2. Iterate — ask follow-ups to refine answers</a:t>
-            </a:r>
-          </a:p>
-          <a:p>
-            <a:r>
-              <a:t>3. Use DMs for sensitive topics</a:t>
-            </a:r>
-          </a:p>
-          <a:p>
-            <a:r>
-              <a:t>4. Tag @tilda in channels where she's invited</a:t>
-            </a:r>
-          </a:p>
-          <a:p>
-            <a:r>
-              <a:t>5. She can read images and PDFs — just attach them</a:t>
-            </a:r>
-          </a:p>
-          <a:p>
-            <a:r>
-              <a:t>6. Ask her to search before assuming she doesn't know</a:t>
-            </a:r>
-          </a:p>
-          <a:p>
-            <a:r>
-              <a:t>7. If she's wrong, correct her — she'll remember</a:t>
-            </a:r>
-          </a:p>
-          <a:p>
-            <a:r>
-              <a:t>8. Think of her as a teammate, not a search engine</a:t>
-            </a:r>
+            <a:pPr indent="0" lvl="0" marL="0" rtl="0" algn="l">
+              <a:lnSpc>
+                <a:spcPct val="115000"/>
+              </a:lnSpc>
+              <a:spcBef>
+                <a:spcPts val="0"/>
+              </a:spcBef>
+              <a:spcAft>
+                <a:spcPts val="0"/>
+              </a:spcAft>
+              <a:buClr>
+                <a:schemeClr val="dk1"/>
+              </a:buClr>
+              <a:buSzPts val="1100"/>
+              <a:buFont typeface="Arial"/>
+              <a:buNone/>
+            </a:pPr>
+            <a:r>
+              <a:rPr lang="en" sz="1000">
+                <a:solidFill>
+                  <a:srgbClr val="042017"/>
+                </a:solidFill>
+                <a:latin typeface="Inter"/>
+                <a:ea typeface="Inter"/>
+                <a:cs typeface="Inter"/>
+                <a:sym typeface="Inter"/>
+              </a:rPr>
+              <a:t>Lorem ipsum dolor sit amet, consectetur adipiscing elit. Fusce vitae commodo mauris. Nullam malesuada nisl a mollis faucibus. Curabitur tincidunt ligula turpis, sed rhoncus odio fermentum pellentesque. Fusce id augue eu lacus ullamcorper pretium a id risus. Donec ac mauris viverra, imperdiet orci eu, aliquet leo. Vestibulum quis augue nec justo scelerisque ultrices. Nulla posuere, sapien at finibus consectetur, eros turpis luctus quam, et ornare magna magna sit amet mauris. Donec maximus, orci ut vestibulum ultrices, magna sem sollicitudin metus, et aliquam erat felis sit amet dui. In eu libero sit amet quam sollicitudin vehicula vitae quis quam. Etiam sit amet dolor aliquet massa iaculis porta.</a:t>
+            </a:r>
+            <a:endParaRPr sz="1000">
+              <a:solidFill>
+                <a:srgbClr val="042017"/>
+              </a:solidFill>
+              <a:latin typeface="Inter"/>
+              <a:ea typeface="Inter"/>
+              <a:cs typeface="Inter"/>
+              <a:sym typeface="Inter"/>
+            </a:endParaRPr>
+          </a:p>
+          <a:p>
+            <a:pPr indent="0" lvl="0" marL="0" rtl="0" algn="l">
+              <a:lnSpc>
+                <a:spcPct val="115000"/>
+              </a:lnSpc>
+              <a:spcBef>
+                <a:spcPts val="0"/>
+              </a:spcBef>
+              <a:spcAft>
+                <a:spcPts val="0"/>
+              </a:spcAft>
+              <a:buClr>
+                <a:schemeClr val="dk1"/>
+              </a:buClr>
+              <a:buSzPts val="1100"/>
+              <a:buFont typeface="Arial"/>
+              <a:buNone/>
+            </a:pPr>
+            <a:r>
+              <a:t/>
+            </a:r>
+            <a:endParaRPr sz="1000">
+              <a:solidFill>
+                <a:srgbClr val="042017"/>
+              </a:solidFill>
+              <a:latin typeface="Inter"/>
+              <a:ea typeface="Inter"/>
+              <a:cs typeface="Inter"/>
+              <a:sym typeface="Inter"/>
+            </a:endParaRPr>
+          </a:p>
+          <a:p>
+            <a:pPr indent="0" lvl="0" marL="0" rtl="0" algn="l">
+              <a:lnSpc>
+                <a:spcPct val="115000"/>
+              </a:lnSpc>
+              <a:spcBef>
+                <a:spcPts val="0"/>
+              </a:spcBef>
+              <a:spcAft>
+                <a:spcPts val="0"/>
+              </a:spcAft>
+              <a:buNone/>
+            </a:pPr>
+            <a:r>
+              <a:t/>
+            </a:r>
+            <a:endParaRPr sz="1000">
+              <a:solidFill>
+                <a:srgbClr val="042017"/>
+              </a:solidFill>
+              <a:latin typeface="Inter"/>
+              <a:ea typeface="Inter"/>
+              <a:cs typeface="Inter"/>
+              <a:sym typeface="Inter"/>
+            </a:endParaRPr>
           </a:p>
         </p:txBody>
       </p:sp>
+      <p:sp>
+        <p:nvSpPr>
+          <p:cNvPr id="144" name="Google Shape;144;p18"/>
+          <p:cNvSpPr txBox="1"/>
+          <p:nvPr/>
+        </p:nvSpPr>
+        <p:spPr>
+          <a:xfrm>
+            <a:off x="467950" y="339124"/>
+            <a:ext cx="7125600" cy="200700"/>
+          </a:xfrm>
+          <a:prstGeom prst="rect">
+            <a:avLst/>
+          </a:prstGeom>
+          <a:noFill/>
+          <a:ln>
+            <a:noFill/>
+          </a:ln>
+        </p:spPr>
+        <p:txBody>
+          <a:bodyPr anchorCtr="0" anchor="t" bIns="0" lIns="0" spcFirstLastPara="1" rIns="0" wrap="square" tIns="0">
+            <a:noAutofit/>
+          </a:bodyPr>
+          <a:lstStyle/>
+          <a:p>
+            <a:pPr indent="0" lvl="0" marL="0" rtl="0" algn="l">
+              <a:lnSpc>
+                <a:spcPct val="85000"/>
+              </a:lnSpc>
+              <a:spcBef>
+                <a:spcPts val="0"/>
+              </a:spcBef>
+              <a:spcAft>
+                <a:spcPts val="0"/>
+              </a:spcAft>
+              <a:buClr>
+                <a:schemeClr val="dk1"/>
+              </a:buClr>
+              <a:buSzPts val="1100"/>
+              <a:buFont typeface="Arial"/>
+              <a:buNone/>
+            </a:pPr>
+            <a:r>
+              <a:rPr b="1" lang="en" sz="900">
+                <a:solidFill>
+                  <a:srgbClr val="7F7F7F"/>
+                </a:solidFill>
+                <a:latin typeface="Inter"/>
+                <a:ea typeface="Inter"/>
+                <a:cs typeface="Inter"/>
+                <a:sym typeface="Inter"/>
+              </a:rPr>
+              <a:t>EYEBROW HEADING</a:t>
+            </a:r>
+            <a:endParaRPr b="1" sz="900">
+              <a:solidFill>
+                <a:srgbClr val="7F7F7F"/>
+              </a:solidFill>
+              <a:latin typeface="Inter"/>
+              <a:ea typeface="Inter"/>
+              <a:cs typeface="Inter"/>
+              <a:sym typeface="Inter"/>
+            </a:endParaRPr>
+          </a:p>
+          <a:p>
+            <a:pPr indent="0" lvl="0" marL="0" rtl="0" algn="l">
+              <a:lnSpc>
+                <a:spcPct val="85000"/>
+              </a:lnSpc>
+              <a:spcBef>
+                <a:spcPts val="0"/>
+              </a:spcBef>
+              <a:spcAft>
+                <a:spcPts val="0"/>
+              </a:spcAft>
+              <a:buClr>
+                <a:schemeClr val="dk1"/>
+              </a:buClr>
+              <a:buSzPts val="1100"/>
+              <a:buFont typeface="Arial"/>
+              <a:buNone/>
+            </a:pPr>
+            <a:r>
+              <a:t/>
+            </a:r>
+            <a:endParaRPr b="1" sz="900">
+              <a:solidFill>
+                <a:srgbClr val="7F7F7F"/>
+              </a:solidFill>
+              <a:latin typeface="Inter"/>
+              <a:ea typeface="Inter"/>
+              <a:cs typeface="Inter"/>
+              <a:sym typeface="Inter"/>
+            </a:endParaRPr>
+          </a:p>
+          <a:p>
+            <a:pPr indent="0" lvl="0" marL="0" rtl="0" algn="l">
+              <a:lnSpc>
+                <a:spcPct val="85000"/>
+              </a:lnSpc>
+              <a:spcBef>
+                <a:spcPts val="0"/>
+              </a:spcBef>
+              <a:spcAft>
+                <a:spcPts val="0"/>
+              </a:spcAft>
+              <a:buNone/>
+            </a:pPr>
+            <a:r>
+              <a:t/>
+            </a:r>
+            <a:endParaRPr b="1" sz="900">
+              <a:solidFill>
+                <a:srgbClr val="7F7F7F"/>
+              </a:solidFill>
+              <a:latin typeface="Inter"/>
+              <a:ea typeface="Inter"/>
+              <a:cs typeface="Inter"/>
+              <a:sym typeface="Inter"/>
+            </a:endParaRPr>
+          </a:p>
+        </p:txBody>
+      </p:sp>
+      <p:pic>
+        <p:nvPicPr>
+          <p:cNvPr id="145" name="Google Shape;145;p18" title="logo-dark.png"/>
+          <p:cNvPicPr preferRelativeResize="0"/>
+          <p:nvPr/>
+        </p:nvPicPr>
+        <p:blipFill rotWithShape="1">
+          <a:blip r:embed="rId3">
+            <a:alphaModFix/>
+          </a:blip>
+          <a:srcRect b="0" l="40" r="40" t="0"/>
+          <a:stretch/>
+        </p:blipFill>
+        <p:spPr>
+          <a:xfrm>
+            <a:off x="493052" y="4663948"/>
+            <a:ext cx="615327" cy="143725"/>
+          </a:xfrm>
+          <a:prstGeom prst="rect">
+            <a:avLst/>
+          </a:prstGeom>
+          <a:noFill/>
+          <a:ln>
+            <a:noFill/>
+          </a:ln>
+        </p:spPr>
+      </p:pic>
     </p:spTree>
   </p:cSld>
   <p:clrMapOvr>
@@ -5886,80 +8154,423 @@
 <file path=ppt/slides/slide16.xml><?xml version="1.0" encoding="utf-8"?>
 <p:sld xmlns:a="http://schemas.openxmlformats.org/drawingml/2006/main" xmlns:p="http://schemas.openxmlformats.org/presentationml/2006/main" xmlns:r="http://schemas.openxmlformats.org/officeDocument/2006/relationships">
   <p:cSld>
+    <p:bg>
+      <p:bgPr>
+        <a:solidFill>
+          <a:srgbClr val="F1E8D6"/>
+        </a:solidFill>
+      </p:bgPr>
+    </p:bg>
     <p:spTree>
       <p:nvGrpSpPr>
-        <p:cNvPr id="1" name=""/>
+        <p:cNvPr id="141" name="Shape 141"/>
         <p:cNvGrpSpPr/>
         <p:nvPr/>
       </p:nvGrpSpPr>
-      <p:grpSpPr/>
+      <p:grpSpPr>
+        <a:xfrm>
+          <a:off x="0" y="0"/>
+          <a:ext cx="0" cy="0"/>
+          <a:chOff x="0" y="0"/>
+          <a:chExt cx="0" cy="0"/>
+        </a:xfrm>
+      </p:grpSpPr>
       <p:sp>
         <p:nvSpPr>
-          <p:cNvPr id="2" name="Title 1"/>
-          <p:cNvSpPr>
-            <a:spLocks noGrp="1"/>
-          </p:cNvSpPr>
-          <p:nvPr>
-            <p:ph type="title"/>
-          </p:nvPr>
+          <p:cNvPr id="142" name="Google Shape;142;p18"/>
+          <p:cNvSpPr txBox="1"/>
+          <p:nvPr/>
         </p:nvSpPr>
-        <p:spPr/>
+        <p:spPr>
+          <a:xfrm>
+            <a:off x="467950" y="623324"/>
+            <a:ext cx="7125600" cy="900000"/>
+          </a:xfrm>
+          <a:prstGeom prst="rect">
+            <a:avLst/>
+          </a:prstGeom>
+          <a:noFill/>
+          <a:ln>
+            <a:noFill/>
+          </a:ln>
+        </p:spPr>
         <p:txBody>
-          <a:bodyPr/>
+          <a:bodyPr anchorCtr="0" anchor="t" bIns="0" lIns="0" spcFirstLastPara="1" rIns="0" wrap="square" tIns="0">
+            <a:noAutofit/>
+          </a:bodyPr>
           <a:lstStyle/>
           <a:p>
-            <a:r>
-              <a:t>The Cast of Characters</a:t>
-            </a:r>
+            <a:pPr indent="0" lvl="0" marL="0" rtl="0" algn="l">
+              <a:lnSpc>
+                <a:spcPct val="85000"/>
+              </a:lnSpc>
+              <a:spcBef>
+                <a:spcPts val="0"/>
+              </a:spcBef>
+              <a:spcAft>
+                <a:spcPts val="0"/>
+              </a:spcAft>
+              <a:buClr>
+                <a:schemeClr val="dk1"/>
+              </a:buClr>
+              <a:buSzPts val="1100"/>
+              <a:buFont typeface="Arial"/>
+              <a:buNone/>
+            </a:pPr>
+            <a:r>
+              <a:rPr lang="en" sz="2800">
+                <a:solidFill>
+                  <a:srgbClr val="042017"/>
+                </a:solidFill>
+                <a:latin typeface="Inter SemiBold"/>
+                <a:ea typeface="Inter SemiBold"/>
+                <a:cs typeface="Inter SemiBold"/>
+                <a:sym typeface="Inter SemiBold"/>
+              </a:rPr>
+              <a:t>Title and body text</a:t>
+            </a:r>
+            <a:endParaRPr sz="2800">
+              <a:solidFill>
+                <a:srgbClr val="042017"/>
+              </a:solidFill>
+              <a:latin typeface="Inter SemiBold"/>
+              <a:ea typeface="Inter SemiBold"/>
+              <a:cs typeface="Inter SemiBold"/>
+              <a:sym typeface="Inter SemiBold"/>
+            </a:endParaRPr>
+          </a:p>
+          <a:p>
+            <a:pPr indent="0" lvl="0" marL="0" rtl="0" algn="l">
+              <a:lnSpc>
+                <a:spcPct val="85000"/>
+              </a:lnSpc>
+              <a:spcBef>
+                <a:spcPts val="0"/>
+              </a:spcBef>
+              <a:spcAft>
+                <a:spcPts val="0"/>
+              </a:spcAft>
+              <a:buClr>
+                <a:schemeClr val="dk1"/>
+              </a:buClr>
+              <a:buSzPts val="1100"/>
+              <a:buFont typeface="Arial"/>
+              <a:buNone/>
+            </a:pPr>
+            <a:r>
+              <a:t/>
+            </a:r>
+            <a:endParaRPr sz="2800">
+              <a:solidFill>
+                <a:srgbClr val="042017"/>
+              </a:solidFill>
+              <a:latin typeface="Inter SemiBold"/>
+              <a:ea typeface="Inter SemiBold"/>
+              <a:cs typeface="Inter SemiBold"/>
+              <a:sym typeface="Inter SemiBold"/>
+            </a:endParaRPr>
+          </a:p>
+          <a:p>
+            <a:pPr indent="0" lvl="0" marL="0" rtl="0" algn="l">
+              <a:lnSpc>
+                <a:spcPct val="85000"/>
+              </a:lnSpc>
+              <a:spcBef>
+                <a:spcPts val="0"/>
+              </a:spcBef>
+              <a:spcAft>
+                <a:spcPts val="0"/>
+              </a:spcAft>
+              <a:buNone/>
+            </a:pPr>
+            <a:r>
+              <a:t/>
+            </a:r>
+            <a:endParaRPr sz="2800">
+              <a:solidFill>
+                <a:srgbClr val="042017"/>
+              </a:solidFill>
+              <a:latin typeface="Inter SemiBold"/>
+              <a:ea typeface="Inter SemiBold"/>
+              <a:cs typeface="Inter SemiBold"/>
+              <a:sym typeface="Inter SemiBold"/>
+            </a:endParaRPr>
           </a:p>
         </p:txBody>
       </p:sp>
       <p:sp>
         <p:nvSpPr>
-          <p:cNvPr id="3" name="Text Placeholder 2"/>
-          <p:cNvSpPr>
-            <a:spLocks noGrp="1"/>
-          </p:cNvSpPr>
-          <p:nvPr>
-            <p:ph type="body" idx="1"/>
-          </p:nvPr>
+          <p:cNvPr id="143" name="Google Shape;143;p18"/>
+          <p:cNvSpPr txBox="1"/>
+          <p:nvPr/>
         </p:nvSpPr>
-        <p:spPr/>
+        <p:spPr>
+          <a:xfrm>
+            <a:off x="467950" y="1469674"/>
+            <a:ext cx="7125600" cy="1504200"/>
+          </a:xfrm>
+          <a:prstGeom prst="rect">
+            <a:avLst/>
+          </a:prstGeom>
+          <a:noFill/>
+          <a:ln>
+            <a:noFill/>
+          </a:ln>
+        </p:spPr>
         <p:txBody>
-          <a:bodyPr/>
+          <a:bodyPr anchorCtr="0" anchor="t" bIns="0" lIns="0" spcFirstLastPara="1" rIns="0" wrap="square" tIns="0">
+            <a:noAutofit/>
+          </a:bodyPr>
           <a:lstStyle/>
           <a:p>
-            <a:r>
-              <a:t>Tilda — AI assistant in Slack (the quarterback)</a:t>
-            </a:r>
-          </a:p>
-          <a:p>
-            <a:r>
-              <a:t>Claude — AI brain by Anthropic (the mind)</a:t>
-            </a:r>
-          </a:p>
-          <a:p>
-            <a:r>
-              <a:t>Bilda — AI coding agent (the builder)</a:t>
-            </a:r>
-          </a:p>
-          <a:p>
-            <a:r>
-              <a:t>TCM / Signum — Plugin system (the playbook)</a:t>
-            </a:r>
-          </a:p>
-          <a:p>
-            <a:r>
-              <a:t>tilda-bot — Slack infrastructure (the body)</a:t>
-            </a:r>
-          </a:p>
-          <a:p>
-            <a:r>
-              <a:t>Pull Requests — Code review process (the referee)</a:t>
-            </a:r>
+            <a:pPr indent="0" lvl="0" marL="0" rtl="0" algn="l">
+              <a:lnSpc>
+                <a:spcPct val="115000"/>
+              </a:lnSpc>
+              <a:spcBef>
+                <a:spcPts val="0"/>
+              </a:spcBef>
+              <a:spcAft>
+                <a:spcPts val="0"/>
+              </a:spcAft>
+              <a:buClr>
+                <a:schemeClr val="dk1"/>
+              </a:buClr>
+              <a:buSzPts val="1100"/>
+              <a:buFont typeface="Arial"/>
+              <a:buNone/>
+            </a:pPr>
+            <a:r>
+              <a:rPr lang="en" sz="1000">
+                <a:solidFill>
+                  <a:srgbClr val="042017"/>
+                </a:solidFill>
+                <a:latin typeface="Inter"/>
+                <a:ea typeface="Inter"/>
+                <a:cs typeface="Inter"/>
+                <a:sym typeface="Inter"/>
+              </a:rPr>
+              <a:t>Lorem ipsum dolor sit amet, consectetur adipiscing elit. Fusce vitae commodo mauris. Nullam malesuada nisl a mollis faucibus. Curabitur tincidunt ligula turpis, sed rhoncus odio fermentum pellentesque. Fusce id augue eu lacus ullamcorper pretium a id risus. Donec ac mauris viverra, imperdiet orci eu, aliquet leo. Vestibulum quis augue nec justo scelerisque ultrices. Nulla posuere, sapien at finibus consectetur, eros turpis luctus quam, et ornare magna magna sit amet mauris. Donec maximus, orci ut vestibulum ultrices, magna sem sollicitudin metus, et aliquam erat felis sit amet dui. In eu libero sit amet quam sollicitudin vehicula vitae quis quam. Etiam sit amet dolor aliquet massa iaculis porta.</a:t>
+            </a:r>
+            <a:endParaRPr sz="1000">
+              <a:solidFill>
+                <a:srgbClr val="042017"/>
+              </a:solidFill>
+              <a:latin typeface="Inter"/>
+              <a:ea typeface="Inter"/>
+              <a:cs typeface="Inter"/>
+              <a:sym typeface="Inter"/>
+            </a:endParaRPr>
+          </a:p>
+          <a:p>
+            <a:pPr indent="0" lvl="0" marL="0" rtl="0" algn="l">
+              <a:lnSpc>
+                <a:spcPct val="115000"/>
+              </a:lnSpc>
+              <a:spcBef>
+                <a:spcPts val="0"/>
+              </a:spcBef>
+              <a:spcAft>
+                <a:spcPts val="0"/>
+              </a:spcAft>
+              <a:buClr>
+                <a:schemeClr val="dk1"/>
+              </a:buClr>
+              <a:buSzPts val="1100"/>
+              <a:buFont typeface="Arial"/>
+              <a:buNone/>
+            </a:pPr>
+            <a:r>
+              <a:t/>
+            </a:r>
+            <a:endParaRPr sz="1000">
+              <a:solidFill>
+                <a:srgbClr val="042017"/>
+              </a:solidFill>
+              <a:latin typeface="Inter"/>
+              <a:ea typeface="Inter"/>
+              <a:cs typeface="Inter"/>
+              <a:sym typeface="Inter"/>
+            </a:endParaRPr>
+          </a:p>
+          <a:p>
+            <a:pPr indent="0" lvl="0" marL="0" rtl="0" algn="l">
+              <a:lnSpc>
+                <a:spcPct val="115000"/>
+              </a:lnSpc>
+              <a:spcBef>
+                <a:spcPts val="0"/>
+              </a:spcBef>
+              <a:spcAft>
+                <a:spcPts val="0"/>
+              </a:spcAft>
+              <a:buNone/>
+            </a:pPr>
+            <a:r>
+              <a:t/>
+            </a:r>
+            <a:endParaRPr sz="1000">
+              <a:solidFill>
+                <a:srgbClr val="042017"/>
+              </a:solidFill>
+              <a:latin typeface="Inter"/>
+              <a:ea typeface="Inter"/>
+              <a:cs typeface="Inter"/>
+              <a:sym typeface="Inter"/>
+            </a:endParaRPr>
           </a:p>
         </p:txBody>
       </p:sp>
+      <p:sp>
+        <p:nvSpPr>
+          <p:cNvPr id="144" name="Google Shape;144;p18"/>
+          <p:cNvSpPr txBox="1"/>
+          <p:nvPr/>
+        </p:nvSpPr>
+        <p:spPr>
+          <a:xfrm>
+            <a:off x="467950" y="339124"/>
+            <a:ext cx="7125600" cy="200700"/>
+          </a:xfrm>
+          <a:prstGeom prst="rect">
+            <a:avLst/>
+          </a:prstGeom>
+          <a:noFill/>
+          <a:ln>
+            <a:noFill/>
+          </a:ln>
+        </p:spPr>
+        <p:txBody>
+          <a:bodyPr anchorCtr="0" anchor="t" bIns="0" lIns="0" spcFirstLastPara="1" rIns="0" wrap="square" tIns="0">
+            <a:noAutofit/>
+          </a:bodyPr>
+          <a:lstStyle/>
+          <a:p>
+            <a:pPr indent="0" lvl="0" marL="0" rtl="0" algn="l">
+              <a:lnSpc>
+                <a:spcPct val="85000"/>
+              </a:lnSpc>
+              <a:spcBef>
+                <a:spcPts val="0"/>
+              </a:spcBef>
+              <a:spcAft>
+                <a:spcPts val="0"/>
+              </a:spcAft>
+              <a:buClr>
+                <a:schemeClr val="dk1"/>
+              </a:buClr>
+              <a:buSzPts val="1100"/>
+              <a:buFont typeface="Arial"/>
+              <a:buNone/>
+            </a:pPr>
+            <a:r>
+              <a:rPr b="1" lang="en" sz="900">
+                <a:solidFill>
+                  <a:srgbClr val="7F7F7F"/>
+                </a:solidFill>
+                <a:latin typeface="Inter"/>
+                <a:ea typeface="Inter"/>
+                <a:cs typeface="Inter"/>
+                <a:sym typeface="Inter"/>
+              </a:rPr>
+              <a:t>EYEBROW HEADING</a:t>
+            </a:r>
+            <a:endParaRPr b="1" sz="900">
+              <a:solidFill>
+                <a:srgbClr val="7F7F7F"/>
+              </a:solidFill>
+              <a:latin typeface="Inter"/>
+              <a:ea typeface="Inter"/>
+              <a:cs typeface="Inter"/>
+              <a:sym typeface="Inter"/>
+            </a:endParaRPr>
+          </a:p>
+          <a:p>
+            <a:pPr indent="0" lvl="0" marL="0" rtl="0" algn="l">
+              <a:lnSpc>
+                <a:spcPct val="85000"/>
+              </a:lnSpc>
+              <a:spcBef>
+                <a:spcPts val="0"/>
+              </a:spcBef>
+              <a:spcAft>
+                <a:spcPts val="0"/>
+              </a:spcAft>
+              <a:buClr>
+                <a:schemeClr val="dk1"/>
+              </a:buClr>
+              <a:buSzPts val="1100"/>
+              <a:buFont typeface="Arial"/>
+              <a:buNone/>
+            </a:pPr>
+            <a:r>
+              <a:t/>
+            </a:r>
+            <a:endParaRPr b="1" sz="900">
+              <a:solidFill>
+                <a:srgbClr val="7F7F7F"/>
+              </a:solidFill>
+              <a:latin typeface="Inter"/>
+              <a:ea typeface="Inter"/>
+              <a:cs typeface="Inter"/>
+              <a:sym typeface="Inter"/>
+            </a:endParaRPr>
+          </a:p>
+          <a:p>
+            <a:pPr indent="0" lvl="0" marL="0" rtl="0" algn="l">
+              <a:lnSpc>
+                <a:spcPct val="85000"/>
+              </a:lnSpc>
+              <a:spcBef>
+                <a:spcPts val="0"/>
+              </a:spcBef>
+              <a:spcAft>
+                <a:spcPts val="0"/>
+              </a:spcAft>
+              <a:buNone/>
+            </a:pPr>
+            <a:r>
+              <a:t/>
+            </a:r>
+            <a:endParaRPr b="1" sz="900">
+              <a:solidFill>
+                <a:srgbClr val="7F7F7F"/>
+              </a:solidFill>
+              <a:latin typeface="Inter"/>
+              <a:ea typeface="Inter"/>
+              <a:cs typeface="Inter"/>
+              <a:sym typeface="Inter"/>
+            </a:endParaRPr>
+          </a:p>
+        </p:txBody>
+      </p:sp>
+      <p:pic>
+        <p:nvPicPr>
+          <p:cNvPr id="145" name="Google Shape;145;p18" title="logo-dark.png"/>
+          <p:cNvPicPr preferRelativeResize="0"/>
+          <p:nvPr/>
+        </p:nvPicPr>
+        <p:blipFill rotWithShape="1">
+          <a:blip r:embed="rId3">
+            <a:alphaModFix/>
+          </a:blip>
+          <a:srcRect b="0" l="40" r="40" t="0"/>
+          <a:stretch/>
+        </p:blipFill>
+        <p:spPr>
+          <a:xfrm>
+            <a:off x="493052" y="4663948"/>
+            <a:ext cx="615327" cy="143725"/>
+          </a:xfrm>
+          <a:prstGeom prst="rect">
+            <a:avLst/>
+          </a:prstGeom>
+          <a:noFill/>
+          <a:ln>
+            <a:noFill/>
+          </a:ln>
+        </p:spPr>
+      </p:pic>
     </p:spTree>
   </p:cSld>
   <p:clrMapOvr>
@@ -5971,34 +8582,360 @@
 <file path=ppt/slides/slide17.xml><?xml version="1.0" encoding="utf-8"?>
 <p:sld xmlns:a="http://schemas.openxmlformats.org/drawingml/2006/main" xmlns:p="http://schemas.openxmlformats.org/presentationml/2006/main" xmlns:r="http://schemas.openxmlformats.org/officeDocument/2006/relationships">
   <p:cSld>
+    <p:bg>
+      <p:bgPr>
+        <a:solidFill>
+          <a:srgbClr val="042017"/>
+        </a:solidFill>
+      </p:bgPr>
+    </p:bg>
     <p:spTree>
       <p:nvGrpSpPr>
-        <p:cNvPr id="1" name=""/>
+        <p:cNvPr id="54" name="Shape 54"/>
         <p:cNvGrpSpPr/>
         <p:nvPr/>
       </p:nvGrpSpPr>
-      <p:grpSpPr/>
+      <p:grpSpPr>
+        <a:xfrm>
+          <a:off x="0" y="0"/>
+          <a:ext cx="0" cy="0"/>
+          <a:chOff x="0" y="0"/>
+          <a:chExt cx="0" cy="0"/>
+        </a:xfrm>
+      </p:grpSpPr>
       <p:sp>
         <p:nvSpPr>
-          <p:cNvPr id="2" name="Title 1"/>
-          <p:cNvSpPr>
-            <a:spLocks noGrp="1"/>
-          </p:cNvSpPr>
-          <p:nvPr>
-            <p:ph type="title"/>
-          </p:nvPr>
+          <p:cNvPr id="55" name="Google Shape;55;p14"/>
+          <p:cNvSpPr txBox="1"/>
+          <p:nvPr/>
         </p:nvSpPr>
-        <p:spPr/>
+        <p:spPr>
+          <a:xfrm>
+            <a:off x="658650" y="1516225"/>
+            <a:ext cx="7125600" cy="900000"/>
+          </a:xfrm>
+          <a:prstGeom prst="rect">
+            <a:avLst/>
+          </a:prstGeom>
+          <a:noFill/>
+          <a:ln>
+            <a:noFill/>
+          </a:ln>
+        </p:spPr>
         <p:txBody>
-          <a:bodyPr/>
+          <a:bodyPr anchorCtr="0" anchor="t" bIns="0" lIns="0" spcFirstLastPara="1" rIns="0" wrap="square" tIns="0">
+            <a:noAutofit/>
+          </a:bodyPr>
           <a:lstStyle/>
           <a:p>
-            <a:r>
-              <a:t>Questions?</a:t>
-            </a:r>
+            <a:pPr indent="0" lvl="0" marL="0" rtl="0" algn="l">
+              <a:lnSpc>
+                <a:spcPct val="85000"/>
+              </a:lnSpc>
+              <a:spcBef>
+                <a:spcPts val="0"/>
+              </a:spcBef>
+              <a:spcAft>
+                <a:spcPts val="0"/>
+              </a:spcAft>
+              <a:buNone/>
+            </a:pPr>
+            <a:r>
+              <a:rPr lang="en" sz="3800">
+                <a:solidFill>
+                  <a:srgbClr val="F1E9D6"/>
+                </a:solidFill>
+                <a:latin typeface="Inter SemiBold"/>
+                <a:ea typeface="Inter SemiBold"/>
+                <a:cs typeface="Inter SemiBold"/>
+                <a:sym typeface="Inter SemiBold"/>
+              </a:rPr>
+              <a:t>Presentation titles, </a:t>
+            </a:r>
+            <a:endParaRPr sz="3800">
+              <a:solidFill>
+                <a:srgbClr val="F1E9D6"/>
+              </a:solidFill>
+              <a:latin typeface="Inter SemiBold"/>
+              <a:ea typeface="Inter SemiBold"/>
+              <a:cs typeface="Inter SemiBold"/>
+              <a:sym typeface="Inter SemiBold"/>
+            </a:endParaRPr>
+          </a:p>
+          <a:p>
+            <a:pPr indent="0" lvl="0" marL="0" rtl="0" algn="l">
+              <a:lnSpc>
+                <a:spcPct val="85000"/>
+              </a:lnSpc>
+              <a:spcBef>
+                <a:spcPts val="0"/>
+              </a:spcBef>
+              <a:spcAft>
+                <a:spcPts val="0"/>
+              </a:spcAft>
+              <a:buClr>
+                <a:schemeClr val="dk1"/>
+              </a:buClr>
+              <a:buSzPts val="1100"/>
+              <a:buFont typeface="Arial"/>
+              <a:buNone/>
+            </a:pPr>
+            <a:r>
+              <a:rPr lang="en" sz="3800">
+                <a:solidFill>
+                  <a:srgbClr val="F1E9D6"/>
+                </a:solidFill>
+                <a:latin typeface="Inter SemiBold"/>
+                <a:ea typeface="Inter SemiBold"/>
+                <a:cs typeface="Inter SemiBold"/>
+                <a:sym typeface="Inter SemiBold"/>
+              </a:rPr>
+              <a:t>two lines</a:t>
+            </a:r>
+            <a:endParaRPr sz="3800">
+              <a:solidFill>
+                <a:srgbClr val="F1E9D6"/>
+              </a:solidFill>
+              <a:latin typeface="Inter SemiBold"/>
+              <a:ea typeface="Inter SemiBold"/>
+              <a:cs typeface="Inter SemiBold"/>
+              <a:sym typeface="Inter SemiBold"/>
+            </a:endParaRPr>
+          </a:p>
+          <a:p>
+            <a:pPr indent="0" lvl="0" marL="0" rtl="0" algn="l">
+              <a:lnSpc>
+                <a:spcPct val="85000"/>
+              </a:lnSpc>
+              <a:spcBef>
+                <a:spcPts val="0"/>
+              </a:spcBef>
+              <a:spcAft>
+                <a:spcPts val="0"/>
+              </a:spcAft>
+              <a:buClr>
+                <a:schemeClr val="dk1"/>
+              </a:buClr>
+              <a:buSzPts val="1100"/>
+              <a:buFont typeface="Arial"/>
+              <a:buNone/>
+            </a:pPr>
+            <a:r>
+              <a:t/>
+            </a:r>
+            <a:endParaRPr sz="3800">
+              <a:solidFill>
+                <a:srgbClr val="F1E9D6"/>
+              </a:solidFill>
+              <a:latin typeface="Inter SemiBold"/>
+              <a:ea typeface="Inter SemiBold"/>
+              <a:cs typeface="Inter SemiBold"/>
+              <a:sym typeface="Inter SemiBold"/>
+            </a:endParaRPr>
+          </a:p>
+          <a:p>
+            <a:pPr indent="0" lvl="0" marL="0" rtl="0" algn="l">
+              <a:lnSpc>
+                <a:spcPct val="85000"/>
+              </a:lnSpc>
+              <a:spcBef>
+                <a:spcPts val="0"/>
+              </a:spcBef>
+              <a:spcAft>
+                <a:spcPts val="0"/>
+              </a:spcAft>
+              <a:buNone/>
+            </a:pPr>
+            <a:r>
+              <a:t/>
+            </a:r>
+            <a:endParaRPr sz="3800">
+              <a:solidFill>
+                <a:srgbClr val="F1E9D6"/>
+              </a:solidFill>
+              <a:latin typeface="Inter SemiBold"/>
+              <a:ea typeface="Inter SemiBold"/>
+              <a:cs typeface="Inter SemiBold"/>
+              <a:sym typeface="Inter SemiBold"/>
+            </a:endParaRPr>
           </a:p>
         </p:txBody>
       </p:sp>
+      <p:sp>
+        <p:nvSpPr>
+          <p:cNvPr id="56" name="Google Shape;56;p14"/>
+          <p:cNvSpPr txBox="1"/>
+          <p:nvPr/>
+        </p:nvSpPr>
+        <p:spPr>
+          <a:xfrm>
+            <a:off x="658650" y="2932275"/>
+            <a:ext cx="7125600" cy="200700"/>
+          </a:xfrm>
+          <a:prstGeom prst="rect">
+            <a:avLst/>
+          </a:prstGeom>
+          <a:noFill/>
+          <a:ln>
+            <a:noFill/>
+          </a:ln>
+        </p:spPr>
+        <p:txBody>
+          <a:bodyPr anchorCtr="0" anchor="t" bIns="0" lIns="0" spcFirstLastPara="1" rIns="0" wrap="square" tIns="0">
+            <a:noAutofit/>
+          </a:bodyPr>
+          <a:lstStyle/>
+          <a:p>
+            <a:pPr indent="0" lvl="0" marL="0" rtl="0" algn="l">
+              <a:lnSpc>
+                <a:spcPct val="85000"/>
+              </a:lnSpc>
+              <a:spcBef>
+                <a:spcPts val="0"/>
+              </a:spcBef>
+              <a:spcAft>
+                <a:spcPts val="0"/>
+              </a:spcAft>
+              <a:buNone/>
+            </a:pPr>
+            <a:r>
+              <a:rPr lang="en">
+                <a:solidFill>
+                  <a:srgbClr val="F1E9D6"/>
+                </a:solidFill>
+                <a:latin typeface="Inter SemiBold"/>
+                <a:ea typeface="Inter SemiBold"/>
+                <a:cs typeface="Inter SemiBold"/>
+                <a:sym typeface="Inter SemiBold"/>
+              </a:rPr>
+              <a:t>Subtitle goes here</a:t>
+            </a:r>
+            <a:endParaRPr>
+              <a:solidFill>
+                <a:srgbClr val="F1E9D6"/>
+              </a:solidFill>
+              <a:latin typeface="Inter SemiBold"/>
+              <a:ea typeface="Inter SemiBold"/>
+              <a:cs typeface="Inter SemiBold"/>
+              <a:sym typeface="Inter SemiBold"/>
+            </a:endParaRPr>
+          </a:p>
+        </p:txBody>
+      </p:sp>
+      <p:pic>
+        <p:nvPicPr>
+          <p:cNvPr id="57" name="Google Shape;57;p14" title="logo-light.png"/>
+          <p:cNvPicPr preferRelativeResize="0"/>
+          <p:nvPr/>
+        </p:nvPicPr>
+        <p:blipFill rotWithShape="1">
+          <a:blip r:embed="rId3">
+            <a:alphaModFix/>
+          </a:blip>
+          <a:srcRect b="60" l="0" r="0" t="70"/>
+          <a:stretch/>
+        </p:blipFill>
+        <p:spPr>
+          <a:xfrm>
+            <a:off x="683765" y="399936"/>
+            <a:ext cx="1305252" cy="304875"/>
+          </a:xfrm>
+          <a:prstGeom prst="rect">
+            <a:avLst/>
+          </a:prstGeom>
+          <a:noFill/>
+          <a:ln>
+            <a:noFill/>
+          </a:ln>
+        </p:spPr>
+      </p:pic>
+      <p:sp>
+        <p:nvSpPr>
+          <p:cNvPr id="58" name="Google Shape;58;p14"/>
+          <p:cNvSpPr txBox="1"/>
+          <p:nvPr/>
+        </p:nvSpPr>
+        <p:spPr>
+          <a:xfrm>
+            <a:off x="683775" y="4584950"/>
+            <a:ext cx="4263600" cy="200700"/>
+          </a:xfrm>
+          <a:prstGeom prst="rect">
+            <a:avLst/>
+          </a:prstGeom>
+          <a:noFill/>
+          <a:ln>
+            <a:noFill/>
+          </a:ln>
+        </p:spPr>
+        <p:txBody>
+          <a:bodyPr anchorCtr="0" anchor="t" bIns="0" lIns="0" spcFirstLastPara="1" rIns="0" wrap="square" tIns="0">
+            <a:noAutofit/>
+          </a:bodyPr>
+          <a:lstStyle/>
+          <a:p>
+            <a:pPr indent="0" lvl="0" marL="0" rtl="0" algn="l">
+              <a:lnSpc>
+                <a:spcPct val="85000"/>
+              </a:lnSpc>
+              <a:spcBef>
+                <a:spcPts val="0"/>
+              </a:spcBef>
+              <a:spcAft>
+                <a:spcPts val="0"/>
+              </a:spcAft>
+              <a:buNone/>
+            </a:pPr>
+            <a:r>
+              <a:rPr lang="en" sz="1200">
+                <a:solidFill>
+                  <a:srgbClr val="F1E8D6"/>
+                </a:solidFill>
+                <a:latin typeface="Inter"/>
+                <a:ea typeface="Inter"/>
+                <a:cs typeface="Inter"/>
+                <a:sym typeface="Inter"/>
+              </a:rPr>
+              <a:t>December 1st, 2025</a:t>
+            </a:r>
+            <a:endParaRPr sz="1200">
+              <a:solidFill>
+                <a:srgbClr val="F1E8D6"/>
+              </a:solidFill>
+              <a:latin typeface="Inter"/>
+              <a:ea typeface="Inter"/>
+              <a:cs typeface="Inter"/>
+              <a:sym typeface="Inter"/>
+            </a:endParaRPr>
+          </a:p>
+        </p:txBody>
+      </p:sp>
+      <p:cxnSp>
+        <p:nvCxnSpPr>
+          <p:cNvPr id="59" name="Google Shape;59;p14"/>
+          <p:cNvCxnSpPr/>
+          <p:nvPr/>
+        </p:nvCxnSpPr>
+        <p:spPr>
+          <a:xfrm>
+            <a:off x="671275" y="2689675"/>
+            <a:ext cx="984300" cy="0"/>
+          </a:xfrm>
+          <a:prstGeom prst="straightConnector1">
+            <a:avLst/>
+          </a:prstGeom>
+          <a:noFill/>
+          <a:ln cap="flat" cmpd="sng" w="19050">
+            <a:solidFill>
+              <a:srgbClr val="6ABA48"/>
+            </a:solidFill>
+            <a:prstDash val="solid"/>
+            <a:round/>
+            <a:headEnd len="med" w="med" type="none"/>
+            <a:tailEnd len="med" w="med" type="none"/>
+          </a:ln>
+        </p:spPr>
+      </p:cxnSp>
     </p:spTree>
   </p:cSld>
   <p:clrMapOvr>
@@ -6010,34 +8947,360 @@
 <file path=ppt/slides/slide2.xml><?xml version="1.0" encoding="utf-8"?>
 <p:sld xmlns:a="http://schemas.openxmlformats.org/drawingml/2006/main" xmlns:p="http://schemas.openxmlformats.org/presentationml/2006/main" xmlns:r="http://schemas.openxmlformats.org/officeDocument/2006/relationships">
   <p:cSld>
+    <p:bg>
+      <p:bgPr>
+        <a:solidFill>
+          <a:srgbClr val="042017"/>
+        </a:solidFill>
+      </p:bgPr>
+    </p:bg>
     <p:spTree>
       <p:nvGrpSpPr>
-        <p:cNvPr id="1" name=""/>
+        <p:cNvPr id="54" name="Shape 54"/>
         <p:cNvGrpSpPr/>
         <p:nvPr/>
       </p:nvGrpSpPr>
-      <p:grpSpPr/>
+      <p:grpSpPr>
+        <a:xfrm>
+          <a:off x="0" y="0"/>
+          <a:ext cx="0" cy="0"/>
+          <a:chOff x="0" y="0"/>
+          <a:chExt cx="0" cy="0"/>
+        </a:xfrm>
+      </p:grpSpPr>
       <p:sp>
         <p:nvSpPr>
-          <p:cNvPr id="2" name="Title 1"/>
-          <p:cNvSpPr>
-            <a:spLocks noGrp="1"/>
-          </p:cNvSpPr>
-          <p:nvPr>
-            <p:ph type="title"/>
-          </p:nvPr>
+          <p:cNvPr id="55" name="Google Shape;55;p14"/>
+          <p:cNvSpPr txBox="1"/>
+          <p:nvPr/>
         </p:nvSpPr>
-        <p:spPr/>
+        <p:spPr>
+          <a:xfrm>
+            <a:off x="658650" y="1516225"/>
+            <a:ext cx="7125600" cy="900000"/>
+          </a:xfrm>
+          <a:prstGeom prst="rect">
+            <a:avLst/>
+          </a:prstGeom>
+          <a:noFill/>
+          <a:ln>
+            <a:noFill/>
+          </a:ln>
+        </p:spPr>
         <p:txBody>
-          <a:bodyPr/>
+          <a:bodyPr anchorCtr="0" anchor="t" bIns="0" lIns="0" spcFirstLastPara="1" rIns="0" wrap="square" tIns="0">
+            <a:noAutofit/>
+          </a:bodyPr>
           <a:lstStyle/>
           <a:p>
-            <a:r>
-              <a:t>What Is Tilda?</a:t>
-            </a:r>
+            <a:pPr indent="0" lvl="0" marL="0" rtl="0" algn="l">
+              <a:lnSpc>
+                <a:spcPct val="85000"/>
+              </a:lnSpc>
+              <a:spcBef>
+                <a:spcPts val="0"/>
+              </a:spcBef>
+              <a:spcAft>
+                <a:spcPts val="0"/>
+              </a:spcAft>
+              <a:buNone/>
+            </a:pPr>
+            <a:r>
+              <a:rPr lang="en" sz="3800">
+                <a:solidFill>
+                  <a:srgbClr val="F1E9D6"/>
+                </a:solidFill>
+                <a:latin typeface="Inter SemiBold"/>
+                <a:ea typeface="Inter SemiBold"/>
+                <a:cs typeface="Inter SemiBold"/>
+                <a:sym typeface="Inter SemiBold"/>
+              </a:rPr>
+              <a:t>Presentation titles, </a:t>
+            </a:r>
+            <a:endParaRPr sz="3800">
+              <a:solidFill>
+                <a:srgbClr val="F1E9D6"/>
+              </a:solidFill>
+              <a:latin typeface="Inter SemiBold"/>
+              <a:ea typeface="Inter SemiBold"/>
+              <a:cs typeface="Inter SemiBold"/>
+              <a:sym typeface="Inter SemiBold"/>
+            </a:endParaRPr>
+          </a:p>
+          <a:p>
+            <a:pPr indent="0" lvl="0" marL="0" rtl="0" algn="l">
+              <a:lnSpc>
+                <a:spcPct val="85000"/>
+              </a:lnSpc>
+              <a:spcBef>
+                <a:spcPts val="0"/>
+              </a:spcBef>
+              <a:spcAft>
+                <a:spcPts val="0"/>
+              </a:spcAft>
+              <a:buClr>
+                <a:schemeClr val="dk1"/>
+              </a:buClr>
+              <a:buSzPts val="1100"/>
+              <a:buFont typeface="Arial"/>
+              <a:buNone/>
+            </a:pPr>
+            <a:r>
+              <a:rPr lang="en" sz="3800">
+                <a:solidFill>
+                  <a:srgbClr val="F1E9D6"/>
+                </a:solidFill>
+                <a:latin typeface="Inter SemiBold"/>
+                <a:ea typeface="Inter SemiBold"/>
+                <a:cs typeface="Inter SemiBold"/>
+                <a:sym typeface="Inter SemiBold"/>
+              </a:rPr>
+              <a:t>two lines</a:t>
+            </a:r>
+            <a:endParaRPr sz="3800">
+              <a:solidFill>
+                <a:srgbClr val="F1E9D6"/>
+              </a:solidFill>
+              <a:latin typeface="Inter SemiBold"/>
+              <a:ea typeface="Inter SemiBold"/>
+              <a:cs typeface="Inter SemiBold"/>
+              <a:sym typeface="Inter SemiBold"/>
+            </a:endParaRPr>
+          </a:p>
+          <a:p>
+            <a:pPr indent="0" lvl="0" marL="0" rtl="0" algn="l">
+              <a:lnSpc>
+                <a:spcPct val="85000"/>
+              </a:lnSpc>
+              <a:spcBef>
+                <a:spcPts val="0"/>
+              </a:spcBef>
+              <a:spcAft>
+                <a:spcPts val="0"/>
+              </a:spcAft>
+              <a:buClr>
+                <a:schemeClr val="dk1"/>
+              </a:buClr>
+              <a:buSzPts val="1100"/>
+              <a:buFont typeface="Arial"/>
+              <a:buNone/>
+            </a:pPr>
+            <a:r>
+              <a:t/>
+            </a:r>
+            <a:endParaRPr sz="3800">
+              <a:solidFill>
+                <a:srgbClr val="F1E9D6"/>
+              </a:solidFill>
+              <a:latin typeface="Inter SemiBold"/>
+              <a:ea typeface="Inter SemiBold"/>
+              <a:cs typeface="Inter SemiBold"/>
+              <a:sym typeface="Inter SemiBold"/>
+            </a:endParaRPr>
+          </a:p>
+          <a:p>
+            <a:pPr indent="0" lvl="0" marL="0" rtl="0" algn="l">
+              <a:lnSpc>
+                <a:spcPct val="85000"/>
+              </a:lnSpc>
+              <a:spcBef>
+                <a:spcPts val="0"/>
+              </a:spcBef>
+              <a:spcAft>
+                <a:spcPts val="0"/>
+              </a:spcAft>
+              <a:buNone/>
+            </a:pPr>
+            <a:r>
+              <a:t/>
+            </a:r>
+            <a:endParaRPr sz="3800">
+              <a:solidFill>
+                <a:srgbClr val="F1E9D6"/>
+              </a:solidFill>
+              <a:latin typeface="Inter SemiBold"/>
+              <a:ea typeface="Inter SemiBold"/>
+              <a:cs typeface="Inter SemiBold"/>
+              <a:sym typeface="Inter SemiBold"/>
+            </a:endParaRPr>
           </a:p>
         </p:txBody>
       </p:sp>
+      <p:sp>
+        <p:nvSpPr>
+          <p:cNvPr id="56" name="Google Shape;56;p14"/>
+          <p:cNvSpPr txBox="1"/>
+          <p:nvPr/>
+        </p:nvSpPr>
+        <p:spPr>
+          <a:xfrm>
+            <a:off x="658650" y="2932275"/>
+            <a:ext cx="7125600" cy="200700"/>
+          </a:xfrm>
+          <a:prstGeom prst="rect">
+            <a:avLst/>
+          </a:prstGeom>
+          <a:noFill/>
+          <a:ln>
+            <a:noFill/>
+          </a:ln>
+        </p:spPr>
+        <p:txBody>
+          <a:bodyPr anchorCtr="0" anchor="t" bIns="0" lIns="0" spcFirstLastPara="1" rIns="0" wrap="square" tIns="0">
+            <a:noAutofit/>
+          </a:bodyPr>
+          <a:lstStyle/>
+          <a:p>
+            <a:pPr indent="0" lvl="0" marL="0" rtl="0" algn="l">
+              <a:lnSpc>
+                <a:spcPct val="85000"/>
+              </a:lnSpc>
+              <a:spcBef>
+                <a:spcPts val="0"/>
+              </a:spcBef>
+              <a:spcAft>
+                <a:spcPts val="0"/>
+              </a:spcAft>
+              <a:buNone/>
+            </a:pPr>
+            <a:r>
+              <a:rPr lang="en">
+                <a:solidFill>
+                  <a:srgbClr val="F1E9D6"/>
+                </a:solidFill>
+                <a:latin typeface="Inter SemiBold"/>
+                <a:ea typeface="Inter SemiBold"/>
+                <a:cs typeface="Inter SemiBold"/>
+                <a:sym typeface="Inter SemiBold"/>
+              </a:rPr>
+              <a:t>Subtitle goes here</a:t>
+            </a:r>
+            <a:endParaRPr>
+              <a:solidFill>
+                <a:srgbClr val="F1E9D6"/>
+              </a:solidFill>
+              <a:latin typeface="Inter SemiBold"/>
+              <a:ea typeface="Inter SemiBold"/>
+              <a:cs typeface="Inter SemiBold"/>
+              <a:sym typeface="Inter SemiBold"/>
+            </a:endParaRPr>
+          </a:p>
+        </p:txBody>
+      </p:sp>
+      <p:pic>
+        <p:nvPicPr>
+          <p:cNvPr id="57" name="Google Shape;57;p14" title="logo-light.png"/>
+          <p:cNvPicPr preferRelativeResize="0"/>
+          <p:nvPr/>
+        </p:nvPicPr>
+        <p:blipFill rotWithShape="1">
+          <a:blip r:embed="rId3">
+            <a:alphaModFix/>
+          </a:blip>
+          <a:srcRect b="60" l="0" r="0" t="70"/>
+          <a:stretch/>
+        </p:blipFill>
+        <p:spPr>
+          <a:xfrm>
+            <a:off x="683765" y="399936"/>
+            <a:ext cx="1305252" cy="304875"/>
+          </a:xfrm>
+          <a:prstGeom prst="rect">
+            <a:avLst/>
+          </a:prstGeom>
+          <a:noFill/>
+          <a:ln>
+            <a:noFill/>
+          </a:ln>
+        </p:spPr>
+      </p:pic>
+      <p:sp>
+        <p:nvSpPr>
+          <p:cNvPr id="58" name="Google Shape;58;p14"/>
+          <p:cNvSpPr txBox="1"/>
+          <p:nvPr/>
+        </p:nvSpPr>
+        <p:spPr>
+          <a:xfrm>
+            <a:off x="683775" y="4584950"/>
+            <a:ext cx="4263600" cy="200700"/>
+          </a:xfrm>
+          <a:prstGeom prst="rect">
+            <a:avLst/>
+          </a:prstGeom>
+          <a:noFill/>
+          <a:ln>
+            <a:noFill/>
+          </a:ln>
+        </p:spPr>
+        <p:txBody>
+          <a:bodyPr anchorCtr="0" anchor="t" bIns="0" lIns="0" spcFirstLastPara="1" rIns="0" wrap="square" tIns="0">
+            <a:noAutofit/>
+          </a:bodyPr>
+          <a:lstStyle/>
+          <a:p>
+            <a:pPr indent="0" lvl="0" marL="0" rtl="0" algn="l">
+              <a:lnSpc>
+                <a:spcPct val="85000"/>
+              </a:lnSpc>
+              <a:spcBef>
+                <a:spcPts val="0"/>
+              </a:spcBef>
+              <a:spcAft>
+                <a:spcPts val="0"/>
+              </a:spcAft>
+              <a:buNone/>
+            </a:pPr>
+            <a:r>
+              <a:rPr lang="en" sz="1200">
+                <a:solidFill>
+                  <a:srgbClr val="F1E8D6"/>
+                </a:solidFill>
+                <a:latin typeface="Inter"/>
+                <a:ea typeface="Inter"/>
+                <a:cs typeface="Inter"/>
+                <a:sym typeface="Inter"/>
+              </a:rPr>
+              <a:t>December 1st, 2025</a:t>
+            </a:r>
+            <a:endParaRPr sz="1200">
+              <a:solidFill>
+                <a:srgbClr val="F1E8D6"/>
+              </a:solidFill>
+              <a:latin typeface="Inter"/>
+              <a:ea typeface="Inter"/>
+              <a:cs typeface="Inter"/>
+              <a:sym typeface="Inter"/>
+            </a:endParaRPr>
+          </a:p>
+        </p:txBody>
+      </p:sp>
+      <p:cxnSp>
+        <p:nvCxnSpPr>
+          <p:cNvPr id="59" name="Google Shape;59;p14"/>
+          <p:cNvCxnSpPr/>
+          <p:nvPr/>
+        </p:nvCxnSpPr>
+        <p:spPr>
+          <a:xfrm>
+            <a:off x="671275" y="2689675"/>
+            <a:ext cx="984300" cy="0"/>
+          </a:xfrm>
+          <a:prstGeom prst="straightConnector1">
+            <a:avLst/>
+          </a:prstGeom>
+          <a:noFill/>
+          <a:ln cap="flat" cmpd="sng" w="19050">
+            <a:solidFill>
+              <a:srgbClr val="6ABA48"/>
+            </a:solidFill>
+            <a:prstDash val="solid"/>
+            <a:round/>
+            <a:headEnd len="med" w="med" type="none"/>
+            <a:tailEnd len="med" w="med" type="none"/>
+          </a:ln>
+        </p:spPr>
+      </p:cxnSp>
     </p:spTree>
   </p:cSld>
   <p:clrMapOvr>
@@ -6049,67 +9312,423 @@
 <file path=ppt/slides/slide3.xml><?xml version="1.0" encoding="utf-8"?>
 <p:sld xmlns:a="http://schemas.openxmlformats.org/drawingml/2006/main" xmlns:p="http://schemas.openxmlformats.org/presentationml/2006/main" xmlns:r="http://schemas.openxmlformats.org/officeDocument/2006/relationships">
   <p:cSld>
+    <p:bg>
+      <p:bgPr>
+        <a:solidFill>
+          <a:srgbClr val="F1E8D6"/>
+        </a:solidFill>
+      </p:bgPr>
+    </p:bg>
     <p:spTree>
       <p:nvGrpSpPr>
-        <p:cNvPr id="1" name=""/>
+        <p:cNvPr id="141" name="Shape 141"/>
         <p:cNvGrpSpPr/>
         <p:nvPr/>
       </p:nvGrpSpPr>
-      <p:grpSpPr/>
+      <p:grpSpPr>
+        <a:xfrm>
+          <a:off x="0" y="0"/>
+          <a:ext cx="0" cy="0"/>
+          <a:chOff x="0" y="0"/>
+          <a:chExt cx="0" cy="0"/>
+        </a:xfrm>
+      </p:grpSpPr>
       <p:sp>
         <p:nvSpPr>
-          <p:cNvPr id="2" name="Title 1"/>
-          <p:cNvSpPr>
-            <a:spLocks noGrp="1"/>
-          </p:cNvSpPr>
-          <p:nvPr>
-            <p:ph type="title"/>
-          </p:nvPr>
+          <p:cNvPr id="142" name="Google Shape;142;p18"/>
+          <p:cNvSpPr txBox="1"/>
+          <p:nvPr/>
         </p:nvSpPr>
-        <p:spPr/>
+        <p:spPr>
+          <a:xfrm>
+            <a:off x="467950" y="623324"/>
+            <a:ext cx="7125600" cy="900000"/>
+          </a:xfrm>
+          <a:prstGeom prst="rect">
+            <a:avLst/>
+          </a:prstGeom>
+          <a:noFill/>
+          <a:ln>
+            <a:noFill/>
+          </a:ln>
+        </p:spPr>
         <p:txBody>
-          <a:bodyPr/>
+          <a:bodyPr anchorCtr="0" anchor="t" bIns="0" lIns="0" spcFirstLastPara="1" rIns="0" wrap="square" tIns="0">
+            <a:noAutofit/>
+          </a:bodyPr>
           <a:lstStyle/>
           <a:p>
-            <a:r>
-              <a:t>Your AI Swiss Army Knife</a:t>
-            </a:r>
+            <a:pPr indent="0" lvl="0" marL="0" rtl="0" algn="l">
+              <a:lnSpc>
+                <a:spcPct val="85000"/>
+              </a:lnSpc>
+              <a:spcBef>
+                <a:spcPts val="0"/>
+              </a:spcBef>
+              <a:spcAft>
+                <a:spcPts val="0"/>
+              </a:spcAft>
+              <a:buClr>
+                <a:schemeClr val="dk1"/>
+              </a:buClr>
+              <a:buSzPts val="1100"/>
+              <a:buFont typeface="Arial"/>
+              <a:buNone/>
+            </a:pPr>
+            <a:r>
+              <a:rPr lang="en" sz="2800">
+                <a:solidFill>
+                  <a:srgbClr val="042017"/>
+                </a:solidFill>
+                <a:latin typeface="Inter SemiBold"/>
+                <a:ea typeface="Inter SemiBold"/>
+                <a:cs typeface="Inter SemiBold"/>
+                <a:sym typeface="Inter SemiBold"/>
+              </a:rPr>
+              <a:t>Title and body text</a:t>
+            </a:r>
+            <a:endParaRPr sz="2800">
+              <a:solidFill>
+                <a:srgbClr val="042017"/>
+              </a:solidFill>
+              <a:latin typeface="Inter SemiBold"/>
+              <a:ea typeface="Inter SemiBold"/>
+              <a:cs typeface="Inter SemiBold"/>
+              <a:sym typeface="Inter SemiBold"/>
+            </a:endParaRPr>
+          </a:p>
+          <a:p>
+            <a:pPr indent="0" lvl="0" marL="0" rtl="0" algn="l">
+              <a:lnSpc>
+                <a:spcPct val="85000"/>
+              </a:lnSpc>
+              <a:spcBef>
+                <a:spcPts val="0"/>
+              </a:spcBef>
+              <a:spcAft>
+                <a:spcPts val="0"/>
+              </a:spcAft>
+              <a:buClr>
+                <a:schemeClr val="dk1"/>
+              </a:buClr>
+              <a:buSzPts val="1100"/>
+              <a:buFont typeface="Arial"/>
+              <a:buNone/>
+            </a:pPr>
+            <a:r>
+              <a:t/>
+            </a:r>
+            <a:endParaRPr sz="2800">
+              <a:solidFill>
+                <a:srgbClr val="042017"/>
+              </a:solidFill>
+              <a:latin typeface="Inter SemiBold"/>
+              <a:ea typeface="Inter SemiBold"/>
+              <a:cs typeface="Inter SemiBold"/>
+              <a:sym typeface="Inter SemiBold"/>
+            </a:endParaRPr>
+          </a:p>
+          <a:p>
+            <a:pPr indent="0" lvl="0" marL="0" rtl="0" algn="l">
+              <a:lnSpc>
+                <a:spcPct val="85000"/>
+              </a:lnSpc>
+              <a:spcBef>
+                <a:spcPts val="0"/>
+              </a:spcBef>
+              <a:spcAft>
+                <a:spcPts val="0"/>
+              </a:spcAft>
+              <a:buNone/>
+            </a:pPr>
+            <a:r>
+              <a:t/>
+            </a:r>
+            <a:endParaRPr sz="2800">
+              <a:solidFill>
+                <a:srgbClr val="042017"/>
+              </a:solidFill>
+              <a:latin typeface="Inter SemiBold"/>
+              <a:ea typeface="Inter SemiBold"/>
+              <a:cs typeface="Inter SemiBold"/>
+              <a:sym typeface="Inter SemiBold"/>
+            </a:endParaRPr>
           </a:p>
         </p:txBody>
       </p:sp>
       <p:sp>
         <p:nvSpPr>
-          <p:cNvPr id="3" name="Text Placeholder 2"/>
-          <p:cNvSpPr>
-            <a:spLocks noGrp="1"/>
-          </p:cNvSpPr>
-          <p:nvPr>
-            <p:ph type="body" idx="1"/>
-          </p:nvPr>
+          <p:cNvPr id="143" name="Google Shape;143;p18"/>
+          <p:cNvSpPr txBox="1"/>
+          <p:nvPr/>
         </p:nvSpPr>
-        <p:spPr/>
+        <p:spPr>
+          <a:xfrm>
+            <a:off x="467950" y="1469674"/>
+            <a:ext cx="7125600" cy="1504200"/>
+          </a:xfrm>
+          <a:prstGeom prst="rect">
+            <a:avLst/>
+          </a:prstGeom>
+          <a:noFill/>
+          <a:ln>
+            <a:noFill/>
+          </a:ln>
+        </p:spPr>
         <p:txBody>
-          <a:bodyPr/>
+          <a:bodyPr anchorCtr="0" anchor="t" bIns="0" lIns="0" spcFirstLastPara="1" rIns="0" wrap="square" tIns="0">
+            <a:noAutofit/>
+          </a:bodyPr>
           <a:lstStyle/>
           <a:p>
-            <a:r>
-              <a:t>Tilda is Dutchie's AI-powered assistant that lives in Slack.</a:t>
-            </a:r>
-          </a:p>
-          <a:p/>
-          <a:p>
-            <a:r>
-              <a:t>Think of Tilda as a Swiss Army knife — one tool with many capabilities.</a:t>
-            </a:r>
-          </a:p>
-          <a:p/>
-          <a:p>
-            <a:r>
-              <a:t>Originally called TLDRBot (summarizing Slack threads), Tilda evolved into a full AI assistant that can search Confluence, manage JIRA tickets, query Datadog, analyze documents, and much more.</a:t>
-            </a:r>
+            <a:pPr indent="0" lvl="0" marL="0" rtl="0" algn="l">
+              <a:lnSpc>
+                <a:spcPct val="115000"/>
+              </a:lnSpc>
+              <a:spcBef>
+                <a:spcPts val="0"/>
+              </a:spcBef>
+              <a:spcAft>
+                <a:spcPts val="0"/>
+              </a:spcAft>
+              <a:buClr>
+                <a:schemeClr val="dk1"/>
+              </a:buClr>
+              <a:buSzPts val="1100"/>
+              <a:buFont typeface="Arial"/>
+              <a:buNone/>
+            </a:pPr>
+            <a:r>
+              <a:rPr lang="en" sz="1000">
+                <a:solidFill>
+                  <a:srgbClr val="042017"/>
+                </a:solidFill>
+                <a:latin typeface="Inter"/>
+                <a:ea typeface="Inter"/>
+                <a:cs typeface="Inter"/>
+                <a:sym typeface="Inter"/>
+              </a:rPr>
+              <a:t>Lorem ipsum dolor sit amet, consectetur adipiscing elit. Fusce vitae commodo mauris. Nullam malesuada nisl a mollis faucibus. Curabitur tincidunt ligula turpis, sed rhoncus odio fermentum pellentesque. Fusce id augue eu lacus ullamcorper pretium a id risus. Donec ac mauris viverra, imperdiet orci eu, aliquet leo. Vestibulum quis augue nec justo scelerisque ultrices. Nulla posuere, sapien at finibus consectetur, eros turpis luctus quam, et ornare magna magna sit amet mauris. Donec maximus, orci ut vestibulum ultrices, magna sem sollicitudin metus, et aliquam erat felis sit amet dui. In eu libero sit amet quam sollicitudin vehicula vitae quis quam. Etiam sit amet dolor aliquet massa iaculis porta.</a:t>
+            </a:r>
+            <a:endParaRPr sz="1000">
+              <a:solidFill>
+                <a:srgbClr val="042017"/>
+              </a:solidFill>
+              <a:latin typeface="Inter"/>
+              <a:ea typeface="Inter"/>
+              <a:cs typeface="Inter"/>
+              <a:sym typeface="Inter"/>
+            </a:endParaRPr>
+          </a:p>
+          <a:p>
+            <a:pPr indent="0" lvl="0" marL="0" rtl="0" algn="l">
+              <a:lnSpc>
+                <a:spcPct val="115000"/>
+              </a:lnSpc>
+              <a:spcBef>
+                <a:spcPts val="0"/>
+              </a:spcBef>
+              <a:spcAft>
+                <a:spcPts val="0"/>
+              </a:spcAft>
+              <a:buClr>
+                <a:schemeClr val="dk1"/>
+              </a:buClr>
+              <a:buSzPts val="1100"/>
+              <a:buFont typeface="Arial"/>
+              <a:buNone/>
+            </a:pPr>
+            <a:r>
+              <a:t/>
+            </a:r>
+            <a:endParaRPr sz="1000">
+              <a:solidFill>
+                <a:srgbClr val="042017"/>
+              </a:solidFill>
+              <a:latin typeface="Inter"/>
+              <a:ea typeface="Inter"/>
+              <a:cs typeface="Inter"/>
+              <a:sym typeface="Inter"/>
+            </a:endParaRPr>
+          </a:p>
+          <a:p>
+            <a:pPr indent="0" lvl="0" marL="0" rtl="0" algn="l">
+              <a:lnSpc>
+                <a:spcPct val="115000"/>
+              </a:lnSpc>
+              <a:spcBef>
+                <a:spcPts val="0"/>
+              </a:spcBef>
+              <a:spcAft>
+                <a:spcPts val="0"/>
+              </a:spcAft>
+              <a:buNone/>
+            </a:pPr>
+            <a:r>
+              <a:t/>
+            </a:r>
+            <a:endParaRPr sz="1000">
+              <a:solidFill>
+                <a:srgbClr val="042017"/>
+              </a:solidFill>
+              <a:latin typeface="Inter"/>
+              <a:ea typeface="Inter"/>
+              <a:cs typeface="Inter"/>
+              <a:sym typeface="Inter"/>
+            </a:endParaRPr>
           </a:p>
         </p:txBody>
       </p:sp>
+      <p:sp>
+        <p:nvSpPr>
+          <p:cNvPr id="144" name="Google Shape;144;p18"/>
+          <p:cNvSpPr txBox="1"/>
+          <p:nvPr/>
+        </p:nvSpPr>
+        <p:spPr>
+          <a:xfrm>
+            <a:off x="467950" y="339124"/>
+            <a:ext cx="7125600" cy="200700"/>
+          </a:xfrm>
+          <a:prstGeom prst="rect">
+            <a:avLst/>
+          </a:prstGeom>
+          <a:noFill/>
+          <a:ln>
+            <a:noFill/>
+          </a:ln>
+        </p:spPr>
+        <p:txBody>
+          <a:bodyPr anchorCtr="0" anchor="t" bIns="0" lIns="0" spcFirstLastPara="1" rIns="0" wrap="square" tIns="0">
+            <a:noAutofit/>
+          </a:bodyPr>
+          <a:lstStyle/>
+          <a:p>
+            <a:pPr indent="0" lvl="0" marL="0" rtl="0" algn="l">
+              <a:lnSpc>
+                <a:spcPct val="85000"/>
+              </a:lnSpc>
+              <a:spcBef>
+                <a:spcPts val="0"/>
+              </a:spcBef>
+              <a:spcAft>
+                <a:spcPts val="0"/>
+              </a:spcAft>
+              <a:buClr>
+                <a:schemeClr val="dk1"/>
+              </a:buClr>
+              <a:buSzPts val="1100"/>
+              <a:buFont typeface="Arial"/>
+              <a:buNone/>
+            </a:pPr>
+            <a:r>
+              <a:rPr b="1" lang="en" sz="900">
+                <a:solidFill>
+                  <a:srgbClr val="7F7F7F"/>
+                </a:solidFill>
+                <a:latin typeface="Inter"/>
+                <a:ea typeface="Inter"/>
+                <a:cs typeface="Inter"/>
+                <a:sym typeface="Inter"/>
+              </a:rPr>
+              <a:t>EYEBROW HEADING</a:t>
+            </a:r>
+            <a:endParaRPr b="1" sz="900">
+              <a:solidFill>
+                <a:srgbClr val="7F7F7F"/>
+              </a:solidFill>
+              <a:latin typeface="Inter"/>
+              <a:ea typeface="Inter"/>
+              <a:cs typeface="Inter"/>
+              <a:sym typeface="Inter"/>
+            </a:endParaRPr>
+          </a:p>
+          <a:p>
+            <a:pPr indent="0" lvl="0" marL="0" rtl="0" algn="l">
+              <a:lnSpc>
+                <a:spcPct val="85000"/>
+              </a:lnSpc>
+              <a:spcBef>
+                <a:spcPts val="0"/>
+              </a:spcBef>
+              <a:spcAft>
+                <a:spcPts val="0"/>
+              </a:spcAft>
+              <a:buClr>
+                <a:schemeClr val="dk1"/>
+              </a:buClr>
+              <a:buSzPts val="1100"/>
+              <a:buFont typeface="Arial"/>
+              <a:buNone/>
+            </a:pPr>
+            <a:r>
+              <a:t/>
+            </a:r>
+            <a:endParaRPr b="1" sz="900">
+              <a:solidFill>
+                <a:srgbClr val="7F7F7F"/>
+              </a:solidFill>
+              <a:latin typeface="Inter"/>
+              <a:ea typeface="Inter"/>
+              <a:cs typeface="Inter"/>
+              <a:sym typeface="Inter"/>
+            </a:endParaRPr>
+          </a:p>
+          <a:p>
+            <a:pPr indent="0" lvl="0" marL="0" rtl="0" algn="l">
+              <a:lnSpc>
+                <a:spcPct val="85000"/>
+              </a:lnSpc>
+              <a:spcBef>
+                <a:spcPts val="0"/>
+              </a:spcBef>
+              <a:spcAft>
+                <a:spcPts val="0"/>
+              </a:spcAft>
+              <a:buNone/>
+            </a:pPr>
+            <a:r>
+              <a:t/>
+            </a:r>
+            <a:endParaRPr b="1" sz="900">
+              <a:solidFill>
+                <a:srgbClr val="7F7F7F"/>
+              </a:solidFill>
+              <a:latin typeface="Inter"/>
+              <a:ea typeface="Inter"/>
+              <a:cs typeface="Inter"/>
+              <a:sym typeface="Inter"/>
+            </a:endParaRPr>
+          </a:p>
+        </p:txBody>
+      </p:sp>
+      <p:pic>
+        <p:nvPicPr>
+          <p:cNvPr id="145" name="Google Shape;145;p18" title="logo-dark.png"/>
+          <p:cNvPicPr preferRelativeResize="0"/>
+          <p:nvPr/>
+        </p:nvPicPr>
+        <p:blipFill rotWithShape="1">
+          <a:blip r:embed="rId3">
+            <a:alphaModFix/>
+          </a:blip>
+          <a:srcRect b="0" l="40" r="40" t="0"/>
+          <a:stretch/>
+        </p:blipFill>
+        <p:spPr>
+          <a:xfrm>
+            <a:off x="493052" y="4663948"/>
+            <a:ext cx="615327" cy="143725"/>
+          </a:xfrm>
+          <a:prstGeom prst="rect">
+            <a:avLst/>
+          </a:prstGeom>
+          <a:noFill/>
+          <a:ln>
+            <a:noFill/>
+          </a:ln>
+        </p:spPr>
+      </p:pic>
     </p:spTree>
   </p:cSld>
   <p:clrMapOvr>
@@ -6121,34 +9740,360 @@
 <file path=ppt/slides/slide4.xml><?xml version="1.0" encoding="utf-8"?>
 <p:sld xmlns:a="http://schemas.openxmlformats.org/drawingml/2006/main" xmlns:p="http://schemas.openxmlformats.org/presentationml/2006/main" xmlns:r="http://schemas.openxmlformats.org/officeDocument/2006/relationships">
   <p:cSld>
+    <p:bg>
+      <p:bgPr>
+        <a:solidFill>
+          <a:srgbClr val="042017"/>
+        </a:solidFill>
+      </p:bgPr>
+    </p:bg>
     <p:spTree>
       <p:nvGrpSpPr>
-        <p:cNvPr id="1" name=""/>
+        <p:cNvPr id="54" name="Shape 54"/>
         <p:cNvGrpSpPr/>
         <p:nvPr/>
       </p:nvGrpSpPr>
-      <p:grpSpPr/>
+      <p:grpSpPr>
+        <a:xfrm>
+          <a:off x="0" y="0"/>
+          <a:ext cx="0" cy="0"/>
+          <a:chOff x="0" y="0"/>
+          <a:chExt cx="0" cy="0"/>
+        </a:xfrm>
+      </p:grpSpPr>
       <p:sp>
         <p:nvSpPr>
-          <p:cNvPr id="2" name="Title 1"/>
-          <p:cNvSpPr>
-            <a:spLocks noGrp="1"/>
-          </p:cNvSpPr>
-          <p:nvPr>
-            <p:ph type="title"/>
-          </p:nvPr>
+          <p:cNvPr id="55" name="Google Shape;55;p14"/>
+          <p:cNvSpPr txBox="1"/>
+          <p:nvPr/>
         </p:nvSpPr>
-        <p:spPr/>
+        <p:spPr>
+          <a:xfrm>
+            <a:off x="658650" y="1516225"/>
+            <a:ext cx="7125600" cy="900000"/>
+          </a:xfrm>
+          <a:prstGeom prst="rect">
+            <a:avLst/>
+          </a:prstGeom>
+          <a:noFill/>
+          <a:ln>
+            <a:noFill/>
+          </a:ln>
+        </p:spPr>
         <p:txBody>
-          <a:bodyPr/>
+          <a:bodyPr anchorCtr="0" anchor="t" bIns="0" lIns="0" spcFirstLastPara="1" rIns="0" wrap="square" tIns="0">
+            <a:noAutofit/>
+          </a:bodyPr>
           <a:lstStyle/>
           <a:p>
-            <a:r>
-              <a:t>How Does Tilda Work?</a:t>
-            </a:r>
+            <a:pPr indent="0" lvl="0" marL="0" rtl="0" algn="l">
+              <a:lnSpc>
+                <a:spcPct val="85000"/>
+              </a:lnSpc>
+              <a:spcBef>
+                <a:spcPts val="0"/>
+              </a:spcBef>
+              <a:spcAft>
+                <a:spcPts val="0"/>
+              </a:spcAft>
+              <a:buNone/>
+            </a:pPr>
+            <a:r>
+              <a:rPr lang="en" sz="3800">
+                <a:solidFill>
+                  <a:srgbClr val="F1E9D6"/>
+                </a:solidFill>
+                <a:latin typeface="Inter SemiBold"/>
+                <a:ea typeface="Inter SemiBold"/>
+                <a:cs typeface="Inter SemiBold"/>
+                <a:sym typeface="Inter SemiBold"/>
+              </a:rPr>
+              <a:t>Presentation titles, </a:t>
+            </a:r>
+            <a:endParaRPr sz="3800">
+              <a:solidFill>
+                <a:srgbClr val="F1E9D6"/>
+              </a:solidFill>
+              <a:latin typeface="Inter SemiBold"/>
+              <a:ea typeface="Inter SemiBold"/>
+              <a:cs typeface="Inter SemiBold"/>
+              <a:sym typeface="Inter SemiBold"/>
+            </a:endParaRPr>
+          </a:p>
+          <a:p>
+            <a:pPr indent="0" lvl="0" marL="0" rtl="0" algn="l">
+              <a:lnSpc>
+                <a:spcPct val="85000"/>
+              </a:lnSpc>
+              <a:spcBef>
+                <a:spcPts val="0"/>
+              </a:spcBef>
+              <a:spcAft>
+                <a:spcPts val="0"/>
+              </a:spcAft>
+              <a:buClr>
+                <a:schemeClr val="dk1"/>
+              </a:buClr>
+              <a:buSzPts val="1100"/>
+              <a:buFont typeface="Arial"/>
+              <a:buNone/>
+            </a:pPr>
+            <a:r>
+              <a:rPr lang="en" sz="3800">
+                <a:solidFill>
+                  <a:srgbClr val="F1E9D6"/>
+                </a:solidFill>
+                <a:latin typeface="Inter SemiBold"/>
+                <a:ea typeface="Inter SemiBold"/>
+                <a:cs typeface="Inter SemiBold"/>
+                <a:sym typeface="Inter SemiBold"/>
+              </a:rPr>
+              <a:t>two lines</a:t>
+            </a:r>
+            <a:endParaRPr sz="3800">
+              <a:solidFill>
+                <a:srgbClr val="F1E9D6"/>
+              </a:solidFill>
+              <a:latin typeface="Inter SemiBold"/>
+              <a:ea typeface="Inter SemiBold"/>
+              <a:cs typeface="Inter SemiBold"/>
+              <a:sym typeface="Inter SemiBold"/>
+            </a:endParaRPr>
+          </a:p>
+          <a:p>
+            <a:pPr indent="0" lvl="0" marL="0" rtl="0" algn="l">
+              <a:lnSpc>
+                <a:spcPct val="85000"/>
+              </a:lnSpc>
+              <a:spcBef>
+                <a:spcPts val="0"/>
+              </a:spcBef>
+              <a:spcAft>
+                <a:spcPts val="0"/>
+              </a:spcAft>
+              <a:buClr>
+                <a:schemeClr val="dk1"/>
+              </a:buClr>
+              <a:buSzPts val="1100"/>
+              <a:buFont typeface="Arial"/>
+              <a:buNone/>
+            </a:pPr>
+            <a:r>
+              <a:t/>
+            </a:r>
+            <a:endParaRPr sz="3800">
+              <a:solidFill>
+                <a:srgbClr val="F1E9D6"/>
+              </a:solidFill>
+              <a:latin typeface="Inter SemiBold"/>
+              <a:ea typeface="Inter SemiBold"/>
+              <a:cs typeface="Inter SemiBold"/>
+              <a:sym typeface="Inter SemiBold"/>
+            </a:endParaRPr>
+          </a:p>
+          <a:p>
+            <a:pPr indent="0" lvl="0" marL="0" rtl="0" algn="l">
+              <a:lnSpc>
+                <a:spcPct val="85000"/>
+              </a:lnSpc>
+              <a:spcBef>
+                <a:spcPts val="0"/>
+              </a:spcBef>
+              <a:spcAft>
+                <a:spcPts val="0"/>
+              </a:spcAft>
+              <a:buNone/>
+            </a:pPr>
+            <a:r>
+              <a:t/>
+            </a:r>
+            <a:endParaRPr sz="3800">
+              <a:solidFill>
+                <a:srgbClr val="F1E9D6"/>
+              </a:solidFill>
+              <a:latin typeface="Inter SemiBold"/>
+              <a:ea typeface="Inter SemiBold"/>
+              <a:cs typeface="Inter SemiBold"/>
+              <a:sym typeface="Inter SemiBold"/>
+            </a:endParaRPr>
           </a:p>
         </p:txBody>
       </p:sp>
+      <p:sp>
+        <p:nvSpPr>
+          <p:cNvPr id="56" name="Google Shape;56;p14"/>
+          <p:cNvSpPr txBox="1"/>
+          <p:nvPr/>
+        </p:nvSpPr>
+        <p:spPr>
+          <a:xfrm>
+            <a:off x="658650" y="2932275"/>
+            <a:ext cx="7125600" cy="200700"/>
+          </a:xfrm>
+          <a:prstGeom prst="rect">
+            <a:avLst/>
+          </a:prstGeom>
+          <a:noFill/>
+          <a:ln>
+            <a:noFill/>
+          </a:ln>
+        </p:spPr>
+        <p:txBody>
+          <a:bodyPr anchorCtr="0" anchor="t" bIns="0" lIns="0" spcFirstLastPara="1" rIns="0" wrap="square" tIns="0">
+            <a:noAutofit/>
+          </a:bodyPr>
+          <a:lstStyle/>
+          <a:p>
+            <a:pPr indent="0" lvl="0" marL="0" rtl="0" algn="l">
+              <a:lnSpc>
+                <a:spcPct val="85000"/>
+              </a:lnSpc>
+              <a:spcBef>
+                <a:spcPts val="0"/>
+              </a:spcBef>
+              <a:spcAft>
+                <a:spcPts val="0"/>
+              </a:spcAft>
+              <a:buNone/>
+            </a:pPr>
+            <a:r>
+              <a:rPr lang="en">
+                <a:solidFill>
+                  <a:srgbClr val="F1E9D6"/>
+                </a:solidFill>
+                <a:latin typeface="Inter SemiBold"/>
+                <a:ea typeface="Inter SemiBold"/>
+                <a:cs typeface="Inter SemiBold"/>
+                <a:sym typeface="Inter SemiBold"/>
+              </a:rPr>
+              <a:t>Subtitle goes here</a:t>
+            </a:r>
+            <a:endParaRPr>
+              <a:solidFill>
+                <a:srgbClr val="F1E9D6"/>
+              </a:solidFill>
+              <a:latin typeface="Inter SemiBold"/>
+              <a:ea typeface="Inter SemiBold"/>
+              <a:cs typeface="Inter SemiBold"/>
+              <a:sym typeface="Inter SemiBold"/>
+            </a:endParaRPr>
+          </a:p>
+        </p:txBody>
+      </p:sp>
+      <p:pic>
+        <p:nvPicPr>
+          <p:cNvPr id="57" name="Google Shape;57;p14" title="logo-light.png"/>
+          <p:cNvPicPr preferRelativeResize="0"/>
+          <p:nvPr/>
+        </p:nvPicPr>
+        <p:blipFill rotWithShape="1">
+          <a:blip r:embed="rId3">
+            <a:alphaModFix/>
+          </a:blip>
+          <a:srcRect b="60" l="0" r="0" t="70"/>
+          <a:stretch/>
+        </p:blipFill>
+        <p:spPr>
+          <a:xfrm>
+            <a:off x="683765" y="399936"/>
+            <a:ext cx="1305252" cy="304875"/>
+          </a:xfrm>
+          <a:prstGeom prst="rect">
+            <a:avLst/>
+          </a:prstGeom>
+          <a:noFill/>
+          <a:ln>
+            <a:noFill/>
+          </a:ln>
+        </p:spPr>
+      </p:pic>
+      <p:sp>
+        <p:nvSpPr>
+          <p:cNvPr id="58" name="Google Shape;58;p14"/>
+          <p:cNvSpPr txBox="1"/>
+          <p:nvPr/>
+        </p:nvSpPr>
+        <p:spPr>
+          <a:xfrm>
+            <a:off x="683775" y="4584950"/>
+            <a:ext cx="4263600" cy="200700"/>
+          </a:xfrm>
+          <a:prstGeom prst="rect">
+            <a:avLst/>
+          </a:prstGeom>
+          <a:noFill/>
+          <a:ln>
+            <a:noFill/>
+          </a:ln>
+        </p:spPr>
+        <p:txBody>
+          <a:bodyPr anchorCtr="0" anchor="t" bIns="0" lIns="0" spcFirstLastPara="1" rIns="0" wrap="square" tIns="0">
+            <a:noAutofit/>
+          </a:bodyPr>
+          <a:lstStyle/>
+          <a:p>
+            <a:pPr indent="0" lvl="0" marL="0" rtl="0" algn="l">
+              <a:lnSpc>
+                <a:spcPct val="85000"/>
+              </a:lnSpc>
+              <a:spcBef>
+                <a:spcPts val="0"/>
+              </a:spcBef>
+              <a:spcAft>
+                <a:spcPts val="0"/>
+              </a:spcAft>
+              <a:buNone/>
+            </a:pPr>
+            <a:r>
+              <a:rPr lang="en" sz="1200">
+                <a:solidFill>
+                  <a:srgbClr val="F1E8D6"/>
+                </a:solidFill>
+                <a:latin typeface="Inter"/>
+                <a:ea typeface="Inter"/>
+                <a:cs typeface="Inter"/>
+                <a:sym typeface="Inter"/>
+              </a:rPr>
+              <a:t>December 1st, 2025</a:t>
+            </a:r>
+            <a:endParaRPr sz="1200">
+              <a:solidFill>
+                <a:srgbClr val="F1E8D6"/>
+              </a:solidFill>
+              <a:latin typeface="Inter"/>
+              <a:ea typeface="Inter"/>
+              <a:cs typeface="Inter"/>
+              <a:sym typeface="Inter"/>
+            </a:endParaRPr>
+          </a:p>
+        </p:txBody>
+      </p:sp>
+      <p:cxnSp>
+        <p:nvCxnSpPr>
+          <p:cNvPr id="59" name="Google Shape;59;p14"/>
+          <p:cNvCxnSpPr/>
+          <p:nvPr/>
+        </p:nvCxnSpPr>
+        <p:spPr>
+          <a:xfrm>
+            <a:off x="671275" y="2689675"/>
+            <a:ext cx="984300" cy="0"/>
+          </a:xfrm>
+          <a:prstGeom prst="straightConnector1">
+            <a:avLst/>
+          </a:prstGeom>
+          <a:noFill/>
+          <a:ln cap="flat" cmpd="sng" w="19050">
+            <a:solidFill>
+              <a:srgbClr val="6ABA48"/>
+            </a:solidFill>
+            <a:prstDash val="solid"/>
+            <a:round/>
+            <a:headEnd len="med" w="med" type="none"/>
+            <a:tailEnd len="med" w="med" type="none"/>
+          </a:ln>
+        </p:spPr>
+      </p:cxnSp>
     </p:spTree>
   </p:cSld>
   <p:clrMapOvr>
@@ -6160,87 +10105,423 @@
 <file path=ppt/slides/slide5.xml><?xml version="1.0" encoding="utf-8"?>
 <p:sld xmlns:a="http://schemas.openxmlformats.org/drawingml/2006/main" xmlns:p="http://schemas.openxmlformats.org/presentationml/2006/main" xmlns:r="http://schemas.openxmlformats.org/officeDocument/2006/relationships">
   <p:cSld>
+    <p:bg>
+      <p:bgPr>
+        <a:solidFill>
+          <a:srgbClr val="F1E8D6"/>
+        </a:solidFill>
+      </p:bgPr>
+    </p:bg>
     <p:spTree>
       <p:nvGrpSpPr>
-        <p:cNvPr id="1" name=""/>
+        <p:cNvPr id="141" name="Shape 141"/>
         <p:cNvGrpSpPr/>
         <p:nvPr/>
       </p:nvGrpSpPr>
-      <p:grpSpPr/>
+      <p:grpSpPr>
+        <a:xfrm>
+          <a:off x="0" y="0"/>
+          <a:ext cx="0" cy="0"/>
+          <a:chOff x="0" y="0"/>
+          <a:chExt cx="0" cy="0"/>
+        </a:xfrm>
+      </p:grpSpPr>
       <p:sp>
         <p:nvSpPr>
-          <p:cNvPr id="2" name="Title 1"/>
-          <p:cNvSpPr>
-            <a:spLocks noGrp="1"/>
-          </p:cNvSpPr>
-          <p:nvPr>
-            <p:ph type="title"/>
-          </p:nvPr>
+          <p:cNvPr id="142" name="Google Shape;142;p18"/>
+          <p:cNvSpPr txBox="1"/>
+          <p:nvPr/>
         </p:nvSpPr>
-        <p:spPr/>
+        <p:spPr>
+          <a:xfrm>
+            <a:off x="467950" y="623324"/>
+            <a:ext cx="7125600" cy="900000"/>
+          </a:xfrm>
+          <a:prstGeom prst="rect">
+            <a:avLst/>
+          </a:prstGeom>
+          <a:noFill/>
+          <a:ln>
+            <a:noFill/>
+          </a:ln>
+        </p:spPr>
         <p:txBody>
-          <a:bodyPr/>
+          <a:bodyPr anchorCtr="0" anchor="t" bIns="0" lIns="0" spcFirstLastPara="1" rIns="0" wrap="square" tIns="0">
+            <a:noAutofit/>
+          </a:bodyPr>
           <a:lstStyle/>
           <a:p>
-            <a:r>
-              <a:t>The Brain vs. The Body</a:t>
-            </a:r>
+            <a:pPr indent="0" lvl="0" marL="0" rtl="0" algn="l">
+              <a:lnSpc>
+                <a:spcPct val="85000"/>
+              </a:lnSpc>
+              <a:spcBef>
+                <a:spcPts val="0"/>
+              </a:spcBef>
+              <a:spcAft>
+                <a:spcPts val="0"/>
+              </a:spcAft>
+              <a:buClr>
+                <a:schemeClr val="dk1"/>
+              </a:buClr>
+              <a:buSzPts val="1100"/>
+              <a:buFont typeface="Arial"/>
+              <a:buNone/>
+            </a:pPr>
+            <a:r>
+              <a:rPr lang="en" sz="2800">
+                <a:solidFill>
+                  <a:srgbClr val="042017"/>
+                </a:solidFill>
+                <a:latin typeface="Inter SemiBold"/>
+                <a:ea typeface="Inter SemiBold"/>
+                <a:cs typeface="Inter SemiBold"/>
+                <a:sym typeface="Inter SemiBold"/>
+              </a:rPr>
+              <a:t>Title and body text</a:t>
+            </a:r>
+            <a:endParaRPr sz="2800">
+              <a:solidFill>
+                <a:srgbClr val="042017"/>
+              </a:solidFill>
+              <a:latin typeface="Inter SemiBold"/>
+              <a:ea typeface="Inter SemiBold"/>
+              <a:cs typeface="Inter SemiBold"/>
+              <a:sym typeface="Inter SemiBold"/>
+            </a:endParaRPr>
+          </a:p>
+          <a:p>
+            <a:pPr indent="0" lvl="0" marL="0" rtl="0" algn="l">
+              <a:lnSpc>
+                <a:spcPct val="85000"/>
+              </a:lnSpc>
+              <a:spcBef>
+                <a:spcPts val="0"/>
+              </a:spcBef>
+              <a:spcAft>
+                <a:spcPts val="0"/>
+              </a:spcAft>
+              <a:buClr>
+                <a:schemeClr val="dk1"/>
+              </a:buClr>
+              <a:buSzPts val="1100"/>
+              <a:buFont typeface="Arial"/>
+              <a:buNone/>
+            </a:pPr>
+            <a:r>
+              <a:t/>
+            </a:r>
+            <a:endParaRPr sz="2800">
+              <a:solidFill>
+                <a:srgbClr val="042017"/>
+              </a:solidFill>
+              <a:latin typeface="Inter SemiBold"/>
+              <a:ea typeface="Inter SemiBold"/>
+              <a:cs typeface="Inter SemiBold"/>
+              <a:sym typeface="Inter SemiBold"/>
+            </a:endParaRPr>
+          </a:p>
+          <a:p>
+            <a:pPr indent="0" lvl="0" marL="0" rtl="0" algn="l">
+              <a:lnSpc>
+                <a:spcPct val="85000"/>
+              </a:lnSpc>
+              <a:spcBef>
+                <a:spcPts val="0"/>
+              </a:spcBef>
+              <a:spcAft>
+                <a:spcPts val="0"/>
+              </a:spcAft>
+              <a:buNone/>
+            </a:pPr>
+            <a:r>
+              <a:t/>
+            </a:r>
+            <a:endParaRPr sz="2800">
+              <a:solidFill>
+                <a:srgbClr val="042017"/>
+              </a:solidFill>
+              <a:latin typeface="Inter SemiBold"/>
+              <a:ea typeface="Inter SemiBold"/>
+              <a:cs typeface="Inter SemiBold"/>
+              <a:sym typeface="Inter SemiBold"/>
+            </a:endParaRPr>
           </a:p>
         </p:txBody>
       </p:sp>
       <p:sp>
         <p:nvSpPr>
-          <p:cNvPr id="3" name="Text Placeholder 2"/>
-          <p:cNvSpPr>
-            <a:spLocks noGrp="1"/>
-          </p:cNvSpPr>
-          <p:nvPr>
-            <p:ph type="body" idx="1"/>
-          </p:nvPr>
+          <p:cNvPr id="143" name="Google Shape;143;p18"/>
+          <p:cNvSpPr txBox="1"/>
+          <p:nvPr/>
         </p:nvSpPr>
-        <p:spPr/>
+        <p:spPr>
+          <a:xfrm>
+            <a:off x="467950" y="1469674"/>
+            <a:ext cx="7125600" cy="1504200"/>
+          </a:xfrm>
+          <a:prstGeom prst="rect">
+            <a:avLst/>
+          </a:prstGeom>
+          <a:noFill/>
+          <a:ln>
+            <a:noFill/>
+          </a:ln>
+        </p:spPr>
         <p:txBody>
-          <a:bodyPr/>
+          <a:bodyPr anchorCtr="0" anchor="t" bIns="0" lIns="0" spcFirstLastPara="1" rIns="0" wrap="square" tIns="0">
+            <a:noAutofit/>
+          </a:bodyPr>
           <a:lstStyle/>
           <a:p>
-            <a:r>
-              <a:t>Claude (by Anthropic) = The Brain</a:t>
-            </a:r>
-          </a:p>
-          <a:p>
-            <a:r>
-              <a:t>• The AI model that reasons, writes, and makes decisions</a:t>
-            </a:r>
-          </a:p>
-          <a:p/>
-          <a:p>
-            <a:r>
-              <a:t>tilda-bot = The Body</a:t>
-            </a:r>
-          </a:p>
-          <a:p>
-            <a:r>
-              <a:t>• The Slack bot infrastructure that connects Claude to Dutchie's tools</a:t>
-            </a:r>
-          </a:p>
-          <a:p/>
-          <a:p>
-            <a:r>
-              <a:t>Think of it like a football quarterback:</a:t>
-            </a:r>
-          </a:p>
-          <a:p>
-            <a:r>
-              <a:t>• Claude reads the field and calls the play</a:t>
-            </a:r>
-          </a:p>
-          <a:p>
-            <a:r>
-              <a:t>• tilda-bot executes by throwing to the right receiver (Confluence, JIRA, Datadog, etc.)</a:t>
-            </a:r>
+            <a:pPr indent="0" lvl="0" marL="0" rtl="0" algn="l">
+              <a:lnSpc>
+                <a:spcPct val="115000"/>
+              </a:lnSpc>
+              <a:spcBef>
+                <a:spcPts val="0"/>
+              </a:spcBef>
+              <a:spcAft>
+                <a:spcPts val="0"/>
+              </a:spcAft>
+              <a:buClr>
+                <a:schemeClr val="dk1"/>
+              </a:buClr>
+              <a:buSzPts val="1100"/>
+              <a:buFont typeface="Arial"/>
+              <a:buNone/>
+            </a:pPr>
+            <a:r>
+              <a:rPr lang="en" sz="1000">
+                <a:solidFill>
+                  <a:srgbClr val="042017"/>
+                </a:solidFill>
+                <a:latin typeface="Inter"/>
+                <a:ea typeface="Inter"/>
+                <a:cs typeface="Inter"/>
+                <a:sym typeface="Inter"/>
+              </a:rPr>
+              <a:t>Lorem ipsum dolor sit amet, consectetur adipiscing elit. Fusce vitae commodo mauris. Nullam malesuada nisl a mollis faucibus. Curabitur tincidunt ligula turpis, sed rhoncus odio fermentum pellentesque. Fusce id augue eu lacus ullamcorper pretium a id risus. Donec ac mauris viverra, imperdiet orci eu, aliquet leo. Vestibulum quis augue nec justo scelerisque ultrices. Nulla posuere, sapien at finibus consectetur, eros turpis luctus quam, et ornare magna magna sit amet mauris. Donec maximus, orci ut vestibulum ultrices, magna sem sollicitudin metus, et aliquam erat felis sit amet dui. In eu libero sit amet quam sollicitudin vehicula vitae quis quam. Etiam sit amet dolor aliquet massa iaculis porta.</a:t>
+            </a:r>
+            <a:endParaRPr sz="1000">
+              <a:solidFill>
+                <a:srgbClr val="042017"/>
+              </a:solidFill>
+              <a:latin typeface="Inter"/>
+              <a:ea typeface="Inter"/>
+              <a:cs typeface="Inter"/>
+              <a:sym typeface="Inter"/>
+            </a:endParaRPr>
+          </a:p>
+          <a:p>
+            <a:pPr indent="0" lvl="0" marL="0" rtl="0" algn="l">
+              <a:lnSpc>
+                <a:spcPct val="115000"/>
+              </a:lnSpc>
+              <a:spcBef>
+                <a:spcPts val="0"/>
+              </a:spcBef>
+              <a:spcAft>
+                <a:spcPts val="0"/>
+              </a:spcAft>
+              <a:buClr>
+                <a:schemeClr val="dk1"/>
+              </a:buClr>
+              <a:buSzPts val="1100"/>
+              <a:buFont typeface="Arial"/>
+              <a:buNone/>
+            </a:pPr>
+            <a:r>
+              <a:t/>
+            </a:r>
+            <a:endParaRPr sz="1000">
+              <a:solidFill>
+                <a:srgbClr val="042017"/>
+              </a:solidFill>
+              <a:latin typeface="Inter"/>
+              <a:ea typeface="Inter"/>
+              <a:cs typeface="Inter"/>
+              <a:sym typeface="Inter"/>
+            </a:endParaRPr>
+          </a:p>
+          <a:p>
+            <a:pPr indent="0" lvl="0" marL="0" rtl="0" algn="l">
+              <a:lnSpc>
+                <a:spcPct val="115000"/>
+              </a:lnSpc>
+              <a:spcBef>
+                <a:spcPts val="0"/>
+              </a:spcBef>
+              <a:spcAft>
+                <a:spcPts val="0"/>
+              </a:spcAft>
+              <a:buNone/>
+            </a:pPr>
+            <a:r>
+              <a:t/>
+            </a:r>
+            <a:endParaRPr sz="1000">
+              <a:solidFill>
+                <a:srgbClr val="042017"/>
+              </a:solidFill>
+              <a:latin typeface="Inter"/>
+              <a:ea typeface="Inter"/>
+              <a:cs typeface="Inter"/>
+              <a:sym typeface="Inter"/>
+            </a:endParaRPr>
           </a:p>
         </p:txBody>
       </p:sp>
+      <p:sp>
+        <p:nvSpPr>
+          <p:cNvPr id="144" name="Google Shape;144;p18"/>
+          <p:cNvSpPr txBox="1"/>
+          <p:nvPr/>
+        </p:nvSpPr>
+        <p:spPr>
+          <a:xfrm>
+            <a:off x="467950" y="339124"/>
+            <a:ext cx="7125600" cy="200700"/>
+          </a:xfrm>
+          <a:prstGeom prst="rect">
+            <a:avLst/>
+          </a:prstGeom>
+          <a:noFill/>
+          <a:ln>
+            <a:noFill/>
+          </a:ln>
+        </p:spPr>
+        <p:txBody>
+          <a:bodyPr anchorCtr="0" anchor="t" bIns="0" lIns="0" spcFirstLastPara="1" rIns="0" wrap="square" tIns="0">
+            <a:noAutofit/>
+          </a:bodyPr>
+          <a:lstStyle/>
+          <a:p>
+            <a:pPr indent="0" lvl="0" marL="0" rtl="0" algn="l">
+              <a:lnSpc>
+                <a:spcPct val="85000"/>
+              </a:lnSpc>
+              <a:spcBef>
+                <a:spcPts val="0"/>
+              </a:spcBef>
+              <a:spcAft>
+                <a:spcPts val="0"/>
+              </a:spcAft>
+              <a:buClr>
+                <a:schemeClr val="dk1"/>
+              </a:buClr>
+              <a:buSzPts val="1100"/>
+              <a:buFont typeface="Arial"/>
+              <a:buNone/>
+            </a:pPr>
+            <a:r>
+              <a:rPr b="1" lang="en" sz="900">
+                <a:solidFill>
+                  <a:srgbClr val="7F7F7F"/>
+                </a:solidFill>
+                <a:latin typeface="Inter"/>
+                <a:ea typeface="Inter"/>
+                <a:cs typeface="Inter"/>
+                <a:sym typeface="Inter"/>
+              </a:rPr>
+              <a:t>EYEBROW HEADING</a:t>
+            </a:r>
+            <a:endParaRPr b="1" sz="900">
+              <a:solidFill>
+                <a:srgbClr val="7F7F7F"/>
+              </a:solidFill>
+              <a:latin typeface="Inter"/>
+              <a:ea typeface="Inter"/>
+              <a:cs typeface="Inter"/>
+              <a:sym typeface="Inter"/>
+            </a:endParaRPr>
+          </a:p>
+          <a:p>
+            <a:pPr indent="0" lvl="0" marL="0" rtl="0" algn="l">
+              <a:lnSpc>
+                <a:spcPct val="85000"/>
+              </a:lnSpc>
+              <a:spcBef>
+                <a:spcPts val="0"/>
+              </a:spcBef>
+              <a:spcAft>
+                <a:spcPts val="0"/>
+              </a:spcAft>
+              <a:buClr>
+                <a:schemeClr val="dk1"/>
+              </a:buClr>
+              <a:buSzPts val="1100"/>
+              <a:buFont typeface="Arial"/>
+              <a:buNone/>
+            </a:pPr>
+            <a:r>
+              <a:t/>
+            </a:r>
+            <a:endParaRPr b="1" sz="900">
+              <a:solidFill>
+                <a:srgbClr val="7F7F7F"/>
+              </a:solidFill>
+              <a:latin typeface="Inter"/>
+              <a:ea typeface="Inter"/>
+              <a:cs typeface="Inter"/>
+              <a:sym typeface="Inter"/>
+            </a:endParaRPr>
+          </a:p>
+          <a:p>
+            <a:pPr indent="0" lvl="0" marL="0" rtl="0" algn="l">
+              <a:lnSpc>
+                <a:spcPct val="85000"/>
+              </a:lnSpc>
+              <a:spcBef>
+                <a:spcPts val="0"/>
+              </a:spcBef>
+              <a:spcAft>
+                <a:spcPts val="0"/>
+              </a:spcAft>
+              <a:buNone/>
+            </a:pPr>
+            <a:r>
+              <a:t/>
+            </a:r>
+            <a:endParaRPr b="1" sz="900">
+              <a:solidFill>
+                <a:srgbClr val="7F7F7F"/>
+              </a:solidFill>
+              <a:latin typeface="Inter"/>
+              <a:ea typeface="Inter"/>
+              <a:cs typeface="Inter"/>
+              <a:sym typeface="Inter"/>
+            </a:endParaRPr>
+          </a:p>
+        </p:txBody>
+      </p:sp>
+      <p:pic>
+        <p:nvPicPr>
+          <p:cNvPr id="145" name="Google Shape;145;p18" title="logo-dark.png"/>
+          <p:cNvPicPr preferRelativeResize="0"/>
+          <p:nvPr/>
+        </p:nvPicPr>
+        <p:blipFill rotWithShape="1">
+          <a:blip r:embed="rId3">
+            <a:alphaModFix/>
+          </a:blip>
+          <a:srcRect b="0" l="40" r="40" t="0"/>
+          <a:stretch/>
+        </p:blipFill>
+        <p:spPr>
+          <a:xfrm>
+            <a:off x="493052" y="4663948"/>
+            <a:ext cx="615327" cy="143725"/>
+          </a:xfrm>
+          <a:prstGeom prst="rect">
+            <a:avLst/>
+          </a:prstGeom>
+          <a:noFill/>
+          <a:ln>
+            <a:noFill/>
+          </a:ln>
+        </p:spPr>
+      </p:pic>
     </p:spTree>
   </p:cSld>
   <p:clrMapOvr>
@@ -6252,34 +10533,360 @@
 <file path=ppt/slides/slide6.xml><?xml version="1.0" encoding="utf-8"?>
 <p:sld xmlns:a="http://schemas.openxmlformats.org/drawingml/2006/main" xmlns:p="http://schemas.openxmlformats.org/presentationml/2006/main" xmlns:r="http://schemas.openxmlformats.org/officeDocument/2006/relationships">
   <p:cSld>
+    <p:bg>
+      <p:bgPr>
+        <a:solidFill>
+          <a:srgbClr val="042017"/>
+        </a:solidFill>
+      </p:bgPr>
+    </p:bg>
     <p:spTree>
       <p:nvGrpSpPr>
-        <p:cNvPr id="1" name=""/>
+        <p:cNvPr id="54" name="Shape 54"/>
         <p:cNvGrpSpPr/>
         <p:nvPr/>
       </p:nvGrpSpPr>
-      <p:grpSpPr/>
+      <p:grpSpPr>
+        <a:xfrm>
+          <a:off x="0" y="0"/>
+          <a:ext cx="0" cy="0"/>
+          <a:chOff x="0" y="0"/>
+          <a:chExt cx="0" cy="0"/>
+        </a:xfrm>
+      </p:grpSpPr>
       <p:sp>
         <p:nvSpPr>
-          <p:cNvPr id="2" name="Title 1"/>
-          <p:cNvSpPr>
-            <a:spLocks noGrp="1"/>
-          </p:cNvSpPr>
-          <p:nvPr>
-            <p:ph type="title"/>
-          </p:nvPr>
+          <p:cNvPr id="55" name="Google Shape;55;p14"/>
+          <p:cNvSpPr txBox="1"/>
+          <p:nvPr/>
         </p:nvSpPr>
-        <p:spPr/>
+        <p:spPr>
+          <a:xfrm>
+            <a:off x="658650" y="1516225"/>
+            <a:ext cx="7125600" cy="900000"/>
+          </a:xfrm>
+          <a:prstGeom prst="rect">
+            <a:avLst/>
+          </a:prstGeom>
+          <a:noFill/>
+          <a:ln>
+            <a:noFill/>
+          </a:ln>
+        </p:spPr>
         <p:txBody>
-          <a:bodyPr/>
+          <a:bodyPr anchorCtr="0" anchor="t" bIns="0" lIns="0" spcFirstLastPara="1" rIns="0" wrap="square" tIns="0">
+            <a:noAutofit/>
+          </a:bodyPr>
           <a:lstStyle/>
           <a:p>
-            <a:r>
-              <a:t>Sensitive Information</a:t>
-            </a:r>
+            <a:pPr indent="0" lvl="0" marL="0" rtl="0" algn="l">
+              <a:lnSpc>
+                <a:spcPct val="85000"/>
+              </a:lnSpc>
+              <a:spcBef>
+                <a:spcPts val="0"/>
+              </a:spcBef>
+              <a:spcAft>
+                <a:spcPts val="0"/>
+              </a:spcAft>
+              <a:buNone/>
+            </a:pPr>
+            <a:r>
+              <a:rPr lang="en" sz="3800">
+                <a:solidFill>
+                  <a:srgbClr val="F1E9D6"/>
+                </a:solidFill>
+                <a:latin typeface="Inter SemiBold"/>
+                <a:ea typeface="Inter SemiBold"/>
+                <a:cs typeface="Inter SemiBold"/>
+                <a:sym typeface="Inter SemiBold"/>
+              </a:rPr>
+              <a:t>Presentation titles, </a:t>
+            </a:r>
+            <a:endParaRPr sz="3800">
+              <a:solidFill>
+                <a:srgbClr val="F1E9D6"/>
+              </a:solidFill>
+              <a:latin typeface="Inter SemiBold"/>
+              <a:ea typeface="Inter SemiBold"/>
+              <a:cs typeface="Inter SemiBold"/>
+              <a:sym typeface="Inter SemiBold"/>
+            </a:endParaRPr>
+          </a:p>
+          <a:p>
+            <a:pPr indent="0" lvl="0" marL="0" rtl="0" algn="l">
+              <a:lnSpc>
+                <a:spcPct val="85000"/>
+              </a:lnSpc>
+              <a:spcBef>
+                <a:spcPts val="0"/>
+              </a:spcBef>
+              <a:spcAft>
+                <a:spcPts val="0"/>
+              </a:spcAft>
+              <a:buClr>
+                <a:schemeClr val="dk1"/>
+              </a:buClr>
+              <a:buSzPts val="1100"/>
+              <a:buFont typeface="Arial"/>
+              <a:buNone/>
+            </a:pPr>
+            <a:r>
+              <a:rPr lang="en" sz="3800">
+                <a:solidFill>
+                  <a:srgbClr val="F1E9D6"/>
+                </a:solidFill>
+                <a:latin typeface="Inter SemiBold"/>
+                <a:ea typeface="Inter SemiBold"/>
+                <a:cs typeface="Inter SemiBold"/>
+                <a:sym typeface="Inter SemiBold"/>
+              </a:rPr>
+              <a:t>two lines</a:t>
+            </a:r>
+            <a:endParaRPr sz="3800">
+              <a:solidFill>
+                <a:srgbClr val="F1E9D6"/>
+              </a:solidFill>
+              <a:latin typeface="Inter SemiBold"/>
+              <a:ea typeface="Inter SemiBold"/>
+              <a:cs typeface="Inter SemiBold"/>
+              <a:sym typeface="Inter SemiBold"/>
+            </a:endParaRPr>
+          </a:p>
+          <a:p>
+            <a:pPr indent="0" lvl="0" marL="0" rtl="0" algn="l">
+              <a:lnSpc>
+                <a:spcPct val="85000"/>
+              </a:lnSpc>
+              <a:spcBef>
+                <a:spcPts val="0"/>
+              </a:spcBef>
+              <a:spcAft>
+                <a:spcPts val="0"/>
+              </a:spcAft>
+              <a:buClr>
+                <a:schemeClr val="dk1"/>
+              </a:buClr>
+              <a:buSzPts val="1100"/>
+              <a:buFont typeface="Arial"/>
+              <a:buNone/>
+            </a:pPr>
+            <a:r>
+              <a:t/>
+            </a:r>
+            <a:endParaRPr sz="3800">
+              <a:solidFill>
+                <a:srgbClr val="F1E9D6"/>
+              </a:solidFill>
+              <a:latin typeface="Inter SemiBold"/>
+              <a:ea typeface="Inter SemiBold"/>
+              <a:cs typeface="Inter SemiBold"/>
+              <a:sym typeface="Inter SemiBold"/>
+            </a:endParaRPr>
+          </a:p>
+          <a:p>
+            <a:pPr indent="0" lvl="0" marL="0" rtl="0" algn="l">
+              <a:lnSpc>
+                <a:spcPct val="85000"/>
+              </a:lnSpc>
+              <a:spcBef>
+                <a:spcPts val="0"/>
+              </a:spcBef>
+              <a:spcAft>
+                <a:spcPts val="0"/>
+              </a:spcAft>
+              <a:buNone/>
+            </a:pPr>
+            <a:r>
+              <a:t/>
+            </a:r>
+            <a:endParaRPr sz="3800">
+              <a:solidFill>
+                <a:srgbClr val="F1E9D6"/>
+              </a:solidFill>
+              <a:latin typeface="Inter SemiBold"/>
+              <a:ea typeface="Inter SemiBold"/>
+              <a:cs typeface="Inter SemiBold"/>
+              <a:sym typeface="Inter SemiBold"/>
+            </a:endParaRPr>
           </a:p>
         </p:txBody>
       </p:sp>
+      <p:sp>
+        <p:nvSpPr>
+          <p:cNvPr id="56" name="Google Shape;56;p14"/>
+          <p:cNvSpPr txBox="1"/>
+          <p:nvPr/>
+        </p:nvSpPr>
+        <p:spPr>
+          <a:xfrm>
+            <a:off x="658650" y="2932275"/>
+            <a:ext cx="7125600" cy="200700"/>
+          </a:xfrm>
+          <a:prstGeom prst="rect">
+            <a:avLst/>
+          </a:prstGeom>
+          <a:noFill/>
+          <a:ln>
+            <a:noFill/>
+          </a:ln>
+        </p:spPr>
+        <p:txBody>
+          <a:bodyPr anchorCtr="0" anchor="t" bIns="0" lIns="0" spcFirstLastPara="1" rIns="0" wrap="square" tIns="0">
+            <a:noAutofit/>
+          </a:bodyPr>
+          <a:lstStyle/>
+          <a:p>
+            <a:pPr indent="0" lvl="0" marL="0" rtl="0" algn="l">
+              <a:lnSpc>
+                <a:spcPct val="85000"/>
+              </a:lnSpc>
+              <a:spcBef>
+                <a:spcPts val="0"/>
+              </a:spcBef>
+              <a:spcAft>
+                <a:spcPts val="0"/>
+              </a:spcAft>
+              <a:buNone/>
+            </a:pPr>
+            <a:r>
+              <a:rPr lang="en">
+                <a:solidFill>
+                  <a:srgbClr val="F1E9D6"/>
+                </a:solidFill>
+                <a:latin typeface="Inter SemiBold"/>
+                <a:ea typeface="Inter SemiBold"/>
+                <a:cs typeface="Inter SemiBold"/>
+                <a:sym typeface="Inter SemiBold"/>
+              </a:rPr>
+              <a:t>Subtitle goes here</a:t>
+            </a:r>
+            <a:endParaRPr>
+              <a:solidFill>
+                <a:srgbClr val="F1E9D6"/>
+              </a:solidFill>
+              <a:latin typeface="Inter SemiBold"/>
+              <a:ea typeface="Inter SemiBold"/>
+              <a:cs typeface="Inter SemiBold"/>
+              <a:sym typeface="Inter SemiBold"/>
+            </a:endParaRPr>
+          </a:p>
+        </p:txBody>
+      </p:sp>
+      <p:pic>
+        <p:nvPicPr>
+          <p:cNvPr id="57" name="Google Shape;57;p14" title="logo-light.png"/>
+          <p:cNvPicPr preferRelativeResize="0"/>
+          <p:nvPr/>
+        </p:nvPicPr>
+        <p:blipFill rotWithShape="1">
+          <a:blip r:embed="rId3">
+            <a:alphaModFix/>
+          </a:blip>
+          <a:srcRect b="60" l="0" r="0" t="70"/>
+          <a:stretch/>
+        </p:blipFill>
+        <p:spPr>
+          <a:xfrm>
+            <a:off x="683765" y="399936"/>
+            <a:ext cx="1305252" cy="304875"/>
+          </a:xfrm>
+          <a:prstGeom prst="rect">
+            <a:avLst/>
+          </a:prstGeom>
+          <a:noFill/>
+          <a:ln>
+            <a:noFill/>
+          </a:ln>
+        </p:spPr>
+      </p:pic>
+      <p:sp>
+        <p:nvSpPr>
+          <p:cNvPr id="58" name="Google Shape;58;p14"/>
+          <p:cNvSpPr txBox="1"/>
+          <p:nvPr/>
+        </p:nvSpPr>
+        <p:spPr>
+          <a:xfrm>
+            <a:off x="683775" y="4584950"/>
+            <a:ext cx="4263600" cy="200700"/>
+          </a:xfrm>
+          <a:prstGeom prst="rect">
+            <a:avLst/>
+          </a:prstGeom>
+          <a:noFill/>
+          <a:ln>
+            <a:noFill/>
+          </a:ln>
+        </p:spPr>
+        <p:txBody>
+          <a:bodyPr anchorCtr="0" anchor="t" bIns="0" lIns="0" spcFirstLastPara="1" rIns="0" wrap="square" tIns="0">
+            <a:noAutofit/>
+          </a:bodyPr>
+          <a:lstStyle/>
+          <a:p>
+            <a:pPr indent="0" lvl="0" marL="0" rtl="0" algn="l">
+              <a:lnSpc>
+                <a:spcPct val="85000"/>
+              </a:lnSpc>
+              <a:spcBef>
+                <a:spcPts val="0"/>
+              </a:spcBef>
+              <a:spcAft>
+                <a:spcPts val="0"/>
+              </a:spcAft>
+              <a:buNone/>
+            </a:pPr>
+            <a:r>
+              <a:rPr lang="en" sz="1200">
+                <a:solidFill>
+                  <a:srgbClr val="F1E8D6"/>
+                </a:solidFill>
+                <a:latin typeface="Inter"/>
+                <a:ea typeface="Inter"/>
+                <a:cs typeface="Inter"/>
+                <a:sym typeface="Inter"/>
+              </a:rPr>
+              <a:t>December 1st, 2025</a:t>
+            </a:r>
+            <a:endParaRPr sz="1200">
+              <a:solidFill>
+                <a:srgbClr val="F1E8D6"/>
+              </a:solidFill>
+              <a:latin typeface="Inter"/>
+              <a:ea typeface="Inter"/>
+              <a:cs typeface="Inter"/>
+              <a:sym typeface="Inter"/>
+            </a:endParaRPr>
+          </a:p>
+        </p:txBody>
+      </p:sp>
+      <p:cxnSp>
+        <p:nvCxnSpPr>
+          <p:cNvPr id="59" name="Google Shape;59;p14"/>
+          <p:cNvCxnSpPr/>
+          <p:nvPr/>
+        </p:nvCxnSpPr>
+        <p:spPr>
+          <a:xfrm>
+            <a:off x="671275" y="2689675"/>
+            <a:ext cx="984300" cy="0"/>
+          </a:xfrm>
+          <a:prstGeom prst="straightConnector1">
+            <a:avLst/>
+          </a:prstGeom>
+          <a:noFill/>
+          <a:ln cap="flat" cmpd="sng" w="19050">
+            <a:solidFill>
+              <a:srgbClr val="6ABA48"/>
+            </a:solidFill>
+            <a:prstDash val="solid"/>
+            <a:round/>
+            <a:headEnd len="med" w="med" type="none"/>
+            <a:tailEnd len="med" w="med" type="none"/>
+          </a:ln>
+        </p:spPr>
+      </p:cxnSp>
     </p:spTree>
   </p:cSld>
   <p:clrMapOvr>
@@ -6291,80 +10898,423 @@
 <file path=ppt/slides/slide7.xml><?xml version="1.0" encoding="utf-8"?>
 <p:sld xmlns:a="http://schemas.openxmlformats.org/drawingml/2006/main" xmlns:p="http://schemas.openxmlformats.org/presentationml/2006/main" xmlns:r="http://schemas.openxmlformats.org/officeDocument/2006/relationships">
   <p:cSld>
+    <p:bg>
+      <p:bgPr>
+        <a:solidFill>
+          <a:srgbClr val="F1E8D6"/>
+        </a:solidFill>
+      </p:bgPr>
+    </p:bg>
     <p:spTree>
       <p:nvGrpSpPr>
-        <p:cNvPr id="1" name=""/>
+        <p:cNvPr id="141" name="Shape 141"/>
         <p:cNvGrpSpPr/>
         <p:nvPr/>
       </p:nvGrpSpPr>
-      <p:grpSpPr/>
+      <p:grpSpPr>
+        <a:xfrm>
+          <a:off x="0" y="0"/>
+          <a:ext cx="0" cy="0"/>
+          <a:chOff x="0" y="0"/>
+          <a:chExt cx="0" cy="0"/>
+        </a:xfrm>
+      </p:grpSpPr>
       <p:sp>
         <p:nvSpPr>
-          <p:cNvPr id="2" name="Title 1"/>
-          <p:cNvSpPr>
-            <a:spLocks noGrp="1"/>
-          </p:cNvSpPr>
-          <p:nvPr>
-            <p:ph type="title"/>
-          </p:nvPr>
+          <p:cNvPr id="142" name="Google Shape;142;p18"/>
+          <p:cNvSpPr txBox="1"/>
+          <p:nvPr/>
         </p:nvSpPr>
-        <p:spPr/>
+        <p:spPr>
+          <a:xfrm>
+            <a:off x="467950" y="623324"/>
+            <a:ext cx="7125600" cy="900000"/>
+          </a:xfrm>
+          <a:prstGeom prst="rect">
+            <a:avLst/>
+          </a:prstGeom>
+          <a:noFill/>
+          <a:ln>
+            <a:noFill/>
+          </a:ln>
+        </p:spPr>
         <p:txBody>
-          <a:bodyPr/>
+          <a:bodyPr anchorCtr="0" anchor="t" bIns="0" lIns="0" spcFirstLastPara="1" rIns="0" wrap="square" tIns="0">
+            <a:noAutofit/>
+          </a:bodyPr>
           <a:lstStyle/>
           <a:p>
-            <a:r>
-              <a:t>Ground Rules</a:t>
-            </a:r>
+            <a:pPr indent="0" lvl="0" marL="0" rtl="0" algn="l">
+              <a:lnSpc>
+                <a:spcPct val="85000"/>
+              </a:lnSpc>
+              <a:spcBef>
+                <a:spcPts val="0"/>
+              </a:spcBef>
+              <a:spcAft>
+                <a:spcPts val="0"/>
+              </a:spcAft>
+              <a:buClr>
+                <a:schemeClr val="dk1"/>
+              </a:buClr>
+              <a:buSzPts val="1100"/>
+              <a:buFont typeface="Arial"/>
+              <a:buNone/>
+            </a:pPr>
+            <a:r>
+              <a:rPr lang="en" sz="2800">
+                <a:solidFill>
+                  <a:srgbClr val="042017"/>
+                </a:solidFill>
+                <a:latin typeface="Inter SemiBold"/>
+                <a:ea typeface="Inter SemiBold"/>
+                <a:cs typeface="Inter SemiBold"/>
+                <a:sym typeface="Inter SemiBold"/>
+              </a:rPr>
+              <a:t>Title and body text</a:t>
+            </a:r>
+            <a:endParaRPr sz="2800">
+              <a:solidFill>
+                <a:srgbClr val="042017"/>
+              </a:solidFill>
+              <a:latin typeface="Inter SemiBold"/>
+              <a:ea typeface="Inter SemiBold"/>
+              <a:cs typeface="Inter SemiBold"/>
+              <a:sym typeface="Inter SemiBold"/>
+            </a:endParaRPr>
+          </a:p>
+          <a:p>
+            <a:pPr indent="0" lvl="0" marL="0" rtl="0" algn="l">
+              <a:lnSpc>
+                <a:spcPct val="85000"/>
+              </a:lnSpc>
+              <a:spcBef>
+                <a:spcPts val="0"/>
+              </a:spcBef>
+              <a:spcAft>
+                <a:spcPts val="0"/>
+              </a:spcAft>
+              <a:buClr>
+                <a:schemeClr val="dk1"/>
+              </a:buClr>
+              <a:buSzPts val="1100"/>
+              <a:buFont typeface="Arial"/>
+              <a:buNone/>
+            </a:pPr>
+            <a:r>
+              <a:t/>
+            </a:r>
+            <a:endParaRPr sz="2800">
+              <a:solidFill>
+                <a:srgbClr val="042017"/>
+              </a:solidFill>
+              <a:latin typeface="Inter SemiBold"/>
+              <a:ea typeface="Inter SemiBold"/>
+              <a:cs typeface="Inter SemiBold"/>
+              <a:sym typeface="Inter SemiBold"/>
+            </a:endParaRPr>
+          </a:p>
+          <a:p>
+            <a:pPr indent="0" lvl="0" marL="0" rtl="0" algn="l">
+              <a:lnSpc>
+                <a:spcPct val="85000"/>
+              </a:lnSpc>
+              <a:spcBef>
+                <a:spcPts val="0"/>
+              </a:spcBef>
+              <a:spcAft>
+                <a:spcPts val="0"/>
+              </a:spcAft>
+              <a:buNone/>
+            </a:pPr>
+            <a:r>
+              <a:t/>
+            </a:r>
+            <a:endParaRPr sz="2800">
+              <a:solidFill>
+                <a:srgbClr val="042017"/>
+              </a:solidFill>
+              <a:latin typeface="Inter SemiBold"/>
+              <a:ea typeface="Inter SemiBold"/>
+              <a:cs typeface="Inter SemiBold"/>
+              <a:sym typeface="Inter SemiBold"/>
+            </a:endParaRPr>
           </a:p>
         </p:txBody>
       </p:sp>
       <p:sp>
         <p:nvSpPr>
-          <p:cNvPr id="3" name="Text Placeholder 2"/>
-          <p:cNvSpPr>
-            <a:spLocks noGrp="1"/>
-          </p:cNvSpPr>
-          <p:nvPr>
-            <p:ph type="body" idx="1"/>
-          </p:nvPr>
+          <p:cNvPr id="143" name="Google Shape;143;p18"/>
+          <p:cNvSpPr txBox="1"/>
+          <p:nvPr/>
         </p:nvSpPr>
-        <p:spPr/>
+        <p:spPr>
+          <a:xfrm>
+            <a:off x="467950" y="1469674"/>
+            <a:ext cx="7125600" cy="1504200"/>
+          </a:xfrm>
+          <a:prstGeom prst="rect">
+            <a:avLst/>
+          </a:prstGeom>
+          <a:noFill/>
+          <a:ln>
+            <a:noFill/>
+          </a:ln>
+        </p:spPr>
         <p:txBody>
-          <a:bodyPr/>
+          <a:bodyPr anchorCtr="0" anchor="t" bIns="0" lIns="0" spcFirstLastPara="1" rIns="0" wrap="square" tIns="0">
+            <a:noAutofit/>
+          </a:bodyPr>
           <a:lstStyle/>
           <a:p>
-            <a:r>
-              <a:t>• Never share PII (customer data, credentials, API keys) with Tilda</a:t>
-            </a:r>
-          </a:p>
-          <a:p>
-            <a:r>
-              <a:t>• Tilda has memory — she may recall prior conversations</a:t>
-            </a:r>
-          </a:p>
-          <a:p>
-            <a:r>
-              <a:t>• Public channels: Tilda's responses are visible to everyone</a:t>
-            </a:r>
-          </a:p>
-          <a:p>
-            <a:r>
-              <a:t>• Private/DM: Conversations are between you and Tilda</a:t>
-            </a:r>
-          </a:p>
-          <a:p>
-            <a:r>
-              <a:t>• When in doubt, use a DM</a:t>
-            </a:r>
-          </a:p>
-          <a:p>
-            <a:r>
-              <a:t>• Tilda follows Dutchie's Competitive Claims Guardrails</a:t>
-            </a:r>
+            <a:pPr indent="0" lvl="0" marL="0" rtl="0" algn="l">
+              <a:lnSpc>
+                <a:spcPct val="115000"/>
+              </a:lnSpc>
+              <a:spcBef>
+                <a:spcPts val="0"/>
+              </a:spcBef>
+              <a:spcAft>
+                <a:spcPts val="0"/>
+              </a:spcAft>
+              <a:buClr>
+                <a:schemeClr val="dk1"/>
+              </a:buClr>
+              <a:buSzPts val="1100"/>
+              <a:buFont typeface="Arial"/>
+              <a:buNone/>
+            </a:pPr>
+            <a:r>
+              <a:rPr lang="en" sz="1000">
+                <a:solidFill>
+                  <a:srgbClr val="042017"/>
+                </a:solidFill>
+                <a:latin typeface="Inter"/>
+                <a:ea typeface="Inter"/>
+                <a:cs typeface="Inter"/>
+                <a:sym typeface="Inter"/>
+              </a:rPr>
+              <a:t>Lorem ipsum dolor sit amet, consectetur adipiscing elit. Fusce vitae commodo mauris. Nullam malesuada nisl a mollis faucibus. Curabitur tincidunt ligula turpis, sed rhoncus odio fermentum pellentesque. Fusce id augue eu lacus ullamcorper pretium a id risus. Donec ac mauris viverra, imperdiet orci eu, aliquet leo. Vestibulum quis augue nec justo scelerisque ultrices. Nulla posuere, sapien at finibus consectetur, eros turpis luctus quam, et ornare magna magna sit amet mauris. Donec maximus, orci ut vestibulum ultrices, magna sem sollicitudin metus, et aliquam erat felis sit amet dui. In eu libero sit amet quam sollicitudin vehicula vitae quis quam. Etiam sit amet dolor aliquet massa iaculis porta.</a:t>
+            </a:r>
+            <a:endParaRPr sz="1000">
+              <a:solidFill>
+                <a:srgbClr val="042017"/>
+              </a:solidFill>
+              <a:latin typeface="Inter"/>
+              <a:ea typeface="Inter"/>
+              <a:cs typeface="Inter"/>
+              <a:sym typeface="Inter"/>
+            </a:endParaRPr>
+          </a:p>
+          <a:p>
+            <a:pPr indent="0" lvl="0" marL="0" rtl="0" algn="l">
+              <a:lnSpc>
+                <a:spcPct val="115000"/>
+              </a:lnSpc>
+              <a:spcBef>
+                <a:spcPts val="0"/>
+              </a:spcBef>
+              <a:spcAft>
+                <a:spcPts val="0"/>
+              </a:spcAft>
+              <a:buClr>
+                <a:schemeClr val="dk1"/>
+              </a:buClr>
+              <a:buSzPts val="1100"/>
+              <a:buFont typeface="Arial"/>
+              <a:buNone/>
+            </a:pPr>
+            <a:r>
+              <a:t/>
+            </a:r>
+            <a:endParaRPr sz="1000">
+              <a:solidFill>
+                <a:srgbClr val="042017"/>
+              </a:solidFill>
+              <a:latin typeface="Inter"/>
+              <a:ea typeface="Inter"/>
+              <a:cs typeface="Inter"/>
+              <a:sym typeface="Inter"/>
+            </a:endParaRPr>
+          </a:p>
+          <a:p>
+            <a:pPr indent="0" lvl="0" marL="0" rtl="0" algn="l">
+              <a:lnSpc>
+                <a:spcPct val="115000"/>
+              </a:lnSpc>
+              <a:spcBef>
+                <a:spcPts val="0"/>
+              </a:spcBef>
+              <a:spcAft>
+                <a:spcPts val="0"/>
+              </a:spcAft>
+              <a:buNone/>
+            </a:pPr>
+            <a:r>
+              <a:t/>
+            </a:r>
+            <a:endParaRPr sz="1000">
+              <a:solidFill>
+                <a:srgbClr val="042017"/>
+              </a:solidFill>
+              <a:latin typeface="Inter"/>
+              <a:ea typeface="Inter"/>
+              <a:cs typeface="Inter"/>
+              <a:sym typeface="Inter"/>
+            </a:endParaRPr>
           </a:p>
         </p:txBody>
       </p:sp>
+      <p:sp>
+        <p:nvSpPr>
+          <p:cNvPr id="144" name="Google Shape;144;p18"/>
+          <p:cNvSpPr txBox="1"/>
+          <p:nvPr/>
+        </p:nvSpPr>
+        <p:spPr>
+          <a:xfrm>
+            <a:off x="467950" y="339124"/>
+            <a:ext cx="7125600" cy="200700"/>
+          </a:xfrm>
+          <a:prstGeom prst="rect">
+            <a:avLst/>
+          </a:prstGeom>
+          <a:noFill/>
+          <a:ln>
+            <a:noFill/>
+          </a:ln>
+        </p:spPr>
+        <p:txBody>
+          <a:bodyPr anchorCtr="0" anchor="t" bIns="0" lIns="0" spcFirstLastPara="1" rIns="0" wrap="square" tIns="0">
+            <a:noAutofit/>
+          </a:bodyPr>
+          <a:lstStyle/>
+          <a:p>
+            <a:pPr indent="0" lvl="0" marL="0" rtl="0" algn="l">
+              <a:lnSpc>
+                <a:spcPct val="85000"/>
+              </a:lnSpc>
+              <a:spcBef>
+                <a:spcPts val="0"/>
+              </a:spcBef>
+              <a:spcAft>
+                <a:spcPts val="0"/>
+              </a:spcAft>
+              <a:buClr>
+                <a:schemeClr val="dk1"/>
+              </a:buClr>
+              <a:buSzPts val="1100"/>
+              <a:buFont typeface="Arial"/>
+              <a:buNone/>
+            </a:pPr>
+            <a:r>
+              <a:rPr b="1" lang="en" sz="900">
+                <a:solidFill>
+                  <a:srgbClr val="7F7F7F"/>
+                </a:solidFill>
+                <a:latin typeface="Inter"/>
+                <a:ea typeface="Inter"/>
+                <a:cs typeface="Inter"/>
+                <a:sym typeface="Inter"/>
+              </a:rPr>
+              <a:t>EYEBROW HEADING</a:t>
+            </a:r>
+            <a:endParaRPr b="1" sz="900">
+              <a:solidFill>
+                <a:srgbClr val="7F7F7F"/>
+              </a:solidFill>
+              <a:latin typeface="Inter"/>
+              <a:ea typeface="Inter"/>
+              <a:cs typeface="Inter"/>
+              <a:sym typeface="Inter"/>
+            </a:endParaRPr>
+          </a:p>
+          <a:p>
+            <a:pPr indent="0" lvl="0" marL="0" rtl="0" algn="l">
+              <a:lnSpc>
+                <a:spcPct val="85000"/>
+              </a:lnSpc>
+              <a:spcBef>
+                <a:spcPts val="0"/>
+              </a:spcBef>
+              <a:spcAft>
+                <a:spcPts val="0"/>
+              </a:spcAft>
+              <a:buClr>
+                <a:schemeClr val="dk1"/>
+              </a:buClr>
+              <a:buSzPts val="1100"/>
+              <a:buFont typeface="Arial"/>
+              <a:buNone/>
+            </a:pPr>
+            <a:r>
+              <a:t/>
+            </a:r>
+            <a:endParaRPr b="1" sz="900">
+              <a:solidFill>
+                <a:srgbClr val="7F7F7F"/>
+              </a:solidFill>
+              <a:latin typeface="Inter"/>
+              <a:ea typeface="Inter"/>
+              <a:cs typeface="Inter"/>
+              <a:sym typeface="Inter"/>
+            </a:endParaRPr>
+          </a:p>
+          <a:p>
+            <a:pPr indent="0" lvl="0" marL="0" rtl="0" algn="l">
+              <a:lnSpc>
+                <a:spcPct val="85000"/>
+              </a:lnSpc>
+              <a:spcBef>
+                <a:spcPts val="0"/>
+              </a:spcBef>
+              <a:spcAft>
+                <a:spcPts val="0"/>
+              </a:spcAft>
+              <a:buNone/>
+            </a:pPr>
+            <a:r>
+              <a:t/>
+            </a:r>
+            <a:endParaRPr b="1" sz="900">
+              <a:solidFill>
+                <a:srgbClr val="7F7F7F"/>
+              </a:solidFill>
+              <a:latin typeface="Inter"/>
+              <a:ea typeface="Inter"/>
+              <a:cs typeface="Inter"/>
+              <a:sym typeface="Inter"/>
+            </a:endParaRPr>
+          </a:p>
+        </p:txBody>
+      </p:sp>
+      <p:pic>
+        <p:nvPicPr>
+          <p:cNvPr id="145" name="Google Shape;145;p18" title="logo-dark.png"/>
+          <p:cNvPicPr preferRelativeResize="0"/>
+          <p:nvPr/>
+        </p:nvPicPr>
+        <p:blipFill rotWithShape="1">
+          <a:blip r:embed="rId3">
+            <a:alphaModFix/>
+          </a:blip>
+          <a:srcRect b="0" l="40" r="40" t="0"/>
+          <a:stretch/>
+        </p:blipFill>
+        <p:spPr>
+          <a:xfrm>
+            <a:off x="493052" y="4663948"/>
+            <a:ext cx="615327" cy="143725"/>
+          </a:xfrm>
+          <a:prstGeom prst="rect">
+            <a:avLst/>
+          </a:prstGeom>
+          <a:noFill/>
+          <a:ln>
+            <a:noFill/>
+          </a:ln>
+        </p:spPr>
+      </p:pic>
     </p:spTree>
   </p:cSld>
   <p:clrMapOvr>
@@ -6376,34 +11326,360 @@
 <file path=ppt/slides/slide8.xml><?xml version="1.0" encoding="utf-8"?>
 <p:sld xmlns:a="http://schemas.openxmlformats.org/drawingml/2006/main" xmlns:p="http://schemas.openxmlformats.org/presentationml/2006/main" xmlns:r="http://schemas.openxmlformats.org/officeDocument/2006/relationships">
   <p:cSld>
+    <p:bg>
+      <p:bgPr>
+        <a:solidFill>
+          <a:srgbClr val="042017"/>
+        </a:solidFill>
+      </p:bgPr>
+    </p:bg>
     <p:spTree>
       <p:nvGrpSpPr>
-        <p:cNvPr id="1" name=""/>
+        <p:cNvPr id="54" name="Shape 54"/>
         <p:cNvGrpSpPr/>
         <p:nvPr/>
       </p:nvGrpSpPr>
-      <p:grpSpPr/>
+      <p:grpSpPr>
+        <a:xfrm>
+          <a:off x="0" y="0"/>
+          <a:ext cx="0" cy="0"/>
+          <a:chOff x="0" y="0"/>
+          <a:chExt cx="0" cy="0"/>
+        </a:xfrm>
+      </p:grpSpPr>
       <p:sp>
         <p:nvSpPr>
-          <p:cNvPr id="2" name="Title 1"/>
-          <p:cNvSpPr>
-            <a:spLocks noGrp="1"/>
-          </p:cNvSpPr>
-          <p:nvPr>
-            <p:ph type="title"/>
-          </p:nvPr>
+          <p:cNvPr id="55" name="Google Shape;55;p14"/>
+          <p:cNvSpPr txBox="1"/>
+          <p:nvPr/>
         </p:nvSpPr>
-        <p:spPr/>
+        <p:spPr>
+          <a:xfrm>
+            <a:off x="658650" y="1516225"/>
+            <a:ext cx="7125600" cy="900000"/>
+          </a:xfrm>
+          <a:prstGeom prst="rect">
+            <a:avLst/>
+          </a:prstGeom>
+          <a:noFill/>
+          <a:ln>
+            <a:noFill/>
+          </a:ln>
+        </p:spPr>
         <p:txBody>
-          <a:bodyPr/>
+          <a:bodyPr anchorCtr="0" anchor="t" bIns="0" lIns="0" spcFirstLastPara="1" rIns="0" wrap="square" tIns="0">
+            <a:noAutofit/>
+          </a:bodyPr>
           <a:lstStyle/>
           <a:p>
-            <a:r>
-              <a:t>What Can Tilda Do?</a:t>
-            </a:r>
+            <a:pPr indent="0" lvl="0" marL="0" rtl="0" algn="l">
+              <a:lnSpc>
+                <a:spcPct val="85000"/>
+              </a:lnSpc>
+              <a:spcBef>
+                <a:spcPts val="0"/>
+              </a:spcBef>
+              <a:spcAft>
+                <a:spcPts val="0"/>
+              </a:spcAft>
+              <a:buNone/>
+            </a:pPr>
+            <a:r>
+              <a:rPr lang="en" sz="3800">
+                <a:solidFill>
+                  <a:srgbClr val="F1E9D6"/>
+                </a:solidFill>
+                <a:latin typeface="Inter SemiBold"/>
+                <a:ea typeface="Inter SemiBold"/>
+                <a:cs typeface="Inter SemiBold"/>
+                <a:sym typeface="Inter SemiBold"/>
+              </a:rPr>
+              <a:t>Presentation titles, </a:t>
+            </a:r>
+            <a:endParaRPr sz="3800">
+              <a:solidFill>
+                <a:srgbClr val="F1E9D6"/>
+              </a:solidFill>
+              <a:latin typeface="Inter SemiBold"/>
+              <a:ea typeface="Inter SemiBold"/>
+              <a:cs typeface="Inter SemiBold"/>
+              <a:sym typeface="Inter SemiBold"/>
+            </a:endParaRPr>
+          </a:p>
+          <a:p>
+            <a:pPr indent="0" lvl="0" marL="0" rtl="0" algn="l">
+              <a:lnSpc>
+                <a:spcPct val="85000"/>
+              </a:lnSpc>
+              <a:spcBef>
+                <a:spcPts val="0"/>
+              </a:spcBef>
+              <a:spcAft>
+                <a:spcPts val="0"/>
+              </a:spcAft>
+              <a:buClr>
+                <a:schemeClr val="dk1"/>
+              </a:buClr>
+              <a:buSzPts val="1100"/>
+              <a:buFont typeface="Arial"/>
+              <a:buNone/>
+            </a:pPr>
+            <a:r>
+              <a:rPr lang="en" sz="3800">
+                <a:solidFill>
+                  <a:srgbClr val="F1E9D6"/>
+                </a:solidFill>
+                <a:latin typeface="Inter SemiBold"/>
+                <a:ea typeface="Inter SemiBold"/>
+                <a:cs typeface="Inter SemiBold"/>
+                <a:sym typeface="Inter SemiBold"/>
+              </a:rPr>
+              <a:t>two lines</a:t>
+            </a:r>
+            <a:endParaRPr sz="3800">
+              <a:solidFill>
+                <a:srgbClr val="F1E9D6"/>
+              </a:solidFill>
+              <a:latin typeface="Inter SemiBold"/>
+              <a:ea typeface="Inter SemiBold"/>
+              <a:cs typeface="Inter SemiBold"/>
+              <a:sym typeface="Inter SemiBold"/>
+            </a:endParaRPr>
+          </a:p>
+          <a:p>
+            <a:pPr indent="0" lvl="0" marL="0" rtl="0" algn="l">
+              <a:lnSpc>
+                <a:spcPct val="85000"/>
+              </a:lnSpc>
+              <a:spcBef>
+                <a:spcPts val="0"/>
+              </a:spcBef>
+              <a:spcAft>
+                <a:spcPts val="0"/>
+              </a:spcAft>
+              <a:buClr>
+                <a:schemeClr val="dk1"/>
+              </a:buClr>
+              <a:buSzPts val="1100"/>
+              <a:buFont typeface="Arial"/>
+              <a:buNone/>
+            </a:pPr>
+            <a:r>
+              <a:t/>
+            </a:r>
+            <a:endParaRPr sz="3800">
+              <a:solidFill>
+                <a:srgbClr val="F1E9D6"/>
+              </a:solidFill>
+              <a:latin typeface="Inter SemiBold"/>
+              <a:ea typeface="Inter SemiBold"/>
+              <a:cs typeface="Inter SemiBold"/>
+              <a:sym typeface="Inter SemiBold"/>
+            </a:endParaRPr>
+          </a:p>
+          <a:p>
+            <a:pPr indent="0" lvl="0" marL="0" rtl="0" algn="l">
+              <a:lnSpc>
+                <a:spcPct val="85000"/>
+              </a:lnSpc>
+              <a:spcBef>
+                <a:spcPts val="0"/>
+              </a:spcBef>
+              <a:spcAft>
+                <a:spcPts val="0"/>
+              </a:spcAft>
+              <a:buNone/>
+            </a:pPr>
+            <a:r>
+              <a:t/>
+            </a:r>
+            <a:endParaRPr sz="3800">
+              <a:solidFill>
+                <a:srgbClr val="F1E9D6"/>
+              </a:solidFill>
+              <a:latin typeface="Inter SemiBold"/>
+              <a:ea typeface="Inter SemiBold"/>
+              <a:cs typeface="Inter SemiBold"/>
+              <a:sym typeface="Inter SemiBold"/>
+            </a:endParaRPr>
           </a:p>
         </p:txBody>
       </p:sp>
+      <p:sp>
+        <p:nvSpPr>
+          <p:cNvPr id="56" name="Google Shape;56;p14"/>
+          <p:cNvSpPr txBox="1"/>
+          <p:nvPr/>
+        </p:nvSpPr>
+        <p:spPr>
+          <a:xfrm>
+            <a:off x="658650" y="2932275"/>
+            <a:ext cx="7125600" cy="200700"/>
+          </a:xfrm>
+          <a:prstGeom prst="rect">
+            <a:avLst/>
+          </a:prstGeom>
+          <a:noFill/>
+          <a:ln>
+            <a:noFill/>
+          </a:ln>
+        </p:spPr>
+        <p:txBody>
+          <a:bodyPr anchorCtr="0" anchor="t" bIns="0" lIns="0" spcFirstLastPara="1" rIns="0" wrap="square" tIns="0">
+            <a:noAutofit/>
+          </a:bodyPr>
+          <a:lstStyle/>
+          <a:p>
+            <a:pPr indent="0" lvl="0" marL="0" rtl="0" algn="l">
+              <a:lnSpc>
+                <a:spcPct val="85000"/>
+              </a:lnSpc>
+              <a:spcBef>
+                <a:spcPts val="0"/>
+              </a:spcBef>
+              <a:spcAft>
+                <a:spcPts val="0"/>
+              </a:spcAft>
+              <a:buNone/>
+            </a:pPr>
+            <a:r>
+              <a:rPr lang="en">
+                <a:solidFill>
+                  <a:srgbClr val="F1E9D6"/>
+                </a:solidFill>
+                <a:latin typeface="Inter SemiBold"/>
+                <a:ea typeface="Inter SemiBold"/>
+                <a:cs typeface="Inter SemiBold"/>
+                <a:sym typeface="Inter SemiBold"/>
+              </a:rPr>
+              <a:t>Subtitle goes here</a:t>
+            </a:r>
+            <a:endParaRPr>
+              <a:solidFill>
+                <a:srgbClr val="F1E9D6"/>
+              </a:solidFill>
+              <a:latin typeface="Inter SemiBold"/>
+              <a:ea typeface="Inter SemiBold"/>
+              <a:cs typeface="Inter SemiBold"/>
+              <a:sym typeface="Inter SemiBold"/>
+            </a:endParaRPr>
+          </a:p>
+        </p:txBody>
+      </p:sp>
+      <p:pic>
+        <p:nvPicPr>
+          <p:cNvPr id="57" name="Google Shape;57;p14" title="logo-light.png"/>
+          <p:cNvPicPr preferRelativeResize="0"/>
+          <p:nvPr/>
+        </p:nvPicPr>
+        <p:blipFill rotWithShape="1">
+          <a:blip r:embed="rId3">
+            <a:alphaModFix/>
+          </a:blip>
+          <a:srcRect b="60" l="0" r="0" t="70"/>
+          <a:stretch/>
+        </p:blipFill>
+        <p:spPr>
+          <a:xfrm>
+            <a:off x="683765" y="399936"/>
+            <a:ext cx="1305252" cy="304875"/>
+          </a:xfrm>
+          <a:prstGeom prst="rect">
+            <a:avLst/>
+          </a:prstGeom>
+          <a:noFill/>
+          <a:ln>
+            <a:noFill/>
+          </a:ln>
+        </p:spPr>
+      </p:pic>
+      <p:sp>
+        <p:nvSpPr>
+          <p:cNvPr id="58" name="Google Shape;58;p14"/>
+          <p:cNvSpPr txBox="1"/>
+          <p:nvPr/>
+        </p:nvSpPr>
+        <p:spPr>
+          <a:xfrm>
+            <a:off x="683775" y="4584950"/>
+            <a:ext cx="4263600" cy="200700"/>
+          </a:xfrm>
+          <a:prstGeom prst="rect">
+            <a:avLst/>
+          </a:prstGeom>
+          <a:noFill/>
+          <a:ln>
+            <a:noFill/>
+          </a:ln>
+        </p:spPr>
+        <p:txBody>
+          <a:bodyPr anchorCtr="0" anchor="t" bIns="0" lIns="0" spcFirstLastPara="1" rIns="0" wrap="square" tIns="0">
+            <a:noAutofit/>
+          </a:bodyPr>
+          <a:lstStyle/>
+          <a:p>
+            <a:pPr indent="0" lvl="0" marL="0" rtl="0" algn="l">
+              <a:lnSpc>
+                <a:spcPct val="85000"/>
+              </a:lnSpc>
+              <a:spcBef>
+                <a:spcPts val="0"/>
+              </a:spcBef>
+              <a:spcAft>
+                <a:spcPts val="0"/>
+              </a:spcAft>
+              <a:buNone/>
+            </a:pPr>
+            <a:r>
+              <a:rPr lang="en" sz="1200">
+                <a:solidFill>
+                  <a:srgbClr val="F1E8D6"/>
+                </a:solidFill>
+                <a:latin typeface="Inter"/>
+                <a:ea typeface="Inter"/>
+                <a:cs typeface="Inter"/>
+                <a:sym typeface="Inter"/>
+              </a:rPr>
+              <a:t>December 1st, 2025</a:t>
+            </a:r>
+            <a:endParaRPr sz="1200">
+              <a:solidFill>
+                <a:srgbClr val="F1E8D6"/>
+              </a:solidFill>
+              <a:latin typeface="Inter"/>
+              <a:ea typeface="Inter"/>
+              <a:cs typeface="Inter"/>
+              <a:sym typeface="Inter"/>
+            </a:endParaRPr>
+          </a:p>
+        </p:txBody>
+      </p:sp>
+      <p:cxnSp>
+        <p:nvCxnSpPr>
+          <p:cNvPr id="59" name="Google Shape;59;p14"/>
+          <p:cNvCxnSpPr/>
+          <p:nvPr/>
+        </p:nvCxnSpPr>
+        <p:spPr>
+          <a:xfrm>
+            <a:off x="671275" y="2689675"/>
+            <a:ext cx="984300" cy="0"/>
+          </a:xfrm>
+          <a:prstGeom prst="straightConnector1">
+            <a:avLst/>
+          </a:prstGeom>
+          <a:noFill/>
+          <a:ln cap="flat" cmpd="sng" w="19050">
+            <a:solidFill>
+              <a:srgbClr val="6ABA48"/>
+            </a:solidFill>
+            <a:prstDash val="solid"/>
+            <a:round/>
+            <a:headEnd len="med" w="med" type="none"/>
+            <a:tailEnd len="med" w="med" type="none"/>
+          </a:ln>
+        </p:spPr>
+      </p:cxnSp>
     </p:spTree>
   </p:cSld>
   <p:clrMapOvr>
@@ -6415,149 +11691,671 @@
 <file path=ppt/slides/slide9.xml><?xml version="1.0" encoding="utf-8"?>
 <p:sld xmlns:a="http://schemas.openxmlformats.org/drawingml/2006/main" xmlns:p="http://schemas.openxmlformats.org/presentationml/2006/main" xmlns:r="http://schemas.openxmlformats.org/officeDocument/2006/relationships">
   <p:cSld>
+    <p:bg>
+      <p:bgPr>
+        <a:solidFill>
+          <a:srgbClr val="F1E8D6"/>
+        </a:solidFill>
+      </p:bgPr>
+    </p:bg>
     <p:spTree>
       <p:nvGrpSpPr>
-        <p:cNvPr id="1" name=""/>
+        <p:cNvPr id="158" name="Shape 158"/>
         <p:cNvGrpSpPr/>
         <p:nvPr/>
       </p:nvGrpSpPr>
-      <p:grpSpPr/>
+      <p:grpSpPr>
+        <a:xfrm>
+          <a:off x="0" y="0"/>
+          <a:ext cx="0" cy="0"/>
+          <a:chOff x="0" y="0"/>
+          <a:chExt cx="0" cy="0"/>
+        </a:xfrm>
+      </p:grpSpPr>
       <p:sp>
         <p:nvSpPr>
-          <p:cNvPr id="2" name="Title 1"/>
-          <p:cNvSpPr>
-            <a:spLocks noGrp="1"/>
-          </p:cNvSpPr>
-          <p:nvPr>
-            <p:ph type="title"/>
-          </p:nvPr>
+          <p:cNvPr id="159" name="Google Shape;159;p20"/>
+          <p:cNvSpPr txBox="1"/>
+          <p:nvPr/>
         </p:nvSpPr>
-        <p:spPr/>
+        <p:spPr>
+          <a:xfrm>
+            <a:off x="467950" y="623324"/>
+            <a:ext cx="5103000" cy="423600"/>
+          </a:xfrm>
+          <a:prstGeom prst="rect">
+            <a:avLst/>
+          </a:prstGeom>
+          <a:noFill/>
+          <a:ln>
+            <a:noFill/>
+          </a:ln>
+        </p:spPr>
         <p:txBody>
-          <a:bodyPr/>
+          <a:bodyPr anchorCtr="0" anchor="t" bIns="0" lIns="0" spcFirstLastPara="1" rIns="0" wrap="square" tIns="0">
+            <a:noAutofit/>
+          </a:bodyPr>
           <a:lstStyle/>
           <a:p>
-            <a:r>
-              <a:t>Current &amp; Future Integrations</a:t>
-            </a:r>
+            <a:pPr indent="0" lvl="0" marL="0" rtl="0" algn="l">
+              <a:lnSpc>
+                <a:spcPct val="85000"/>
+              </a:lnSpc>
+              <a:spcBef>
+                <a:spcPts val="0"/>
+              </a:spcBef>
+              <a:spcAft>
+                <a:spcPts val="0"/>
+              </a:spcAft>
+              <a:buNone/>
+            </a:pPr>
+            <a:r>
+              <a:rPr lang="en" sz="2800">
+                <a:solidFill>
+                  <a:srgbClr val="042017"/>
+                </a:solidFill>
+                <a:latin typeface="Inter SemiBold"/>
+                <a:ea typeface="Inter SemiBold"/>
+                <a:cs typeface="Inter SemiBold"/>
+                <a:sym typeface="Inter SemiBold"/>
+              </a:rPr>
+              <a:t>Title and two-column text</a:t>
+            </a:r>
+            <a:endParaRPr sz="2800">
+              <a:solidFill>
+                <a:srgbClr val="042017"/>
+              </a:solidFill>
+              <a:latin typeface="Inter SemiBold"/>
+              <a:ea typeface="Inter SemiBold"/>
+              <a:cs typeface="Inter SemiBold"/>
+              <a:sym typeface="Inter SemiBold"/>
+            </a:endParaRPr>
+          </a:p>
+          <a:p>
+            <a:pPr indent="0" lvl="0" marL="0" rtl="0" algn="l">
+              <a:lnSpc>
+                <a:spcPct val="85000"/>
+              </a:lnSpc>
+              <a:spcBef>
+                <a:spcPts val="0"/>
+              </a:spcBef>
+              <a:spcAft>
+                <a:spcPts val="0"/>
+              </a:spcAft>
+              <a:buNone/>
+            </a:pPr>
+            <a:r>
+              <a:t/>
+            </a:r>
+            <a:endParaRPr sz="2800">
+              <a:solidFill>
+                <a:srgbClr val="042017"/>
+              </a:solidFill>
+              <a:latin typeface="Inter SemiBold"/>
+              <a:ea typeface="Inter SemiBold"/>
+              <a:cs typeface="Inter SemiBold"/>
+              <a:sym typeface="Inter SemiBold"/>
+            </a:endParaRPr>
+          </a:p>
+          <a:p>
+            <a:pPr indent="0" lvl="0" marL="0" rtl="0" algn="l">
+              <a:lnSpc>
+                <a:spcPct val="85000"/>
+              </a:lnSpc>
+              <a:spcBef>
+                <a:spcPts val="0"/>
+              </a:spcBef>
+              <a:spcAft>
+                <a:spcPts val="0"/>
+              </a:spcAft>
+              <a:buNone/>
+            </a:pPr>
+            <a:r>
+              <a:t/>
+            </a:r>
+            <a:endParaRPr sz="2800">
+              <a:solidFill>
+                <a:srgbClr val="042017"/>
+              </a:solidFill>
+              <a:latin typeface="Inter SemiBold"/>
+              <a:ea typeface="Inter SemiBold"/>
+              <a:cs typeface="Inter SemiBold"/>
+              <a:sym typeface="Inter SemiBold"/>
+            </a:endParaRPr>
+          </a:p>
+          <a:p>
+            <a:pPr indent="0" lvl="0" marL="0" rtl="0" algn="l">
+              <a:lnSpc>
+                <a:spcPct val="85000"/>
+              </a:lnSpc>
+              <a:spcBef>
+                <a:spcPts val="0"/>
+              </a:spcBef>
+              <a:spcAft>
+                <a:spcPts val="0"/>
+              </a:spcAft>
+              <a:buNone/>
+            </a:pPr>
+            <a:r>
+              <a:t/>
+            </a:r>
+            <a:endParaRPr sz="2800">
+              <a:solidFill>
+                <a:srgbClr val="042017"/>
+              </a:solidFill>
+              <a:latin typeface="Inter SemiBold"/>
+              <a:ea typeface="Inter SemiBold"/>
+              <a:cs typeface="Inter SemiBold"/>
+              <a:sym typeface="Inter SemiBold"/>
+            </a:endParaRPr>
+          </a:p>
+          <a:p>
+            <a:pPr indent="0" lvl="0" marL="0" rtl="0" algn="l">
+              <a:lnSpc>
+                <a:spcPct val="85000"/>
+              </a:lnSpc>
+              <a:spcBef>
+                <a:spcPts val="0"/>
+              </a:spcBef>
+              <a:spcAft>
+                <a:spcPts val="0"/>
+              </a:spcAft>
+              <a:buNone/>
+            </a:pPr>
+            <a:r>
+              <a:t/>
+            </a:r>
+            <a:endParaRPr sz="2800">
+              <a:solidFill>
+                <a:srgbClr val="042017"/>
+              </a:solidFill>
+              <a:latin typeface="Inter SemiBold"/>
+              <a:ea typeface="Inter SemiBold"/>
+              <a:cs typeface="Inter SemiBold"/>
+              <a:sym typeface="Inter SemiBold"/>
+            </a:endParaRPr>
+          </a:p>
+          <a:p>
+            <a:pPr indent="0" lvl="0" marL="0" rtl="0" algn="l">
+              <a:lnSpc>
+                <a:spcPct val="85000"/>
+              </a:lnSpc>
+              <a:spcBef>
+                <a:spcPts val="0"/>
+              </a:spcBef>
+              <a:spcAft>
+                <a:spcPts val="0"/>
+              </a:spcAft>
+              <a:buNone/>
+            </a:pPr>
+            <a:r>
+              <a:t/>
+            </a:r>
+            <a:endParaRPr sz="2800">
+              <a:solidFill>
+                <a:srgbClr val="042017"/>
+              </a:solidFill>
+              <a:latin typeface="Inter SemiBold"/>
+              <a:ea typeface="Inter SemiBold"/>
+              <a:cs typeface="Inter SemiBold"/>
+              <a:sym typeface="Inter SemiBold"/>
+            </a:endParaRPr>
+          </a:p>
+        </p:txBody>
+      </p:sp>
+      <p:pic>
+        <p:nvPicPr>
+          <p:cNvPr id="160" name="Google Shape;160;p20" title="logo-dark.png"/>
+          <p:cNvPicPr preferRelativeResize="0"/>
+          <p:nvPr/>
+        </p:nvPicPr>
+        <p:blipFill rotWithShape="1">
+          <a:blip r:embed="rId3">
+            <a:alphaModFix/>
+          </a:blip>
+          <a:srcRect b="0" l="40" r="40" t="0"/>
+          <a:stretch/>
+        </p:blipFill>
+        <p:spPr>
+          <a:xfrm>
+            <a:off x="493052" y="4663948"/>
+            <a:ext cx="615327" cy="143725"/>
+          </a:xfrm>
+          <a:prstGeom prst="rect">
+            <a:avLst/>
+          </a:prstGeom>
+          <a:noFill/>
+          <a:ln>
+            <a:noFill/>
+          </a:ln>
+        </p:spPr>
+      </p:pic>
+      <p:sp>
+        <p:nvSpPr>
+          <p:cNvPr id="161" name="Google Shape;161;p20"/>
+          <p:cNvSpPr txBox="1"/>
+          <p:nvPr/>
+        </p:nvSpPr>
+        <p:spPr>
+          <a:xfrm>
+            <a:off x="467950" y="339124"/>
+            <a:ext cx="7125600" cy="200700"/>
+          </a:xfrm>
+          <a:prstGeom prst="rect">
+            <a:avLst/>
+          </a:prstGeom>
+          <a:noFill/>
+          <a:ln>
+            <a:noFill/>
+          </a:ln>
+        </p:spPr>
+        <p:txBody>
+          <a:bodyPr anchorCtr="0" anchor="t" bIns="0" lIns="0" spcFirstLastPara="1" rIns="0" wrap="square" tIns="0">
+            <a:noAutofit/>
+          </a:bodyPr>
+          <a:lstStyle/>
+          <a:p>
+            <a:pPr indent="0" lvl="0" marL="0" rtl="0" algn="l">
+              <a:lnSpc>
+                <a:spcPct val="85000"/>
+              </a:lnSpc>
+              <a:spcBef>
+                <a:spcPts val="0"/>
+              </a:spcBef>
+              <a:spcAft>
+                <a:spcPts val="0"/>
+              </a:spcAft>
+              <a:buNone/>
+            </a:pPr>
+            <a:r>
+              <a:rPr b="1" lang="en" sz="900">
+                <a:solidFill>
+                  <a:srgbClr val="7F7F7F"/>
+                </a:solidFill>
+                <a:latin typeface="Inter"/>
+                <a:ea typeface="Inter"/>
+                <a:cs typeface="Inter"/>
+                <a:sym typeface="Inter"/>
+              </a:rPr>
+              <a:t>EYEBROW HEADING</a:t>
+            </a:r>
+            <a:endParaRPr b="1" sz="900">
+              <a:solidFill>
+                <a:srgbClr val="7F7F7F"/>
+              </a:solidFill>
+              <a:latin typeface="Inter"/>
+              <a:ea typeface="Inter"/>
+              <a:cs typeface="Inter"/>
+              <a:sym typeface="Inter"/>
+            </a:endParaRPr>
+          </a:p>
+          <a:p>
+            <a:pPr indent="0" lvl="0" marL="0" rtl="0" algn="l">
+              <a:lnSpc>
+                <a:spcPct val="85000"/>
+              </a:lnSpc>
+              <a:spcBef>
+                <a:spcPts val="0"/>
+              </a:spcBef>
+              <a:spcAft>
+                <a:spcPts val="0"/>
+              </a:spcAft>
+              <a:buNone/>
+            </a:pPr>
+            <a:r>
+              <a:t/>
+            </a:r>
+            <a:endParaRPr b="1" sz="900">
+              <a:solidFill>
+                <a:srgbClr val="7F7F7F"/>
+              </a:solidFill>
+              <a:latin typeface="Inter"/>
+              <a:ea typeface="Inter"/>
+              <a:cs typeface="Inter"/>
+              <a:sym typeface="Inter"/>
+            </a:endParaRPr>
+          </a:p>
+          <a:p>
+            <a:pPr indent="0" lvl="0" marL="0" rtl="0" algn="l">
+              <a:lnSpc>
+                <a:spcPct val="85000"/>
+              </a:lnSpc>
+              <a:spcBef>
+                <a:spcPts val="0"/>
+              </a:spcBef>
+              <a:spcAft>
+                <a:spcPts val="0"/>
+              </a:spcAft>
+              <a:buNone/>
+            </a:pPr>
+            <a:r>
+              <a:t/>
+            </a:r>
+            <a:endParaRPr b="1" sz="900">
+              <a:solidFill>
+                <a:srgbClr val="7F7F7F"/>
+              </a:solidFill>
+              <a:latin typeface="Inter"/>
+              <a:ea typeface="Inter"/>
+              <a:cs typeface="Inter"/>
+              <a:sym typeface="Inter"/>
+            </a:endParaRPr>
           </a:p>
         </p:txBody>
       </p:sp>
       <p:sp>
         <p:nvSpPr>
-          <p:cNvPr id="3" name="Text Placeholder 2"/>
-          <p:cNvSpPr>
-            <a:spLocks noGrp="1"/>
-          </p:cNvSpPr>
-          <p:nvPr>
-            <p:ph type="body" idx="1"/>
-          </p:nvPr>
+          <p:cNvPr id="162" name="Google Shape;162;p20"/>
+          <p:cNvSpPr txBox="1"/>
+          <p:nvPr/>
         </p:nvSpPr>
-        <p:spPr/>
+        <p:spPr>
+          <a:xfrm>
+            <a:off x="467950" y="1469674"/>
+            <a:ext cx="3718500" cy="2467800"/>
+          </a:xfrm>
+          <a:prstGeom prst="rect">
+            <a:avLst/>
+          </a:prstGeom>
+          <a:noFill/>
+          <a:ln>
+            <a:noFill/>
+          </a:ln>
+        </p:spPr>
         <p:txBody>
-          <a:bodyPr/>
+          <a:bodyPr anchorCtr="0" anchor="t" bIns="0" lIns="0" spcFirstLastPara="1" rIns="0" wrap="square" tIns="0">
+            <a:noAutofit/>
+          </a:bodyPr>
           <a:lstStyle/>
           <a:p>
-            <a:r>
-              <a:t>Current Integrations:</a:t>
-            </a:r>
-          </a:p>
-          <a:p>
-            <a:r>
-              <a:t>• Slack (threads, channels, search)</a:t>
-            </a:r>
-          </a:p>
-          <a:p>
-            <a:r>
-              <a:t>• Confluence (pages, spaces, search)</a:t>
-            </a:r>
-          </a:p>
-          <a:p>
-            <a:r>
-              <a:t>• JIRA (tickets, search, updates)</a:t>
-            </a:r>
-          </a:p>
-          <a:p>
-            <a:r>
-              <a:t>• Monday.com (boards, items)</a:t>
-            </a:r>
-          </a:p>
-          <a:p>
-            <a:r>
-              <a:t>• Pendo (analytics)</a:t>
-            </a:r>
-          </a:p>
-          <a:p>
-            <a:r>
-              <a:t>• LaunchDarkly (feature flags)</a:t>
-            </a:r>
-          </a:p>
-          <a:p>
-            <a:r>
-              <a:t>• incident.io (incidents)</a:t>
-            </a:r>
-          </a:p>
-          <a:p>
-            <a:r>
-              <a:t>• Vision (images, PDFs)</a:t>
-            </a:r>
-          </a:p>
-          <a:p>
-            <a:r>
-              <a:t>• Memory (cross-conversation)</a:t>
-            </a:r>
+            <a:pPr indent="0" lvl="0" marL="0" rtl="0" algn="l">
+              <a:lnSpc>
+                <a:spcPct val="150000"/>
+              </a:lnSpc>
+              <a:spcBef>
+                <a:spcPts val="0"/>
+              </a:spcBef>
+              <a:spcAft>
+                <a:spcPts val="0"/>
+              </a:spcAft>
+              <a:buNone/>
+            </a:pPr>
+            <a:r>
+              <a:rPr lang="en">
+                <a:solidFill>
+                  <a:srgbClr val="042017"/>
+                </a:solidFill>
+                <a:latin typeface="Inter SemiBold"/>
+                <a:ea typeface="Inter SemiBold"/>
+                <a:cs typeface="Inter SemiBold"/>
+                <a:sym typeface="Inter SemiBold"/>
+              </a:rPr>
+              <a:t>Subheading</a:t>
+            </a:r>
+            <a:endParaRPr>
+              <a:solidFill>
+                <a:srgbClr val="042017"/>
+              </a:solidFill>
+              <a:latin typeface="Inter SemiBold"/>
+              <a:ea typeface="Inter SemiBold"/>
+              <a:cs typeface="Inter SemiBold"/>
+              <a:sym typeface="Inter SemiBold"/>
+            </a:endParaRPr>
+          </a:p>
+          <a:p>
+            <a:pPr indent="0" lvl="0" marL="0" rtl="0" algn="l">
+              <a:lnSpc>
+                <a:spcPct val="115000"/>
+              </a:lnSpc>
+              <a:spcBef>
+                <a:spcPts val="0"/>
+              </a:spcBef>
+              <a:spcAft>
+                <a:spcPts val="0"/>
+              </a:spcAft>
+              <a:buNone/>
+            </a:pPr>
+            <a:r>
+              <a:rPr lang="en" sz="1000">
+                <a:solidFill>
+                  <a:srgbClr val="042017"/>
+                </a:solidFill>
+                <a:latin typeface="Inter"/>
+                <a:ea typeface="Inter"/>
+                <a:cs typeface="Inter"/>
+                <a:sym typeface="Inter"/>
+              </a:rPr>
+              <a:t>Lorem ipsum dolor sit amet, consectetur adipiscing elit. Fusce vitae commodo mauris. Nullam malesuada nisl a mollis faucibus. Curabitur tincidunt ligula turpis, sed rhoncus odio fermentum pellentesque. Fusce id augue eu lacus ullamcorper pretium a id risus. Donec ac mauris viverra, imperdiet orci eu, aliquet leo. </a:t>
+            </a:r>
+            <a:endParaRPr sz="1000">
+              <a:solidFill>
+                <a:srgbClr val="042017"/>
+              </a:solidFill>
+              <a:latin typeface="Inter"/>
+              <a:ea typeface="Inter"/>
+              <a:cs typeface="Inter"/>
+              <a:sym typeface="Inter"/>
+            </a:endParaRPr>
           </a:p>
         </p:txBody>
       </p:sp>
       <p:sp>
         <p:nvSpPr>
-          <p:cNvPr id="4" name="Text Placeholder 3"/>
-          <p:cNvSpPr>
-            <a:spLocks noGrp="1"/>
-          </p:cNvSpPr>
-          <p:nvPr>
-            <p:ph type="body" idx="2"/>
-          </p:nvPr>
+          <p:cNvPr id="163" name="Google Shape;163;p20"/>
+          <p:cNvSpPr txBox="1"/>
+          <p:nvPr/>
         </p:nvSpPr>
-        <p:spPr/>
+        <p:spPr>
+          <a:xfrm>
+            <a:off x="4572000" y="1469674"/>
+            <a:ext cx="3718500" cy="2467800"/>
+          </a:xfrm>
+          <a:prstGeom prst="rect">
+            <a:avLst/>
+          </a:prstGeom>
+          <a:noFill/>
+          <a:ln>
+            <a:noFill/>
+          </a:ln>
+        </p:spPr>
         <p:txBody>
-          <a:bodyPr/>
+          <a:bodyPr anchorCtr="0" anchor="t" bIns="0" lIns="0" spcFirstLastPara="1" rIns="0" wrap="square" tIns="0">
+            <a:noAutofit/>
+          </a:bodyPr>
           <a:lstStyle/>
           <a:p>
-            <a:r>
-              <a:t>Future Integrations:</a:t>
-            </a:r>
-          </a:p>
-          <a:p>
-            <a:r>
-              <a:t>• Gong (call recordings)</a:t>
-            </a:r>
-          </a:p>
-          <a:p>
-            <a:r>
-              <a:t>• Snowflake (data warehouse)</a:t>
-            </a:r>
-          </a:p>
-          <a:p>
-            <a:r>
-              <a:t>• Google Docs/Drive</a:t>
-            </a:r>
-          </a:p>
-          <a:p>
-            <a:r>
-              <a:t>• Salesforce (CRM)</a:t>
-            </a:r>
-          </a:p>
-          <a:p>
-            <a:r>
-              <a:t>• Zendesk (support tickets)</a:t>
-            </a:r>
-          </a:p>
-          <a:p/>
-          <a:p>
-            <a:r>
-              <a:t>Tilda's architecture is modular — new integrations are added as skills.</a:t>
-            </a:r>
+            <a:pPr indent="0" lvl="0" marL="0" rtl="0" algn="l">
+              <a:lnSpc>
+                <a:spcPct val="150000"/>
+              </a:lnSpc>
+              <a:spcBef>
+                <a:spcPts val="0"/>
+              </a:spcBef>
+              <a:spcAft>
+                <a:spcPts val="0"/>
+              </a:spcAft>
+              <a:buNone/>
+            </a:pPr>
+            <a:r>
+              <a:rPr lang="en">
+                <a:solidFill>
+                  <a:srgbClr val="042017"/>
+                </a:solidFill>
+                <a:latin typeface="Inter SemiBold"/>
+                <a:ea typeface="Inter SemiBold"/>
+                <a:cs typeface="Inter SemiBold"/>
+                <a:sym typeface="Inter SemiBold"/>
+              </a:rPr>
+              <a:t>Subheading </a:t>
+            </a:r>
+            <a:endParaRPr>
+              <a:solidFill>
+                <a:srgbClr val="042017"/>
+              </a:solidFill>
+              <a:latin typeface="Inter SemiBold"/>
+              <a:ea typeface="Inter SemiBold"/>
+              <a:cs typeface="Inter SemiBold"/>
+              <a:sym typeface="Inter SemiBold"/>
+            </a:endParaRPr>
+          </a:p>
+          <a:p>
+            <a:pPr indent="0" lvl="0" marL="0" rtl="0" algn="l">
+              <a:lnSpc>
+                <a:spcPct val="115000"/>
+              </a:lnSpc>
+              <a:spcBef>
+                <a:spcPts val="0"/>
+              </a:spcBef>
+              <a:spcAft>
+                <a:spcPts val="0"/>
+              </a:spcAft>
+              <a:buNone/>
+            </a:pPr>
+            <a:r>
+              <a:rPr lang="en" sz="1000">
+                <a:solidFill>
+                  <a:srgbClr val="042017"/>
+                </a:solidFill>
+                <a:latin typeface="Inter"/>
+                <a:ea typeface="Inter"/>
+                <a:cs typeface="Inter"/>
+                <a:sym typeface="Inter"/>
+              </a:rPr>
+              <a:t>Lorem ipsum dolor sit amet, consectetur adipiscing elit. Fusce vitae commodo mauris. Nullam malesuada nisl a mollis faucibus. Curabitur tincidunt ligula turpis, sed rhoncus odio fermentum pellentesque. Fusce id augue eu lacus ullamcorper pretium a id risus. Donec ac mauris viverra, imperdiet orci eu, aliquet leo. </a:t>
+            </a:r>
+            <a:endParaRPr sz="1000">
+              <a:solidFill>
+                <a:srgbClr val="042017"/>
+              </a:solidFill>
+              <a:latin typeface="Inter"/>
+              <a:ea typeface="Inter"/>
+              <a:cs typeface="Inter"/>
+              <a:sym typeface="Inter"/>
+            </a:endParaRPr>
+          </a:p>
+        </p:txBody>
+      </p:sp>
+      <p:sp>
+        <p:nvSpPr>
+          <p:cNvPr id="164" name="Google Shape;164;p20"/>
+          <p:cNvSpPr/>
+          <p:nvPr/>
+        </p:nvSpPr>
+        <p:spPr>
+          <a:xfrm>
+            <a:off x="5700500" y="1497474"/>
+            <a:ext cx="534900" cy="169200"/>
+          </a:xfrm>
+          <a:prstGeom prst="roundRect">
+            <a:avLst>
+              <a:gd fmla="val 50000" name="adj"/>
+            </a:avLst>
+          </a:prstGeom>
+          <a:solidFill>
+            <a:srgbClr val="5E324E"/>
+          </a:solidFill>
+          <a:ln>
+            <a:noFill/>
+          </a:ln>
+        </p:spPr>
+        <p:txBody>
+          <a:bodyPr anchorCtr="0" anchor="ctr" bIns="0" lIns="0" spcFirstLastPara="1" rIns="0" wrap="square" tIns="0">
+            <a:noAutofit/>
+          </a:bodyPr>
+          <a:lstStyle/>
+          <a:p>
+            <a:pPr indent="0" lvl="0" marL="0" rtl="0" algn="ctr">
+              <a:spcBef>
+                <a:spcPts val="0"/>
+              </a:spcBef>
+              <a:spcAft>
+                <a:spcPts val="0"/>
+              </a:spcAft>
+              <a:buNone/>
+            </a:pPr>
+            <a:r>
+              <a:rPr lang="en" sz="700">
+                <a:solidFill>
+                  <a:srgbClr val="F1E9D6"/>
+                </a:solidFill>
+                <a:latin typeface="Inter SemiBold"/>
+                <a:ea typeface="Inter SemiBold"/>
+                <a:cs typeface="Inter SemiBold"/>
+                <a:sym typeface="Inter SemiBold"/>
+              </a:rPr>
+              <a:t>Label</a:t>
+            </a:r>
+            <a:endParaRPr sz="700">
+              <a:solidFill>
+                <a:srgbClr val="F1E9D6"/>
+              </a:solidFill>
+              <a:latin typeface="Inter SemiBold"/>
+              <a:ea typeface="Inter SemiBold"/>
+              <a:cs typeface="Inter SemiBold"/>
+              <a:sym typeface="Inter SemiBold"/>
+            </a:endParaRPr>
+          </a:p>
+        </p:txBody>
+      </p:sp>
+      <p:sp>
+        <p:nvSpPr>
+          <p:cNvPr id="165" name="Google Shape;165;p20"/>
+          <p:cNvSpPr/>
+          <p:nvPr/>
+        </p:nvSpPr>
+        <p:spPr>
+          <a:xfrm>
+            <a:off x="1546575" y="1497474"/>
+            <a:ext cx="534900" cy="169200"/>
+          </a:xfrm>
+          <a:prstGeom prst="roundRect">
+            <a:avLst>
+              <a:gd fmla="val 50000" name="adj"/>
+            </a:avLst>
+          </a:prstGeom>
+          <a:solidFill>
+            <a:srgbClr val="6ABA48"/>
+          </a:solidFill>
+          <a:ln>
+            <a:noFill/>
+          </a:ln>
+        </p:spPr>
+        <p:txBody>
+          <a:bodyPr anchorCtr="0" anchor="ctr" bIns="0" lIns="0" spcFirstLastPara="1" rIns="0" wrap="square" tIns="0">
+            <a:noAutofit/>
+          </a:bodyPr>
+          <a:lstStyle/>
+          <a:p>
+            <a:pPr indent="0" lvl="0" marL="0" rtl="0" algn="ctr">
+              <a:spcBef>
+                <a:spcPts val="0"/>
+              </a:spcBef>
+              <a:spcAft>
+                <a:spcPts val="0"/>
+              </a:spcAft>
+              <a:buNone/>
+            </a:pPr>
+            <a:r>
+              <a:rPr lang="en" sz="700">
+                <a:solidFill>
+                  <a:srgbClr val="F1E9D6"/>
+                </a:solidFill>
+                <a:latin typeface="Inter SemiBold"/>
+                <a:ea typeface="Inter SemiBold"/>
+                <a:cs typeface="Inter SemiBold"/>
+                <a:sym typeface="Inter SemiBold"/>
+              </a:rPr>
+              <a:t>Label</a:t>
+            </a:r>
+            <a:endParaRPr sz="700">
+              <a:solidFill>
+                <a:srgbClr val="F1E9D6"/>
+              </a:solidFill>
+              <a:latin typeface="Inter SemiBold"/>
+              <a:ea typeface="Inter SemiBold"/>
+              <a:cs typeface="Inter SemiBold"/>
+              <a:sym typeface="Inter SemiBold"/>
+            </a:endParaRPr>
           </a:p>
         </p:txBody>
       </p:sp>
